--- a/Data Eco System/2-Exploring the Data Ecosystem.pptx
+++ b/Data Eco System/2-Exploring the Data Ecosystem.pptx
@@ -5,22 +5,24 @@
     <p:sldMasterId id="2147483660" r:id="rId1"/>
   </p:sldMasterIdLst>
   <p:notesMasterIdLst>
-    <p:notesMasterId r:id="rId15"/>
+    <p:notesMasterId r:id="rId17"/>
   </p:notesMasterIdLst>
   <p:sldIdLst>
     <p:sldId id="2561" r:id="rId2"/>
-    <p:sldId id="2562" r:id="rId3"/>
-    <p:sldId id="2563" r:id="rId4"/>
-    <p:sldId id="2564" r:id="rId5"/>
-    <p:sldId id="2565" r:id="rId6"/>
-    <p:sldId id="2566" r:id="rId7"/>
-    <p:sldId id="2567" r:id="rId8"/>
-    <p:sldId id="2568" r:id="rId9"/>
-    <p:sldId id="2569" r:id="rId10"/>
-    <p:sldId id="2570" r:id="rId11"/>
-    <p:sldId id="2571" r:id="rId12"/>
-    <p:sldId id="2572" r:id="rId13"/>
-    <p:sldId id="2573" r:id="rId14"/>
+    <p:sldId id="2574" r:id="rId3"/>
+    <p:sldId id="2562" r:id="rId4"/>
+    <p:sldId id="2563" r:id="rId5"/>
+    <p:sldId id="2564" r:id="rId6"/>
+    <p:sldId id="2565" r:id="rId7"/>
+    <p:sldId id="2566" r:id="rId8"/>
+    <p:sldId id="2567" r:id="rId9"/>
+    <p:sldId id="2568" r:id="rId10"/>
+    <p:sldId id="2569" r:id="rId11"/>
+    <p:sldId id="2570" r:id="rId12"/>
+    <p:sldId id="2581" r:id="rId13"/>
+    <p:sldId id="2571" r:id="rId14"/>
+    <p:sldId id="2572" r:id="rId15"/>
+    <p:sldId id="2573" r:id="rId16"/>
   </p:sldIdLst>
   <p:sldSz cx="12192000" cy="6858000"/>
   <p:notesSz cx="6858000" cy="9144000"/>
@@ -125,6 +127,7 @@
         <p14:section name="Exploring the Data Ecosystem" id="{42FFF47F-3EA6-4221-8098-62CFE4F4084A}">
           <p14:sldIdLst>
             <p14:sldId id="2561"/>
+            <p14:sldId id="2574"/>
             <p14:sldId id="2562"/>
           </p14:sldIdLst>
         </p14:section>
@@ -142,6 +145,7 @@
             <p14:sldId id="2568"/>
             <p14:sldId id="2569"/>
             <p14:sldId id="2570"/>
+            <p14:sldId id="2581"/>
             <p14:sldId id="2571"/>
             <p14:sldId id="2572"/>
           </p14:sldIdLst>
@@ -3319,7 +3323,7 @@
           <a:p>
             <a:fld id="{0EDBD84A-E274-4935-A872-A1E460892886}" type="datetimeFigureOut">
               <a:rPr lang="en-IN" smtClean="0"/>
-              <a:t>03-Oct-2024 Thu</a:t>
+              <a:t>04-Oct-2024 Fri</a:t>
             </a:fld>
             <a:endParaRPr lang="en-IN"/>
           </a:p>
@@ -3720,7 +3724,7 @@
           <a:p>
             <a:r>
               <a:rPr lang="en-IN"/>
-              <a:t>Big data technologies are designed to handle the unique challenges of big data, such as Hadoop, Spark, and NoSQL databases. These technologies enable organizations to process, store, and analyze large and complex datasets.</a:t>
+              <a:t>Big data is defined by the four Vs: volume, velocity, variety, and veracity. Big data is characterized by its sheer size, speed, and complexity.</a:t>
             </a:r>
           </a:p>
         </p:txBody>
@@ -3751,7 +3755,7 @@
     </p:spTree>
     <p:extLst>
       <p:ext uri="{BB962C8B-B14F-4D97-AF65-F5344CB8AC3E}">
-        <p14:creationId xmlns:p14="http://schemas.microsoft.com/office/powerpoint/2010/main" val="4182653416"/>
+        <p14:creationId xmlns:p14="http://schemas.microsoft.com/office/powerpoint/2010/main" val="3924473501"/>
       </p:ext>
     </p:extLst>
   </p:cSld>
@@ -3807,7 +3811,7 @@
           <a:p>
             <a:r>
               <a:rPr lang="en-IN"/>
-              <a:t>Big data poses unique challenges, such as data quality, security, and privacy. In addition, there are technical challenges, such as scalability and performance.</a:t>
+              <a:t>Big data technologies are designed to handle the unique challenges of big data, such as Hadoop, Spark, and NoSQL databases. These technologies enable organizations to process, store, and analyze large and complex datasets.</a:t>
             </a:r>
           </a:p>
         </p:txBody>
@@ -3838,7 +3842,7 @@
     </p:spTree>
     <p:extLst>
       <p:ext uri="{BB962C8B-B14F-4D97-AF65-F5344CB8AC3E}">
-        <p14:creationId xmlns:p14="http://schemas.microsoft.com/office/powerpoint/2010/main" val="2463213767"/>
+        <p14:creationId xmlns:p14="http://schemas.microsoft.com/office/powerpoint/2010/main" val="4182653416"/>
       </p:ext>
     </p:extLst>
   </p:cSld>
@@ -3894,7 +3898,7 @@
           <a:p>
             <a:r>
               <a:rPr lang="en-IN"/>
-              <a:t>Big data has many applications, including predictive analytics, personalized marketing, and fraud detection. It has the potential to transform many industries, from healthcare to finance.</a:t>
+              <a:t>Big Data is defined by the four Vs: Volume, Velocity, Variety, and Veracity, while Value refers to the benefits derived from analyzing Big Data. Organizations manage and extract useful information from complex data sets using the 5V's.</a:t>
             </a:r>
           </a:p>
         </p:txBody>
@@ -3914,7 +3918,7 @@
           <a:bodyPr/>
           <a:lstStyle/>
           <a:p>
-            <a:fld id="{1842A370-C676-452B-A70E-1B62CA9DC4BE}" type="slidenum">
+            <a:fld id="{1A0BF369-99E3-4A84-9FB9-BF5BFB2DD12B}" type="slidenum">
               <a:rPr lang="en-IN" smtClean="0"/>
               <a:t>12</a:t>
             </a:fld>
@@ -3925,7 +3929,7 @@
     </p:spTree>
     <p:extLst>
       <p:ext uri="{BB962C8B-B14F-4D97-AF65-F5344CB8AC3E}">
-        <p14:creationId xmlns:p14="http://schemas.microsoft.com/office/powerpoint/2010/main" val="665774467"/>
+        <p14:creationId xmlns:p14="http://schemas.microsoft.com/office/powerpoint/2010/main" val="3192975082"/>
       </p:ext>
     </p:extLst>
   </p:cSld>
@@ -3981,7 +3985,7 @@
           <a:p>
             <a:r>
               <a:rPr lang="en-IN"/>
-              <a:t>Data is the foundation of the digital age, and understanding the different types of data and their unique challenges and benefits is essential for any organization. Whether you're dealing with structured data, unstructured data, or big data, there are tools and technologies available to help you make sense of your data.</a:t>
+              <a:t>Big data poses unique challenges, such as data quality, security, and privacy. In addition, there are technical challenges, such as scalability and performance.</a:t>
             </a:r>
           </a:p>
         </p:txBody>
@@ -4004,6 +4008,180 @@
             <a:fld id="{1842A370-C676-452B-A70E-1B62CA9DC4BE}" type="slidenum">
               <a:rPr lang="en-IN" smtClean="0"/>
               <a:t>13</a:t>
+            </a:fld>
+            <a:endParaRPr lang="en-IN"/>
+          </a:p>
+        </p:txBody>
+      </p:sp>
+    </p:spTree>
+    <p:extLst>
+      <p:ext uri="{BB962C8B-B14F-4D97-AF65-F5344CB8AC3E}">
+        <p14:creationId xmlns:p14="http://schemas.microsoft.com/office/powerpoint/2010/main" val="2463213767"/>
+      </p:ext>
+    </p:extLst>
+  </p:cSld>
+  <p:clrMapOvr>
+    <a:masterClrMapping/>
+  </p:clrMapOvr>
+</p:notes>
+</file>
+
+<file path=ppt/notesSlides/notesSlide14.xml><?xml version="1.0" encoding="utf-8"?>
+<p:notes xmlns:a="http://schemas.openxmlformats.org/drawingml/2006/main" xmlns:r="http://schemas.openxmlformats.org/officeDocument/2006/relationships" xmlns:p="http://schemas.openxmlformats.org/presentationml/2006/main">
+  <p:cSld>
+    <p:spTree>
+      <p:nvGrpSpPr>
+        <p:cNvPr id="1" name=""/>
+        <p:cNvGrpSpPr/>
+        <p:nvPr/>
+      </p:nvGrpSpPr>
+      <p:grpSpPr>
+        <a:xfrm>
+          <a:off x="0" y="0"/>
+          <a:ext cx="0" cy="0"/>
+          <a:chOff x="0" y="0"/>
+          <a:chExt cx="0" cy="0"/>
+        </a:xfrm>
+      </p:grpSpPr>
+      <p:sp>
+        <p:nvSpPr>
+          <p:cNvPr id="2" name="Slide Image Placeholder 1"/>
+          <p:cNvSpPr>
+            <a:spLocks noGrp="1" noRot="1" noChangeAspect="1"/>
+          </p:cNvSpPr>
+          <p:nvPr>
+            <p:ph type="sldImg"/>
+          </p:nvPr>
+        </p:nvSpPr>
+        <p:spPr/>
+      </p:sp>
+      <p:sp>
+        <p:nvSpPr>
+          <p:cNvPr id="3" name="Notes Placeholder 2"/>
+          <p:cNvSpPr>
+            <a:spLocks noGrp="1"/>
+          </p:cNvSpPr>
+          <p:nvPr>
+            <p:ph type="body" idx="1"/>
+          </p:nvPr>
+        </p:nvSpPr>
+        <p:spPr/>
+        <p:txBody>
+          <a:bodyPr/>
+          <a:lstStyle/>
+          <a:p>
+            <a:r>
+              <a:rPr lang="en-IN"/>
+              <a:t>Big data has many applications, including predictive analytics, personalized marketing, and fraud detection. It has the potential to transform many industries, from healthcare to finance.</a:t>
+            </a:r>
+          </a:p>
+        </p:txBody>
+      </p:sp>
+      <p:sp>
+        <p:nvSpPr>
+          <p:cNvPr id="4" name="Slide Number Placeholder 3"/>
+          <p:cNvSpPr>
+            <a:spLocks noGrp="1"/>
+          </p:cNvSpPr>
+          <p:nvPr>
+            <p:ph type="sldNum" sz="quarter" idx="5"/>
+          </p:nvPr>
+        </p:nvSpPr>
+        <p:spPr/>
+        <p:txBody>
+          <a:bodyPr/>
+          <a:lstStyle/>
+          <a:p>
+            <a:fld id="{1842A370-C676-452B-A70E-1B62CA9DC4BE}" type="slidenum">
+              <a:rPr lang="en-IN" smtClean="0"/>
+              <a:t>14</a:t>
+            </a:fld>
+            <a:endParaRPr lang="en-IN"/>
+          </a:p>
+        </p:txBody>
+      </p:sp>
+    </p:spTree>
+    <p:extLst>
+      <p:ext uri="{BB962C8B-B14F-4D97-AF65-F5344CB8AC3E}">
+        <p14:creationId xmlns:p14="http://schemas.microsoft.com/office/powerpoint/2010/main" val="665774467"/>
+      </p:ext>
+    </p:extLst>
+  </p:cSld>
+  <p:clrMapOvr>
+    <a:masterClrMapping/>
+  </p:clrMapOvr>
+</p:notes>
+</file>
+
+<file path=ppt/notesSlides/notesSlide15.xml><?xml version="1.0" encoding="utf-8"?>
+<p:notes xmlns:a="http://schemas.openxmlformats.org/drawingml/2006/main" xmlns:r="http://schemas.openxmlformats.org/officeDocument/2006/relationships" xmlns:p="http://schemas.openxmlformats.org/presentationml/2006/main">
+  <p:cSld>
+    <p:spTree>
+      <p:nvGrpSpPr>
+        <p:cNvPr id="1" name=""/>
+        <p:cNvGrpSpPr/>
+        <p:nvPr/>
+      </p:nvGrpSpPr>
+      <p:grpSpPr>
+        <a:xfrm>
+          <a:off x="0" y="0"/>
+          <a:ext cx="0" cy="0"/>
+          <a:chOff x="0" y="0"/>
+          <a:chExt cx="0" cy="0"/>
+        </a:xfrm>
+      </p:grpSpPr>
+      <p:sp>
+        <p:nvSpPr>
+          <p:cNvPr id="2" name="Slide Image Placeholder 1"/>
+          <p:cNvSpPr>
+            <a:spLocks noGrp="1" noRot="1" noChangeAspect="1"/>
+          </p:cNvSpPr>
+          <p:nvPr>
+            <p:ph type="sldImg"/>
+          </p:nvPr>
+        </p:nvSpPr>
+        <p:spPr/>
+      </p:sp>
+      <p:sp>
+        <p:nvSpPr>
+          <p:cNvPr id="3" name="Notes Placeholder 2"/>
+          <p:cNvSpPr>
+            <a:spLocks noGrp="1"/>
+          </p:cNvSpPr>
+          <p:nvPr>
+            <p:ph type="body" idx="1"/>
+          </p:nvPr>
+        </p:nvSpPr>
+        <p:spPr/>
+        <p:txBody>
+          <a:bodyPr/>
+          <a:lstStyle/>
+          <a:p>
+            <a:r>
+              <a:rPr lang="en-IN"/>
+              <a:t>Data is the foundation of the digital age, and understanding the different types of data and their unique challenges and benefits is essential for any organization. Whether you're dealing with structured data, unstructured data, or big data, there are tools and technologies available to help you make sense of your data.</a:t>
+            </a:r>
+          </a:p>
+        </p:txBody>
+      </p:sp>
+      <p:sp>
+        <p:nvSpPr>
+          <p:cNvPr id="4" name="Slide Number Placeholder 3"/>
+          <p:cNvSpPr>
+            <a:spLocks noGrp="1"/>
+          </p:cNvSpPr>
+          <p:nvPr>
+            <p:ph type="sldNum" sz="quarter" idx="5"/>
+          </p:nvPr>
+        </p:nvSpPr>
+        <p:spPr/>
+        <p:txBody>
+          <a:bodyPr/>
+          <a:lstStyle/>
+          <a:p>
+            <a:fld id="{1842A370-C676-452B-A70E-1B62CA9DC4BE}" type="slidenum">
+              <a:rPr lang="en-IN" smtClean="0"/>
+              <a:t>15</a:t>
             </a:fld>
             <a:endParaRPr lang="en-IN"/>
           </a:p>
@@ -4068,7 +4246,7 @@
           <a:p>
             <a:r>
               <a:rPr lang="en-IN"/>
-              <a:t>We will start by examining the differences between structured and unstructured data, and the benefits and challenges of each. Then, we will explore the emerging field of big data, its definition, technologies, and applications, and the challenges it brings.</a:t>
+              <a:t>Introduce the concept of Big Data and its importance in today's digital age.</a:t>
             </a:r>
           </a:p>
         </p:txBody>
@@ -4088,7 +4266,7 @@
           <a:bodyPr/>
           <a:lstStyle/>
           <a:p>
-            <a:fld id="{1842A370-C676-452B-A70E-1B62CA9DC4BE}" type="slidenum">
+            <a:fld id="{1A0BF369-99E3-4A84-9FB9-BF5BFB2DD12B}" type="slidenum">
               <a:rPr lang="en-IN" smtClean="0"/>
               <a:t>2</a:t>
             </a:fld>
@@ -4099,7 +4277,7 @@
     </p:spTree>
     <p:extLst>
       <p:ext uri="{BB962C8B-B14F-4D97-AF65-F5344CB8AC3E}">
-        <p14:creationId xmlns:p14="http://schemas.microsoft.com/office/powerpoint/2010/main" val="3557966858"/>
+        <p14:creationId xmlns:p14="http://schemas.microsoft.com/office/powerpoint/2010/main" val="4281035392"/>
       </p:ext>
     </p:extLst>
   </p:cSld>
@@ -4155,7 +4333,7 @@
           <a:p>
             <a:r>
               <a:rPr lang="en-IN"/>
-              <a:t>Structured and unstructured data are the two main types of data in the digital ecosystem. Structured data is organized, easily searchable, and easily analyzed, while unstructured data is difficult to categorize and analyze.</a:t>
+              <a:t>We will start by examining the differences between structured and unstructured data, and the benefits and challenges of each. Then, we will explore the emerging field of big data, its definition, technologies, and applications, and the challenges it brings.</a:t>
             </a:r>
           </a:p>
         </p:txBody>
@@ -4186,7 +4364,7 @@
     </p:spTree>
     <p:extLst>
       <p:ext uri="{BB962C8B-B14F-4D97-AF65-F5344CB8AC3E}">
-        <p14:creationId xmlns:p14="http://schemas.microsoft.com/office/powerpoint/2010/main" val="99457032"/>
+        <p14:creationId xmlns:p14="http://schemas.microsoft.com/office/powerpoint/2010/main" val="3557966858"/>
       </p:ext>
     </p:extLst>
   </p:cSld>
@@ -4242,7 +4420,7 @@
           <a:p>
             <a:r>
               <a:rPr lang="en-IN"/>
-              <a:t>Structured data is highly organized and easily searchable. It is typically stored in a database and can be easily analyzed with traditional data analytics tools.</a:t>
+              <a:t>Structured and unstructured data are the two main types of data in the digital ecosystem. Structured data is organized, easily searchable, and easily analyzed, while unstructured data is difficult to categorize and analyze.</a:t>
             </a:r>
           </a:p>
         </p:txBody>
@@ -4273,7 +4451,7 @@
     </p:spTree>
     <p:extLst>
       <p:ext uri="{BB962C8B-B14F-4D97-AF65-F5344CB8AC3E}">
-        <p14:creationId xmlns:p14="http://schemas.microsoft.com/office/powerpoint/2010/main" val="1351540820"/>
+        <p14:creationId xmlns:p14="http://schemas.microsoft.com/office/powerpoint/2010/main" val="99457032"/>
       </p:ext>
     </p:extLst>
   </p:cSld>
@@ -4329,7 +4507,7 @@
           <a:p>
             <a:r>
               <a:rPr lang="en-IN"/>
-              <a:t>Unstructured data is data that does not have a predefined data model or structure. Examples of unstructured data include text, images, and videos. It is difficult to analyze with traditional data analytics tools.</a:t>
+              <a:t>Structured data is highly organized and easily searchable. It is typically stored in a database and can be easily analyzed with traditional data analytics tools.</a:t>
             </a:r>
           </a:p>
         </p:txBody>
@@ -4360,7 +4538,7 @@
     </p:spTree>
     <p:extLst>
       <p:ext uri="{BB962C8B-B14F-4D97-AF65-F5344CB8AC3E}">
-        <p14:creationId xmlns:p14="http://schemas.microsoft.com/office/powerpoint/2010/main" val="2172813402"/>
+        <p14:creationId xmlns:p14="http://schemas.microsoft.com/office/powerpoint/2010/main" val="1351540820"/>
       </p:ext>
     </p:extLst>
   </p:cSld>
@@ -4416,7 +4594,7 @@
           <a:p>
             <a:r>
               <a:rPr lang="en-IN"/>
-              <a:t>Semi-structured data is a combination of structured and unstructured data. It has some organizational structure, but also contains elements of unstructured data.</a:t>
+              <a:t>Unstructured data is data that does not have a predefined data model or structure. Examples of unstructured data include text, images, and videos. It is difficult to analyze with traditional data analytics tools.</a:t>
             </a:r>
           </a:p>
         </p:txBody>
@@ -4447,7 +4625,7 @@
     </p:spTree>
     <p:extLst>
       <p:ext uri="{BB962C8B-B14F-4D97-AF65-F5344CB8AC3E}">
-        <p14:creationId xmlns:p14="http://schemas.microsoft.com/office/powerpoint/2010/main" val="3900479224"/>
+        <p14:creationId xmlns:p14="http://schemas.microsoft.com/office/powerpoint/2010/main" val="2172813402"/>
       </p:ext>
     </p:extLst>
   </p:cSld>
@@ -4503,7 +4681,7 @@
           <a:p>
             <a:r>
               <a:rPr lang="en-IN"/>
-              <a:t>Structured and unstructured data have different use cases and challenges. Structured data is ideal for traditional data analytics, while unstructured data requires more advanced tools, such as natural language processing and machine learning.</a:t>
+              <a:t>Semi-structured data is a combination of structured and unstructured data. It has some organizational structure, but also contains elements of unstructured data.</a:t>
             </a:r>
           </a:p>
         </p:txBody>
@@ -4534,7 +4712,7 @@
     </p:spTree>
     <p:extLst>
       <p:ext uri="{BB962C8B-B14F-4D97-AF65-F5344CB8AC3E}">
-        <p14:creationId xmlns:p14="http://schemas.microsoft.com/office/powerpoint/2010/main" val="1951573017"/>
+        <p14:creationId xmlns:p14="http://schemas.microsoft.com/office/powerpoint/2010/main" val="3900479224"/>
       </p:ext>
     </p:extLst>
   </p:cSld>
@@ -4590,7 +4768,7 @@
           <a:p>
             <a:r>
               <a:rPr lang="en-IN"/>
-              <a:t>Big data is a term used to describe the large and complex datasets that are difficult to process with traditional data processing tools. The field of big data has emerged to help organizations make sense of this data and unlock its potential.</a:t>
+              <a:t>Structured and unstructured data have different use cases and challenges. Structured data is ideal for traditional data analytics, while unstructured data requires more advanced tools, such as natural language processing and machine learning.</a:t>
             </a:r>
           </a:p>
         </p:txBody>
@@ -4621,7 +4799,7 @@
     </p:spTree>
     <p:extLst>
       <p:ext uri="{BB962C8B-B14F-4D97-AF65-F5344CB8AC3E}">
-        <p14:creationId xmlns:p14="http://schemas.microsoft.com/office/powerpoint/2010/main" val="3486167065"/>
+        <p14:creationId xmlns:p14="http://schemas.microsoft.com/office/powerpoint/2010/main" val="1951573017"/>
       </p:ext>
     </p:extLst>
   </p:cSld>
@@ -4677,7 +4855,7 @@
           <a:p>
             <a:r>
               <a:rPr lang="en-IN"/>
-              <a:t>Big data is defined by the four Vs: volume, velocity, variety, and veracity. Big data is characterized by its sheer size, speed, and complexity.</a:t>
+              <a:t>Big data is a term used to describe the large and complex datasets that are difficult to process with traditional data processing tools. The field of big data has emerged to help organizations make sense of this data and unlock its potential.</a:t>
             </a:r>
           </a:p>
         </p:txBody>
@@ -4708,7 +4886,7 @@
     </p:spTree>
     <p:extLst>
       <p:ext uri="{BB962C8B-B14F-4D97-AF65-F5344CB8AC3E}">
-        <p14:creationId xmlns:p14="http://schemas.microsoft.com/office/powerpoint/2010/main" val="3924473501"/>
+        <p14:creationId xmlns:p14="http://schemas.microsoft.com/office/powerpoint/2010/main" val="3486167065"/>
       </p:ext>
     </p:extLst>
   </p:cSld>
@@ -4874,7 +5052,7 @@
           <a:p>
             <a:fld id="{5FD402E1-5551-4411-9C5A-8F448AD7E12E}" type="datetime1">
               <a:rPr lang="en-US" smtClean="0"/>
-              <a:t>10/3/2024</a:t>
+              <a:t>10/4/2024</a:t>
             </a:fld>
             <a:endParaRPr lang="en-US"/>
           </a:p>
@@ -5128,7 +5306,7 @@
           <a:p>
             <a:fld id="{864636CE-056A-4874-BD9F-28CC8EAD88B8}" type="datetime1">
               <a:rPr lang="en-US" smtClean="0"/>
-              <a:t>10/3/2024</a:t>
+              <a:t>10/4/2024</a:t>
             </a:fld>
             <a:endParaRPr lang="en-US"/>
           </a:p>
@@ -5338,7 +5516,7 @@
           <a:p>
             <a:fld id="{58435312-4B40-4BD2-B680-EE0AAB902450}" type="datetime1">
               <a:rPr lang="en-US" smtClean="0"/>
-              <a:t>10/3/2024</a:t>
+              <a:t>10/4/2024</a:t>
             </a:fld>
             <a:endParaRPr lang="en-US"/>
           </a:p>
@@ -5593,7 +5771,7 @@
           <a:p>
             <a:fld id="{6388FEE0-1C50-40EC-8D89-464FD747BA77}" type="datetime1">
               <a:rPr lang="en-US" smtClean="0"/>
-              <a:t>10/3/2024</a:t>
+              <a:t>10/4/2024</a:t>
             </a:fld>
             <a:endParaRPr lang="en-US"/>
           </a:p>
@@ -5871,7 +6049,7 @@
           <a:p>
             <a:fld id="{7FF17CF4-2912-42BB-B296-06C57641253D}" type="datetime1">
               <a:rPr lang="en-US" smtClean="0"/>
-              <a:t>10/3/2024</a:t>
+              <a:t>10/4/2024</a:t>
             </a:fld>
             <a:endParaRPr lang="en-US"/>
           </a:p>
@@ -6143,7 +6321,7 @@
           <a:p>
             <a:fld id="{C8C2AF2F-9354-4FE3-B6F2-712E681254AB}" type="datetime1">
               <a:rPr lang="en-US" smtClean="0"/>
-              <a:t>10/3/2024</a:t>
+              <a:t>10/4/2024</a:t>
             </a:fld>
             <a:endParaRPr lang="en-US"/>
           </a:p>
@@ -6631,7 +6809,7 @@
           <a:p>
             <a:fld id="{0078AE02-F564-4F99-9921-17DFC5FC27C0}" type="datetime1">
               <a:rPr lang="en-US" smtClean="0"/>
-              <a:t>10/3/2024</a:t>
+              <a:t>10/4/2024</a:t>
             </a:fld>
             <a:endParaRPr lang="en-US"/>
           </a:p>
@@ -6773,7 +6951,7 @@
           <a:p>
             <a:fld id="{324CCDD1-2BC5-45EA-83EE-10274B4C1E86}" type="datetime1">
               <a:rPr lang="en-US" smtClean="0"/>
-              <a:t>10/3/2024</a:t>
+              <a:t>10/4/2024</a:t>
             </a:fld>
             <a:endParaRPr lang="en-US"/>
           </a:p>
@@ -6886,7 +7064,7 @@
           <a:p>
             <a:fld id="{E57C65C8-F180-4529-9FF1-36BA71046A80}" type="datetime1">
               <a:rPr lang="en-US" smtClean="0"/>
-              <a:t>10/3/2024</a:t>
+              <a:t>10/4/2024</a:t>
             </a:fld>
             <a:endParaRPr lang="en-US"/>
           </a:p>
@@ -7205,7 +7383,7 @@
           <a:p>
             <a:fld id="{4AA88828-E7ED-4EFD-B746-FCF1AC872FC8}" type="datetime1">
               <a:rPr lang="en-US" smtClean="0"/>
-              <a:t>10/3/2024</a:t>
+              <a:t>10/4/2024</a:t>
             </a:fld>
             <a:endParaRPr lang="en-US"/>
           </a:p>
@@ -7502,7 +7680,7 @@
           <a:p>
             <a:fld id="{FCE9A5C4-CA67-481E-B7EE-1D56831B6DD3}" type="datetime1">
               <a:rPr lang="en-US" smtClean="0"/>
-              <a:t>10/3/2024</a:t>
+              <a:t>10/4/2024</a:t>
             </a:fld>
             <a:endParaRPr lang="en-US"/>
           </a:p>
@@ -7743,7 +7921,7 @@
           <a:p>
             <a:fld id="{D5F79831-7CDC-4A84-B952-B7D269DB8AFC}" type="datetime1">
               <a:rPr lang="en-US" smtClean="0"/>
-              <a:t>10/3/2024</a:t>
+              <a:t>10/4/2024</a:t>
             </a:fld>
             <a:endParaRPr lang="en-US"/>
           </a:p>
@@ -9029,7 +9207,7 @@
           <p:cNvPr id="16" name="Rectangle 15">
             <a:extLst>
               <a:ext uri="{FF2B5EF4-FFF2-40B4-BE49-F238E27FC236}">
-                <a16:creationId xmlns:a16="http://schemas.microsoft.com/office/drawing/2014/main" id="{9E10BDB4-64F2-477D-A03B-9F8352D5E02E}"/>
+                <a16:creationId xmlns:a16="http://schemas.microsoft.com/office/drawing/2014/main" id="{0EC38958-9A69-239A-BA79-2AEC73345F4B}"/>
               </a:ext>
               <a:ext uri="{C183D7F6-B498-43B3-948B-1728B52AA6E4}">
                 <adec:decorative xmlns:adec="http://schemas.microsoft.com/office/drawing/2017/decorative" val="1"/>
@@ -9079,17 +9257,46 @@
           <a:bodyPr rtlCol="0" anchor="ctr"/>
           <a:lstStyle/>
           <a:p>
-            <a:pPr algn="ctr"/>
-            <a:endParaRPr lang="en-US" dirty="0"/>
+            <a:pPr marL="0" marR="0" lvl="0" indent="0" algn="ctr" defTabSz="914400" rtl="0" eaLnBrk="1" fontAlgn="auto" latinLnBrk="0" hangingPunct="1">
+              <a:lnSpc>
+                <a:spcPct val="100000"/>
+              </a:lnSpc>
+              <a:spcBef>
+                <a:spcPts val="0"/>
+              </a:spcBef>
+              <a:spcAft>
+                <a:spcPts val="0"/>
+              </a:spcAft>
+              <a:buClrTx/>
+              <a:buSzTx/>
+              <a:buFontTx/>
+              <a:buNone/>
+              <a:tabLst/>
+              <a:defRPr/>
+            </a:pPr>
+            <a:endParaRPr kumimoji="0" lang="en-US" sz="1800" b="0" i="0" u="none" strike="noStrike" kern="1200" cap="none" spc="0" normalizeH="0" baseline="0" noProof="0" dirty="0">
+              <a:ln>
+                <a:noFill/>
+              </a:ln>
+              <a:solidFill>
+                <a:prstClr val="white"/>
+              </a:solidFill>
+              <a:effectLst/>
+              <a:uLnTx/>
+              <a:uFillTx/>
+              <a:latin typeface="Bierstadt"/>
+              <a:ea typeface="+mn-ea"/>
+              <a:cs typeface="+mn-cs"/>
+            </a:endParaRPr>
           </a:p>
         </p:txBody>
       </p:sp>
       <p:pic>
         <p:nvPicPr>
-          <p:cNvPr id="5" name="Content Placeholder 4" descr="Big data internet technology">
-            <a:extLst>
-              <a:ext uri="{FF2B5EF4-FFF2-40B4-BE49-F238E27FC236}">
-                <a16:creationId xmlns:a16="http://schemas.microsoft.com/office/drawing/2014/main" id="{84179EC5-2DDA-4A3F-9A4E-2DC09ADE5BF0}"/>
+          <p:cNvPr id="5" name="Content Placeholder 4" descr="Big Data banner - abstract background technology image, concept for big data analytics, data science, cloud big data. 3d rendered image isolated on white background.">
+            <a:extLst>
+              <a:ext uri="{FF2B5EF4-FFF2-40B4-BE49-F238E27FC236}">
+                <a16:creationId xmlns:a16="http://schemas.microsoft.com/office/drawing/2014/main" id="{5927F1AB-672D-4FFD-830E-808308B6F26A}"/>
               </a:ext>
             </a:extLst>
           </p:cNvPr>
@@ -9102,13 +9309,13 @@
         </p:nvPicPr>
         <p:blipFill>
           <a:blip r:embed="rId3"/>
-          <a:srcRect t="10347" r="-4" b="9002"/>
+          <a:srcRect l="18352" r="26757" b="1"/>
           <a:stretch/>
         </p:blipFill>
         <p:spPr>
           <a:xfrm>
-            <a:off x="517867" y="2577661"/>
-            <a:ext cx="4672584" cy="3768343"/>
+            <a:off x="517868" y="508090"/>
+            <a:ext cx="5705856" cy="5846990"/>
           </a:xfrm>
           <a:prstGeom prst="rect">
             <a:avLst/>
@@ -9120,7 +9327,7 @@
           <p:cNvPr id="2" name="Title 1">
             <a:extLst>
               <a:ext uri="{FF2B5EF4-FFF2-40B4-BE49-F238E27FC236}">
-                <a16:creationId xmlns:a16="http://schemas.microsoft.com/office/drawing/2014/main" id="{F20A1D89-6D70-91FB-54FA-653E7E0303D8}"/>
+                <a16:creationId xmlns:a16="http://schemas.microsoft.com/office/drawing/2014/main" id="{C565D3F9-3B71-9465-D5F3-96323EF36CB4}"/>
               </a:ext>
             </a:extLst>
           </p:cNvPr>
@@ -9133,8 +9340,8 @@
         </p:nvSpPr>
         <p:spPr>
           <a:xfrm>
-            <a:off x="517867" y="976160"/>
-            <a:ext cx="4809314" cy="1447163"/>
+            <a:off x="7001547" y="976160"/>
+            <a:ext cx="4822899" cy="1463040"/>
           </a:xfrm>
         </p:spPr>
         <p:txBody>
@@ -9145,7 +9352,7 @@
           <a:p>
             <a:r>
               <a:rPr lang="en-US" sz="4400"/>
-              <a:t>Big Data Technologies</a:t>
+              <a:t>Definition of Big Data</a:t>
             </a:r>
           </a:p>
         </p:txBody>
@@ -9155,7 +9362,7 @@
           <p:cNvPr id="4" name="Content Placeholder 3">
             <a:extLst>
               <a:ext uri="{FF2B5EF4-FFF2-40B4-BE49-F238E27FC236}">
-                <a16:creationId xmlns:a16="http://schemas.microsoft.com/office/drawing/2014/main" id="{7368CFC8-3446-578D-BCC7-B8A52D0F682A}"/>
+                <a16:creationId xmlns:a16="http://schemas.microsoft.com/office/drawing/2014/main" id="{A0E8489E-D7F6-C2B5-86C8-916CA67CB7EA}"/>
               </a:ext>
             </a:extLst>
           </p:cNvPr>
@@ -9178,8 +9385,8 @@
         </p:nvSpPr>
         <p:spPr>
           <a:xfrm>
-            <a:off x="5842000" y="1033272"/>
-            <a:ext cx="5832133" cy="5312732"/>
+            <a:off x="7001548" y="2578608"/>
+            <a:ext cx="4672584" cy="3767328"/>
           </a:xfrm>
         </p:spPr>
         <p:txBody>
@@ -9194,10 +9401,7 @@
               </a:spcBef>
               <a:buNone/>
             </a:pPr>
-            <a:r>
-              <a:rPr lang="en-US" sz="1400" b="1"/>
-              <a:t>Hadoop</a:t>
-            </a:r>
+            <a:endParaRPr lang="en-US" sz="1400" b="1"/>
           </a:p>
           <a:p>
             <a:pPr marL="0" lvl="1" indent="0">
@@ -9205,49 +9409,7 @@
             </a:pPr>
             <a:r>
               <a:rPr lang="en-US" sz="1400"/>
-              <a:t>Hadoop is an open-source big data processing framework that allows large data sets to be stored and processed across clusters of computers. It is designed to scale from a single server to thousands of machines, offering fault tolerance and easy recovery from system failures.</a:t>
-            </a:r>
-          </a:p>
-          <a:p>
-            <a:pPr marL="0" indent="0">
-              <a:spcBef>
-                <a:spcPts val="2500"/>
-              </a:spcBef>
-              <a:buNone/>
-            </a:pPr>
-            <a:r>
-              <a:rPr lang="en-US" sz="1400" b="1"/>
-              <a:t>Spark</a:t>
-            </a:r>
-          </a:p>
-          <a:p>
-            <a:pPr marL="0" lvl="1" indent="0">
-              <a:buNone/>
-            </a:pPr>
-            <a:r>
-              <a:rPr lang="en-US" sz="1400"/>
-              <a:t>Spark is another popular open-source big data processing framework that is designed to be fast, flexible, and easy to use. Spark provides an interface for programming entire clusters with implicit data parallelism and fault tolerance.</a:t>
-            </a:r>
-          </a:p>
-          <a:p>
-            <a:pPr marL="0" indent="0">
-              <a:spcBef>
-                <a:spcPts val="2500"/>
-              </a:spcBef>
-              <a:buNone/>
-            </a:pPr>
-            <a:r>
-              <a:rPr lang="en-US" sz="1400" b="1"/>
-              <a:t>NoSQL Databases</a:t>
-            </a:r>
-          </a:p>
-          <a:p>
-            <a:pPr marL="0" lvl="1" indent="0">
-              <a:buNone/>
-            </a:pPr>
-            <a:r>
-              <a:rPr lang="en-US" sz="1400"/>
-              <a:t>NoSQL databases are designed to handle large and complex datasets that cannot be easily modeled in a tabular form. NoSQL databases provide high scalability, availability, and fault tolerance, making them well-suited for big data applications.</a:t>
+              <a:t>Big data is defined by the four Vs: volume, velocity, variety, and veracity. Volume refers to the sheer size of data, velocity refers to the speed at which data is generated, variety refers to the different types of data, and veracity refers to the accuracy and reliability of data.</a:t>
             </a:r>
             <a:endParaRPr lang="en-IN" sz="1400"/>
           </a:p>
@@ -9255,10 +9417,10 @@
       </p:sp>
       <p:sp>
         <p:nvSpPr>
-          <p:cNvPr id="18" name="Rectangle 17">
-            <a:extLst>
-              <a:ext uri="{FF2B5EF4-FFF2-40B4-BE49-F238E27FC236}">
-                <a16:creationId xmlns:a16="http://schemas.microsoft.com/office/drawing/2014/main" id="{887F59F2-5FBC-40CD-AD35-376AECE49EA6}"/>
+          <p:cNvPr id="18" name="Freeform: Shape 17">
+            <a:extLst>
+              <a:ext uri="{FF2B5EF4-FFF2-40B4-BE49-F238E27FC236}">
+                <a16:creationId xmlns:a16="http://schemas.microsoft.com/office/drawing/2014/main" id="{6EC109E5-0396-8968-4F42-DFEC280363B6}"/>
               </a:ext>
               <a:ext uri="{C183D7F6-B498-43B3-948B-1728B52AA6E4}">
                 <adec:decorative xmlns:adec="http://schemas.microsoft.com/office/drawing/2017/decorative" val="1"/>
@@ -9278,12 +9440,55 @@
         </p:nvSpPr>
         <p:spPr>
           <a:xfrm>
-            <a:off x="517868" y="508090"/>
-            <a:ext cx="4672584" cy="149279"/>
+            <a:off x="7016407" y="508090"/>
+            <a:ext cx="4660733" cy="149279"/>
           </a:xfrm>
-          <a:prstGeom prst="rect">
+          <a:custGeom>
             <a:avLst/>
-          </a:prstGeom>
+            <a:gdLst>
+              <a:gd name="connsiteX0" fmla="*/ 0 w 6090847"/>
+              <a:gd name="connsiteY0" fmla="*/ 0 h 149279"/>
+              <a:gd name="connsiteX1" fmla="*/ 6090847 w 6090847"/>
+              <a:gd name="connsiteY1" fmla="*/ 0 h 149279"/>
+              <a:gd name="connsiteX2" fmla="*/ 6090847 w 6090847"/>
+              <a:gd name="connsiteY2" fmla="*/ 149279 h 149279"/>
+              <a:gd name="connsiteX3" fmla="*/ 0 w 6090847"/>
+              <a:gd name="connsiteY3" fmla="*/ 149279 h 149279"/>
+            </a:gdLst>
+            <a:ahLst/>
+            <a:cxnLst>
+              <a:cxn ang="0">
+                <a:pos x="connsiteX0" y="connsiteY0"/>
+              </a:cxn>
+              <a:cxn ang="0">
+                <a:pos x="connsiteX1" y="connsiteY1"/>
+              </a:cxn>
+              <a:cxn ang="0">
+                <a:pos x="connsiteX2" y="connsiteY2"/>
+              </a:cxn>
+              <a:cxn ang="0">
+                <a:pos x="connsiteX3" y="connsiteY3"/>
+              </a:cxn>
+            </a:cxnLst>
+            <a:rect l="l" t="t" r="r" b="b"/>
+            <a:pathLst>
+              <a:path w="6090847" h="149279">
+                <a:moveTo>
+                  <a:pt x="0" y="0"/>
+                </a:moveTo>
+                <a:lnTo>
+                  <a:pt x="6090847" y="0"/>
+                </a:lnTo>
+                <a:lnTo>
+                  <a:pt x="6090847" y="149279"/>
+                </a:lnTo>
+                <a:lnTo>
+                  <a:pt x="0" y="149279"/>
+                </a:lnTo>
+                <a:close/>
+              </a:path>
+            </a:pathLst>
+          </a:custGeom>
           <a:solidFill>
             <a:schemeClr val="tx1"/>
           </a:solidFill>
@@ -9308,11 +9513,42 @@
           </a:fontRef>
         </p:style>
         <p:txBody>
-          <a:bodyPr rtlCol="0" anchor="ctr"/>
-          <a:lstStyle/>
-          <a:p>
-            <a:pPr algn="ctr"/>
-            <a:endParaRPr lang="en-US"/>
+          <a:bodyPr wrap="square" rtlCol="0" anchor="ctr">
+            <a:noAutofit/>
+          </a:bodyPr>
+          <a:lstStyle/>
+          <a:p>
+            <a:pPr marL="0" marR="0" lvl="0" indent="0" algn="ctr" defTabSz="914400" rtl="0" eaLnBrk="1" fontAlgn="auto" latinLnBrk="0" hangingPunct="1">
+              <a:lnSpc>
+                <a:spcPct val="100000"/>
+              </a:lnSpc>
+              <a:spcBef>
+                <a:spcPts val="0"/>
+              </a:spcBef>
+              <a:spcAft>
+                <a:spcPts val="0"/>
+              </a:spcAft>
+              <a:buClrTx/>
+              <a:buSzTx/>
+              <a:buFontTx/>
+              <a:buNone/>
+              <a:tabLst/>
+              <a:defRPr/>
+            </a:pPr>
+            <a:endParaRPr kumimoji="0" lang="en-US" sz="1800" b="0" i="0" u="none" strike="noStrike" kern="1200" cap="none" spc="0" normalizeH="0" baseline="0" noProof="0">
+              <a:ln>
+                <a:noFill/>
+              </a:ln>
+              <a:solidFill>
+                <a:prstClr val="white"/>
+              </a:solidFill>
+              <a:effectLst/>
+              <a:uLnTx/>
+              <a:uFillTx/>
+              <a:latin typeface="Bierstadt"/>
+              <a:ea typeface="+mn-ea"/>
+              <a:cs typeface="+mn-cs"/>
+            </a:endParaRPr>
           </a:p>
         </p:txBody>
       </p:sp>
@@ -9321,7 +9557,7 @@
           <p:cNvPr id="3" name="Slide Number Placeholder 2">
             <a:extLst>
               <a:ext uri="{FF2B5EF4-FFF2-40B4-BE49-F238E27FC236}">
-                <a16:creationId xmlns:a16="http://schemas.microsoft.com/office/drawing/2014/main" id="{04CE525F-3761-DCE6-9599-834B945F0855}"/>
+                <a16:creationId xmlns:a16="http://schemas.microsoft.com/office/drawing/2014/main" id="{8D6AC438-0AB1-751A-95B3-15672E99FD8B}"/>
               </a:ext>
             </a:extLst>
           </p:cNvPr>
@@ -9348,7 +9584,7 @@
     </p:spTree>
     <p:extLst>
       <p:ext uri="{BB962C8B-B14F-4D97-AF65-F5344CB8AC3E}">
-        <p14:creationId xmlns:p14="http://schemas.microsoft.com/office/powerpoint/2010/main" val="2886314686"/>
+        <p14:creationId xmlns:p14="http://schemas.microsoft.com/office/powerpoint/2010/main" val="3491814897"/>
       </p:ext>
     </p:extLst>
   </p:cSld>
@@ -9768,46 +10004,17 @@
           <a:bodyPr rtlCol="0" anchor="ctr"/>
           <a:lstStyle/>
           <a:p>
-            <a:pPr marL="0" marR="0" lvl="0" indent="0" algn="ctr" defTabSz="914400" rtl="0" eaLnBrk="1" fontAlgn="auto" latinLnBrk="0" hangingPunct="1">
-              <a:lnSpc>
-                <a:spcPct val="100000"/>
-              </a:lnSpc>
-              <a:spcBef>
-                <a:spcPts val="0"/>
-              </a:spcBef>
-              <a:spcAft>
-                <a:spcPts val="0"/>
-              </a:spcAft>
-              <a:buClrTx/>
-              <a:buSzTx/>
-              <a:buFontTx/>
-              <a:buNone/>
-              <a:tabLst/>
-              <a:defRPr/>
-            </a:pPr>
-            <a:endParaRPr kumimoji="0" lang="en-US" sz="1800" b="0" i="0" u="none" strike="noStrike" kern="1200" cap="none" spc="0" normalizeH="0" baseline="0" noProof="0">
-              <a:ln>
-                <a:noFill/>
-              </a:ln>
-              <a:solidFill>
-                <a:prstClr val="white"/>
-              </a:solidFill>
-              <a:effectLst/>
-              <a:uLnTx/>
-              <a:uFillTx/>
-              <a:latin typeface="Bierstadt"/>
-              <a:ea typeface="+mn-ea"/>
-              <a:cs typeface="+mn-cs"/>
-            </a:endParaRPr>
+            <a:pPr algn="ctr"/>
+            <a:endParaRPr lang="en-US" dirty="0"/>
           </a:p>
         </p:txBody>
       </p:sp>
       <p:pic>
         <p:nvPicPr>
-          <p:cNvPr id="5" name="Content Placeholder 4" descr="3d illustration">
-            <a:extLst>
-              <a:ext uri="{FF2B5EF4-FFF2-40B4-BE49-F238E27FC236}">
-                <a16:creationId xmlns:a16="http://schemas.microsoft.com/office/drawing/2014/main" id="{D1FC101F-FD05-4172-9F01-B6A28B0938BB}"/>
+          <p:cNvPr id="5" name="Content Placeholder 4" descr="Big data internet technology">
+            <a:extLst>
+              <a:ext uri="{FF2B5EF4-FFF2-40B4-BE49-F238E27FC236}">
+                <a16:creationId xmlns:a16="http://schemas.microsoft.com/office/drawing/2014/main" id="{84179EC5-2DDA-4A3F-9A4E-2DC09ADE5BF0}"/>
               </a:ext>
             </a:extLst>
           </p:cNvPr>
@@ -9820,13 +10027,13 @@
         </p:nvPicPr>
         <p:blipFill>
           <a:blip r:embed="rId3"/>
-          <a:srcRect t="18460" r="1" b="29942"/>
+          <a:srcRect t="10347" r="-4" b="9002"/>
           <a:stretch/>
         </p:blipFill>
         <p:spPr>
           <a:xfrm>
-            <a:off x="517864" y="1863633"/>
-            <a:ext cx="8687096" cy="4482371"/>
+            <a:off x="517867" y="2577661"/>
+            <a:ext cx="4672584" cy="3768343"/>
           </a:xfrm>
           <a:prstGeom prst="rect">
             <a:avLst/>
@@ -9838,7 +10045,7 @@
           <p:cNvPr id="2" name="Title 1">
             <a:extLst>
               <a:ext uri="{FF2B5EF4-FFF2-40B4-BE49-F238E27FC236}">
-                <a16:creationId xmlns:a16="http://schemas.microsoft.com/office/drawing/2014/main" id="{19293EEC-8062-E0B8-B5ED-158A1E42F64E}"/>
+                <a16:creationId xmlns:a16="http://schemas.microsoft.com/office/drawing/2014/main" id="{F20A1D89-6D70-91FB-54FA-653E7E0303D8}"/>
               </a:ext>
             </a:extLst>
           </p:cNvPr>
@@ -9851,8 +10058,8 @@
         </p:nvSpPr>
         <p:spPr>
           <a:xfrm>
-            <a:off x="517865" y="976160"/>
-            <a:ext cx="8686800" cy="813063"/>
+            <a:off x="517867" y="976160"/>
+            <a:ext cx="4809314" cy="1447163"/>
           </a:xfrm>
         </p:spPr>
         <p:txBody>
@@ -9863,7 +10070,7 @@
           <a:p>
             <a:r>
               <a:rPr lang="en-US" sz="4400"/>
-              <a:t>Challenges of Big Data</a:t>
+              <a:t>Big Data Technologies</a:t>
             </a:r>
           </a:p>
         </p:txBody>
@@ -9873,7 +10080,7 @@
           <p:cNvPr id="4" name="Content Placeholder 3">
             <a:extLst>
               <a:ext uri="{FF2B5EF4-FFF2-40B4-BE49-F238E27FC236}">
-                <a16:creationId xmlns:a16="http://schemas.microsoft.com/office/drawing/2014/main" id="{21750363-FAF7-BBDE-5F81-9FB8C0C3F6F9}"/>
+                <a16:creationId xmlns:a16="http://schemas.microsoft.com/office/drawing/2014/main" id="{7368CFC8-3446-578D-BCC7-B8A52D0F682A}"/>
               </a:ext>
             </a:extLst>
           </p:cNvPr>
@@ -9896,8 +10103,8 @@
         </p:nvSpPr>
         <p:spPr>
           <a:xfrm>
-            <a:off x="9631680" y="1863632"/>
-            <a:ext cx="2042449" cy="4482371"/>
+            <a:off x="5842000" y="1033272"/>
+            <a:ext cx="5832133" cy="5312732"/>
           </a:xfrm>
         </p:spPr>
         <p:txBody>
@@ -9912,7 +10119,10 @@
               </a:spcBef>
               <a:buNone/>
             </a:pPr>
-            <a:endParaRPr lang="en-US" sz="1400" b="1"/>
+            <a:r>
+              <a:rPr lang="en-US" sz="1400" b="1"/>
+              <a:t>Hadoop</a:t>
+            </a:r>
           </a:p>
           <a:p>
             <a:pPr marL="0" lvl="1" indent="0">
@@ -9920,7 +10130,49 @@
             </a:pPr>
             <a:r>
               <a:rPr lang="en-US" sz="1400"/>
-              <a:t>Big data poses several unique challenges, including data quality, security, and privacy. Technical challenges such as scalability and performance also present significant hurdles.</a:t>
+              <a:t>Hadoop is an open-source big data processing framework that allows large data sets to be stored and processed across clusters of computers. It is designed to scale from a single server to thousands of machines, offering fault tolerance and easy recovery from system failures.</a:t>
+            </a:r>
+          </a:p>
+          <a:p>
+            <a:pPr marL="0" indent="0">
+              <a:spcBef>
+                <a:spcPts val="2500"/>
+              </a:spcBef>
+              <a:buNone/>
+            </a:pPr>
+            <a:r>
+              <a:rPr lang="en-US" sz="1400" b="1"/>
+              <a:t>Spark</a:t>
+            </a:r>
+          </a:p>
+          <a:p>
+            <a:pPr marL="0" lvl="1" indent="0">
+              <a:buNone/>
+            </a:pPr>
+            <a:r>
+              <a:rPr lang="en-US" sz="1400"/>
+              <a:t>Spark is another popular open-source big data processing framework that is designed to be fast, flexible, and easy to use. Spark provides an interface for programming entire clusters with implicit data parallelism and fault tolerance.</a:t>
+            </a:r>
+          </a:p>
+          <a:p>
+            <a:pPr marL="0" indent="0">
+              <a:spcBef>
+                <a:spcPts val="2500"/>
+              </a:spcBef>
+              <a:buNone/>
+            </a:pPr>
+            <a:r>
+              <a:rPr lang="en-US" sz="1400" b="1"/>
+              <a:t>NoSQL Databases</a:t>
+            </a:r>
+          </a:p>
+          <a:p>
+            <a:pPr marL="0" lvl="1" indent="0">
+              <a:buNone/>
+            </a:pPr>
+            <a:r>
+              <a:rPr lang="en-US" sz="1400"/>
+              <a:t>NoSQL databases are designed to handle large and complex datasets that cannot be easily modeled in a tabular form. NoSQL databases provide high scalability, availability, and fault tolerance, making them well-suited for big data applications.</a:t>
             </a:r>
             <a:endParaRPr lang="en-IN" sz="1400"/>
           </a:p>
@@ -9951,8 +10203,8 @@
         </p:nvSpPr>
         <p:spPr>
           <a:xfrm>
-            <a:off x="517865" y="508090"/>
-            <a:ext cx="8111230" cy="149279"/>
+            <a:off x="517868" y="508090"/>
+            <a:ext cx="4672584" cy="149279"/>
           </a:xfrm>
           <a:prstGeom prst="rect">
             <a:avLst/>
@@ -9984,174 +10236,8 @@
           <a:bodyPr rtlCol="0" anchor="ctr"/>
           <a:lstStyle/>
           <a:p>
-            <a:pPr marL="0" marR="0" lvl="0" indent="0" algn="ctr" defTabSz="914400" rtl="0" eaLnBrk="1" fontAlgn="auto" latinLnBrk="0" hangingPunct="1">
-              <a:lnSpc>
-                <a:spcPct val="100000"/>
-              </a:lnSpc>
-              <a:spcBef>
-                <a:spcPts val="0"/>
-              </a:spcBef>
-              <a:spcAft>
-                <a:spcPts val="0"/>
-              </a:spcAft>
-              <a:buClrTx/>
-              <a:buSzTx/>
-              <a:buFontTx/>
-              <a:buNone/>
-              <a:tabLst/>
-              <a:defRPr/>
-            </a:pPr>
-            <a:endParaRPr kumimoji="0" lang="en-US" sz="1800" b="0" i="0" u="none" strike="noStrike" kern="1200" cap="none" spc="0" normalizeH="0" baseline="0" noProof="0">
-              <a:ln>
-                <a:noFill/>
-              </a:ln>
-              <a:solidFill>
-                <a:prstClr val="white"/>
-              </a:solidFill>
-              <a:effectLst/>
-              <a:uLnTx/>
-              <a:uFillTx/>
-              <a:latin typeface="Bierstadt"/>
-              <a:ea typeface="+mn-ea"/>
-              <a:cs typeface="+mn-cs"/>
-            </a:endParaRPr>
-          </a:p>
-        </p:txBody>
-      </p:sp>
-      <p:sp>
-        <p:nvSpPr>
-          <p:cNvPr id="20" name="Freeform: Shape 19">
-            <a:extLst>
-              <a:ext uri="{FF2B5EF4-FFF2-40B4-BE49-F238E27FC236}">
-                <a16:creationId xmlns:a16="http://schemas.microsoft.com/office/drawing/2014/main" id="{E94EA6C1-5B73-CB10-F9FB-B671500CC2D6}"/>
-              </a:ext>
-              <a:ext uri="{C183D7F6-B498-43B3-948B-1728B52AA6E4}">
-                <adec:decorative xmlns:adec="http://schemas.microsoft.com/office/drawing/2017/decorative" val="1"/>
-              </a:ext>
-            </a:extLst>
-          </p:cNvPr>
-          <p:cNvSpPr>
-            <a:spLocks noGrp="1" noRot="1" noChangeAspect="1" noMove="1" noResize="1" noEditPoints="1" noAdjustHandles="1" noChangeArrowheads="1" noChangeShapeType="1" noTextEdit="1"/>
-          </p:cNvSpPr>
-          <p:nvPr>
-            <p:extLst>
-              <p:ext uri="{386F3935-93C4-4BCD-93E2-E3B085C9AB24}">
-                <p16:designElem xmlns:p16="http://schemas.microsoft.com/office/powerpoint/2015/main" val="1"/>
-              </p:ext>
-            </p:extLst>
-          </p:nvPr>
-        </p:nvSpPr>
-        <p:spPr>
-          <a:xfrm>
-            <a:off x="517869" y="508090"/>
-            <a:ext cx="8686800" cy="149279"/>
-          </a:xfrm>
-          <a:custGeom>
-            <a:avLst/>
-            <a:gdLst>
-              <a:gd name="connsiteX0" fmla="*/ 0 w 8085002"/>
-              <a:gd name="connsiteY0" fmla="*/ 0 h 149279"/>
-              <a:gd name="connsiteX1" fmla="*/ 8085002 w 8085002"/>
-              <a:gd name="connsiteY1" fmla="*/ 0 h 149279"/>
-              <a:gd name="connsiteX2" fmla="*/ 8085002 w 8085002"/>
-              <a:gd name="connsiteY2" fmla="*/ 149279 h 149279"/>
-              <a:gd name="connsiteX3" fmla="*/ 0 w 8085002"/>
-              <a:gd name="connsiteY3" fmla="*/ 149279 h 149279"/>
-            </a:gdLst>
-            <a:ahLst/>
-            <a:cxnLst>
-              <a:cxn ang="0">
-                <a:pos x="connsiteX0" y="connsiteY0"/>
-              </a:cxn>
-              <a:cxn ang="0">
-                <a:pos x="connsiteX1" y="connsiteY1"/>
-              </a:cxn>
-              <a:cxn ang="0">
-                <a:pos x="connsiteX2" y="connsiteY2"/>
-              </a:cxn>
-              <a:cxn ang="0">
-                <a:pos x="connsiteX3" y="connsiteY3"/>
-              </a:cxn>
-            </a:cxnLst>
-            <a:rect l="l" t="t" r="r" b="b"/>
-            <a:pathLst>
-              <a:path w="8085002" h="149279">
-                <a:moveTo>
-                  <a:pt x="0" y="0"/>
-                </a:moveTo>
-                <a:lnTo>
-                  <a:pt x="8085002" y="0"/>
-                </a:lnTo>
-                <a:lnTo>
-                  <a:pt x="8085002" y="149279"/>
-                </a:lnTo>
-                <a:lnTo>
-                  <a:pt x="0" y="149279"/>
-                </a:lnTo>
-                <a:close/>
-              </a:path>
-            </a:pathLst>
-          </a:custGeom>
-          <a:solidFill>
-            <a:schemeClr val="tx1"/>
-          </a:solidFill>
-          <a:ln>
-            <a:noFill/>
-          </a:ln>
-        </p:spPr>
-        <p:style>
-          <a:lnRef idx="2">
-            <a:schemeClr val="accent1">
-              <a:shade val="50000"/>
-            </a:schemeClr>
-          </a:lnRef>
-          <a:fillRef idx="1">
-            <a:schemeClr val="accent1"/>
-          </a:fillRef>
-          <a:effectRef idx="0">
-            <a:schemeClr val="accent1"/>
-          </a:effectRef>
-          <a:fontRef idx="minor">
-            <a:schemeClr val="lt1"/>
-          </a:fontRef>
-        </p:style>
-        <p:txBody>
-          <a:bodyPr wrap="square" rtlCol="0" anchor="ctr">
-            <a:noAutofit/>
-          </a:bodyPr>
-          <a:lstStyle/>
-          <a:p>
-            <a:pPr marL="0" marR="0" lvl="0" indent="0" algn="ctr" defTabSz="914400" rtl="0" eaLnBrk="1" fontAlgn="auto" latinLnBrk="0" hangingPunct="1">
-              <a:lnSpc>
-                <a:spcPct val="100000"/>
-              </a:lnSpc>
-              <a:spcBef>
-                <a:spcPts val="0"/>
-              </a:spcBef>
-              <a:spcAft>
-                <a:spcPts val="0"/>
-              </a:spcAft>
-              <a:buClrTx/>
-              <a:buSzTx/>
-              <a:buFontTx/>
-              <a:buNone/>
-              <a:tabLst/>
-              <a:defRPr/>
-            </a:pPr>
-            <a:endParaRPr kumimoji="0" lang="en-US" sz="1800" b="0" i="0" u="none" strike="noStrike" kern="1200" cap="none" spc="0" normalizeH="0" baseline="0" noProof="0">
-              <a:ln>
-                <a:noFill/>
-              </a:ln>
-              <a:solidFill>
-                <a:prstClr val="white"/>
-              </a:solidFill>
-              <a:effectLst/>
-              <a:uLnTx/>
-              <a:uFillTx/>
-              <a:latin typeface="Bierstadt"/>
-              <a:ea typeface="+mn-ea"/>
-              <a:cs typeface="+mn-cs"/>
-            </a:endParaRPr>
+            <a:pPr algn="ctr"/>
+            <a:endParaRPr lang="en-US"/>
           </a:p>
         </p:txBody>
       </p:sp>
@@ -10160,7 +10246,7 @@
           <p:cNvPr id="3" name="Slide Number Placeholder 2">
             <a:extLst>
               <a:ext uri="{FF2B5EF4-FFF2-40B4-BE49-F238E27FC236}">
-                <a16:creationId xmlns:a16="http://schemas.microsoft.com/office/drawing/2014/main" id="{31D1A568-480F-2CF7-B8B4-C18F74912D61}"/>
+                <a16:creationId xmlns:a16="http://schemas.microsoft.com/office/drawing/2014/main" id="{04CE525F-3761-DCE6-9599-834B945F0855}"/>
               </a:ext>
             </a:extLst>
           </p:cNvPr>
@@ -10187,7 +10273,7 @@
     </p:spTree>
     <p:extLst>
       <p:ext uri="{BB962C8B-B14F-4D97-AF65-F5344CB8AC3E}">
-        <p14:creationId xmlns:p14="http://schemas.microsoft.com/office/powerpoint/2010/main" val="882583185"/>
+        <p14:creationId xmlns:p14="http://schemas.microsoft.com/office/powerpoint/2010/main" val="2886314686"/>
       </p:ext>
     </p:extLst>
   </p:cSld>
@@ -10365,6 +10451,1517 @@
       </p:grpSpPr>
       <p:sp>
         <p:nvSpPr>
+          <p:cNvPr id="11" name="Rectangle 10">
+            <a:extLst>
+              <a:ext uri="{FF2B5EF4-FFF2-40B4-BE49-F238E27FC236}">
+                <a16:creationId xmlns:a16="http://schemas.microsoft.com/office/drawing/2014/main" id="{ADE57300-C7FF-4578-99A0-42B0295B123C}"/>
+              </a:ext>
+              <a:ext uri="{C183D7F6-B498-43B3-948B-1728B52AA6E4}">
+                <adec:decorative xmlns:adec="http://schemas.microsoft.com/office/drawing/2017/decorative" val="1"/>
+              </a:ext>
+            </a:extLst>
+          </p:cNvPr>
+          <p:cNvSpPr>
+            <a:spLocks noGrp="1" noRot="1" noChangeAspect="1" noMove="1" noResize="1" noEditPoints="1" noAdjustHandles="1" noChangeArrowheads="1" noChangeShapeType="1" noTextEdit="1"/>
+          </p:cNvSpPr>
+          <p:nvPr>
+            <p:extLst>
+              <p:ext uri="{386F3935-93C4-4BCD-93E2-E3B085C9AB24}">
+                <p16:designElem xmlns:p16="http://schemas.microsoft.com/office/powerpoint/2015/main" val="1"/>
+              </p:ext>
+            </p:extLst>
+          </p:nvPr>
+        </p:nvSpPr>
+        <p:spPr>
+          <a:xfrm>
+            <a:off x="517870" y="508090"/>
+            <a:ext cx="5021183" cy="149279"/>
+          </a:xfrm>
+          <a:prstGeom prst="rect">
+            <a:avLst/>
+          </a:prstGeom>
+          <a:solidFill>
+            <a:schemeClr val="tx1"/>
+          </a:solidFill>
+          <a:ln>
+            <a:noFill/>
+          </a:ln>
+        </p:spPr>
+        <p:style>
+          <a:lnRef idx="2">
+            <a:schemeClr val="accent1">
+              <a:shade val="50000"/>
+            </a:schemeClr>
+          </a:lnRef>
+          <a:fillRef idx="1">
+            <a:schemeClr val="accent1"/>
+          </a:fillRef>
+          <a:effectRef idx="0">
+            <a:schemeClr val="accent1"/>
+          </a:effectRef>
+          <a:fontRef idx="minor">
+            <a:schemeClr val="lt1"/>
+          </a:fontRef>
+        </p:style>
+        <p:txBody>
+          <a:bodyPr rtlCol="0" anchor="ctr"/>
+          <a:lstStyle/>
+          <a:p>
+            <a:pPr algn="ctr"/>
+            <a:endParaRPr lang="en-US"/>
+          </a:p>
+        </p:txBody>
+      </p:sp>
+      <p:sp>
+        <p:nvSpPr>
+          <p:cNvPr id="13" name="Rectangle 12">
+            <a:extLst>
+              <a:ext uri="{FF2B5EF4-FFF2-40B4-BE49-F238E27FC236}">
+                <a16:creationId xmlns:a16="http://schemas.microsoft.com/office/drawing/2014/main" id="{DB8F8250-7A81-4A19-87AD-FFB2CE4E39A5}"/>
+              </a:ext>
+              <a:ext uri="{C183D7F6-B498-43B3-948B-1728B52AA6E4}">
+                <adec:decorative xmlns:adec="http://schemas.microsoft.com/office/drawing/2017/decorative" val="1"/>
+              </a:ext>
+            </a:extLst>
+          </p:cNvPr>
+          <p:cNvSpPr>
+            <a:spLocks noGrp="1" noRot="1" noChangeAspect="1" noMove="1" noResize="1" noEditPoints="1" noAdjustHandles="1" noChangeArrowheads="1" noChangeShapeType="1" noTextEdit="1"/>
+          </p:cNvSpPr>
+          <p:nvPr>
+            <p:extLst>
+              <p:ext uri="{386F3935-93C4-4BCD-93E2-E3B085C9AB24}">
+                <p16:designElem xmlns:p16="http://schemas.microsoft.com/office/powerpoint/2015/main" val="1"/>
+              </p:ext>
+            </p:extLst>
+          </p:nvPr>
+        </p:nvSpPr>
+        <p:spPr>
+          <a:xfrm>
+            <a:off x="517870" y="508090"/>
+            <a:ext cx="5021183" cy="149279"/>
+          </a:xfrm>
+          <a:prstGeom prst="rect">
+            <a:avLst/>
+          </a:prstGeom>
+          <a:solidFill>
+            <a:schemeClr val="tx1"/>
+          </a:solidFill>
+          <a:ln>
+            <a:noFill/>
+          </a:ln>
+        </p:spPr>
+        <p:style>
+          <a:lnRef idx="2">
+            <a:schemeClr val="accent1">
+              <a:shade val="50000"/>
+            </a:schemeClr>
+          </a:lnRef>
+          <a:fillRef idx="1">
+            <a:schemeClr val="accent1"/>
+          </a:fillRef>
+          <a:effectRef idx="0">
+            <a:schemeClr val="accent1"/>
+          </a:effectRef>
+          <a:fontRef idx="minor">
+            <a:schemeClr val="lt1"/>
+          </a:fontRef>
+        </p:style>
+        <p:txBody>
+          <a:bodyPr rtlCol="0" anchor="ctr"/>
+          <a:lstStyle/>
+          <a:p>
+            <a:pPr algn="ctr"/>
+            <a:endParaRPr lang="en-US"/>
+          </a:p>
+        </p:txBody>
+      </p:sp>
+      <p:sp>
+        <p:nvSpPr>
+          <p:cNvPr id="15" name="Rectangle 14">
+            <a:extLst>
+              <a:ext uri="{FF2B5EF4-FFF2-40B4-BE49-F238E27FC236}">
+                <a16:creationId xmlns:a16="http://schemas.microsoft.com/office/drawing/2014/main" id="{499F38FC-2DEA-2647-C409-EF75720C1017}"/>
+              </a:ext>
+              <a:ext uri="{C183D7F6-B498-43B3-948B-1728B52AA6E4}">
+                <adec:decorative xmlns:adec="http://schemas.microsoft.com/office/drawing/2017/decorative" val="1"/>
+              </a:ext>
+            </a:extLst>
+          </p:cNvPr>
+          <p:cNvSpPr>
+            <a:spLocks noGrp="1" noRot="1" noChangeAspect="1" noMove="1" noResize="1" noEditPoints="1" noAdjustHandles="1" noChangeArrowheads="1" noChangeShapeType="1" noTextEdit="1"/>
+          </p:cNvSpPr>
+          <p:nvPr>
+            <p:extLst>
+              <p:ext uri="{386F3935-93C4-4BCD-93E2-E3B085C9AB24}">
+                <p16:designElem xmlns:p16="http://schemas.microsoft.com/office/powerpoint/2015/main" val="1"/>
+              </p:ext>
+            </p:extLst>
+          </p:nvPr>
+        </p:nvSpPr>
+        <p:spPr>
+          <a:xfrm>
+            <a:off x="517870" y="508090"/>
+            <a:ext cx="5021183" cy="149279"/>
+          </a:xfrm>
+          <a:prstGeom prst="rect">
+            <a:avLst/>
+          </a:prstGeom>
+          <a:solidFill>
+            <a:schemeClr val="tx1"/>
+          </a:solidFill>
+          <a:ln>
+            <a:noFill/>
+          </a:ln>
+        </p:spPr>
+        <p:style>
+          <a:lnRef idx="2">
+            <a:schemeClr val="accent1">
+              <a:shade val="50000"/>
+            </a:schemeClr>
+          </a:lnRef>
+          <a:fillRef idx="1">
+            <a:schemeClr val="accent1"/>
+          </a:fillRef>
+          <a:effectRef idx="0">
+            <a:schemeClr val="accent1"/>
+          </a:effectRef>
+          <a:fontRef idx="minor">
+            <a:schemeClr val="lt1"/>
+          </a:fontRef>
+        </p:style>
+        <p:txBody>
+          <a:bodyPr rtlCol="0" anchor="ctr"/>
+          <a:lstStyle/>
+          <a:p>
+            <a:pPr algn="ctr"/>
+            <a:endParaRPr lang="en-US"/>
+          </a:p>
+        </p:txBody>
+      </p:sp>
+      <p:sp useBgFill="1">
+        <p:nvSpPr>
+          <p:cNvPr id="17" name="Rectangle 16">
+            <a:extLst>
+              <a:ext uri="{FF2B5EF4-FFF2-40B4-BE49-F238E27FC236}">
+                <a16:creationId xmlns:a16="http://schemas.microsoft.com/office/drawing/2014/main" id="{0EC38958-9A69-239A-BA79-2AEC73345F4B}"/>
+              </a:ext>
+              <a:ext uri="{C183D7F6-B498-43B3-948B-1728B52AA6E4}">
+                <adec:decorative xmlns:adec="http://schemas.microsoft.com/office/drawing/2017/decorative" val="1"/>
+              </a:ext>
+            </a:extLst>
+          </p:cNvPr>
+          <p:cNvSpPr>
+            <a:spLocks noGrp="1" noRot="1" noChangeAspect="1" noMove="1" noResize="1" noEditPoints="1" noAdjustHandles="1" noChangeArrowheads="1" noChangeShapeType="1" noTextEdit="1"/>
+          </p:cNvSpPr>
+          <p:nvPr>
+            <p:extLst>
+              <p:ext uri="{386F3935-93C4-4BCD-93E2-E3B085C9AB24}">
+                <p16:designElem xmlns:p16="http://schemas.microsoft.com/office/powerpoint/2015/main" val="1"/>
+              </p:ext>
+            </p:extLst>
+          </p:nvPr>
+        </p:nvSpPr>
+        <p:spPr>
+          <a:xfrm>
+            <a:off x="0" y="0"/>
+            <a:ext cx="12188952" cy="6857995"/>
+          </a:xfrm>
+          <a:prstGeom prst="rect">
+            <a:avLst/>
+          </a:prstGeom>
+          <a:ln>
+            <a:noFill/>
+          </a:ln>
+        </p:spPr>
+        <p:style>
+          <a:lnRef idx="2">
+            <a:schemeClr val="accent1">
+              <a:shade val="50000"/>
+            </a:schemeClr>
+          </a:lnRef>
+          <a:fillRef idx="1">
+            <a:schemeClr val="accent1"/>
+          </a:fillRef>
+          <a:effectRef idx="0">
+            <a:schemeClr val="accent1"/>
+          </a:effectRef>
+          <a:fontRef idx="minor">
+            <a:schemeClr val="lt1"/>
+          </a:fontRef>
+        </p:style>
+        <p:txBody>
+          <a:bodyPr rtlCol="0" anchor="ctr"/>
+          <a:lstStyle/>
+          <a:p>
+            <a:pPr marL="0" marR="0" lvl="0" indent="0" algn="ctr" defTabSz="914400" rtl="0" eaLnBrk="1" fontAlgn="auto" latinLnBrk="0" hangingPunct="1">
+              <a:lnSpc>
+                <a:spcPct val="100000"/>
+              </a:lnSpc>
+              <a:spcBef>
+                <a:spcPts val="0"/>
+              </a:spcBef>
+              <a:spcAft>
+                <a:spcPts val="0"/>
+              </a:spcAft>
+              <a:buClrTx/>
+              <a:buSzTx/>
+              <a:buFontTx/>
+              <a:buNone/>
+              <a:tabLst/>
+              <a:defRPr/>
+            </a:pPr>
+            <a:endParaRPr kumimoji="0" lang="en-US" sz="1800" b="0" i="0" u="none" strike="noStrike" kern="1200" cap="none" spc="0" normalizeH="0" baseline="0" noProof="0" dirty="0">
+              <a:ln>
+                <a:noFill/>
+              </a:ln>
+              <a:solidFill>
+                <a:prstClr val="white"/>
+              </a:solidFill>
+              <a:effectLst/>
+              <a:uLnTx/>
+              <a:uFillTx/>
+              <a:latin typeface="Bierstadt"/>
+              <a:ea typeface="+mn-ea"/>
+              <a:cs typeface="+mn-cs"/>
+            </a:endParaRPr>
+          </a:p>
+        </p:txBody>
+      </p:sp>
+      <p:pic>
+        <p:nvPicPr>
+          <p:cNvPr id="6" name="Content Placeholder 5" descr="Illuminated server room panel">
+            <a:extLst>
+              <a:ext uri="{FF2B5EF4-FFF2-40B4-BE49-F238E27FC236}">
+                <a16:creationId xmlns:a16="http://schemas.microsoft.com/office/drawing/2014/main" id="{95FA0A06-3B77-4A6C-ADC8-056F21CBF221}"/>
+              </a:ext>
+            </a:extLst>
+          </p:cNvPr>
+          <p:cNvPicPr>
+            <a:picLocks noGrp="1" noChangeAspect="1"/>
+          </p:cNvPicPr>
+          <p:nvPr>
+            <p:ph sz="half" idx="1"/>
+          </p:nvPr>
+        </p:nvPicPr>
+        <p:blipFill>
+          <a:blip r:embed="rId3"/>
+          <a:srcRect l="13815" r="21047" b="1"/>
+          <a:stretch/>
+        </p:blipFill>
+        <p:spPr>
+          <a:xfrm>
+            <a:off x="517868" y="508090"/>
+            <a:ext cx="5705856" cy="5846990"/>
+          </a:xfrm>
+          <a:prstGeom prst="rect">
+            <a:avLst/>
+          </a:prstGeom>
+        </p:spPr>
+      </p:pic>
+      <p:sp>
+        <p:nvSpPr>
+          <p:cNvPr id="2" name="Title 1">
+            <a:extLst>
+              <a:ext uri="{FF2B5EF4-FFF2-40B4-BE49-F238E27FC236}">
+                <a16:creationId xmlns:a16="http://schemas.microsoft.com/office/drawing/2014/main" id="{6523FB10-69FB-8F28-5609-9A5E887405EE}"/>
+              </a:ext>
+            </a:extLst>
+          </p:cNvPr>
+          <p:cNvSpPr>
+            <a:spLocks noGrp="1"/>
+          </p:cNvSpPr>
+          <p:nvPr>
+            <p:ph type="title"/>
+          </p:nvPr>
+        </p:nvSpPr>
+        <p:spPr>
+          <a:xfrm>
+            <a:off x="7001547" y="976160"/>
+            <a:ext cx="4822899" cy="1463040"/>
+          </a:xfrm>
+        </p:spPr>
+        <p:txBody>
+          <a:bodyPr vert="horz" lIns="91440" tIns="45720" rIns="91440" bIns="45720" rtlCol="0" anchor="t">
+            <a:normAutofit/>
+          </a:bodyPr>
+          <a:lstStyle/>
+          <a:p>
+            <a:r>
+              <a:rPr lang="en-US" sz="4400" dirty="0"/>
+              <a:t>The 5 V's of Big Data</a:t>
+            </a:r>
+          </a:p>
+        </p:txBody>
+      </p:sp>
+      <p:sp>
+        <p:nvSpPr>
+          <p:cNvPr id="4" name="Content Placeholder 3">
+            <a:extLst>
+              <a:ext uri="{FF2B5EF4-FFF2-40B4-BE49-F238E27FC236}">
+                <a16:creationId xmlns:a16="http://schemas.microsoft.com/office/drawing/2014/main" id="{37F8D08C-62FA-547D-72EF-7F0804EE46A3}"/>
+              </a:ext>
+            </a:extLst>
+          </p:cNvPr>
+          <p:cNvSpPr>
+            <a:spLocks noGrp="1"/>
+          </p:cNvSpPr>
+          <p:nvPr>
+            <p:ph sz="half" idx="2"/>
+          </p:nvPr>
+        </p:nvSpPr>
+        <p:spPr>
+          <a:xfrm>
+            <a:off x="7001548" y="2578608"/>
+            <a:ext cx="4672584" cy="3767328"/>
+          </a:xfrm>
+        </p:spPr>
+        <p:txBody>
+          <a:bodyPr vert="horz" lIns="91440" tIns="45720" rIns="91440" bIns="45720" rtlCol="0">
+            <a:normAutofit/>
+          </a:bodyPr>
+          <a:lstStyle/>
+          <a:p>
+            <a:r>
+              <a:rPr lang="en-US" sz="1800" b="1" dirty="0">
+                <a:solidFill>
+                  <a:srgbClr val="C00000"/>
+                </a:solidFill>
+              </a:rPr>
+              <a:t>Volume: </a:t>
+            </a:r>
+            <a:r>
+              <a:rPr lang="en-US" sz="1800" dirty="0"/>
+              <a:t>Massive amounts of data generated from various sources.</a:t>
+            </a:r>
+          </a:p>
+          <a:p>
+            <a:r>
+              <a:rPr lang="en-US" sz="1800" b="1" dirty="0">
+                <a:solidFill>
+                  <a:srgbClr val="C00000"/>
+                </a:solidFill>
+              </a:rPr>
+              <a:t>Velocity: </a:t>
+            </a:r>
+            <a:r>
+              <a:rPr lang="en-US" sz="1800" dirty="0"/>
+              <a:t>The speed at which data is created and processed, often in real-time.</a:t>
+            </a:r>
+          </a:p>
+          <a:p>
+            <a:r>
+              <a:rPr lang="en-US" sz="1800" b="1" dirty="0">
+                <a:solidFill>
+                  <a:srgbClr val="C00000"/>
+                </a:solidFill>
+              </a:rPr>
+              <a:t>Variety: </a:t>
+            </a:r>
+            <a:r>
+              <a:rPr lang="en-US" sz="1800" dirty="0"/>
+              <a:t>Different types of data (structured, semi-structured, unstructured).</a:t>
+            </a:r>
+          </a:p>
+          <a:p>
+            <a:r>
+              <a:rPr lang="en-US" sz="1800" b="1" dirty="0">
+                <a:solidFill>
+                  <a:srgbClr val="C00000"/>
+                </a:solidFill>
+              </a:rPr>
+              <a:t>Veracity: </a:t>
+            </a:r>
+            <a:r>
+              <a:rPr lang="en-US" sz="1800" dirty="0"/>
+              <a:t>The trustworthiness and quality of data, requiring validation and cleaning.</a:t>
+            </a:r>
+          </a:p>
+          <a:p>
+            <a:r>
+              <a:rPr lang="en-US" sz="1800" b="1" dirty="0">
+                <a:solidFill>
+                  <a:srgbClr val="C00000"/>
+                </a:solidFill>
+              </a:rPr>
+              <a:t>Value: </a:t>
+            </a:r>
+            <a:r>
+              <a:rPr lang="en-US" sz="1800" dirty="0"/>
+              <a:t>The meaningful insights and benefits gained from analyzing big data.</a:t>
+            </a:r>
+          </a:p>
+        </p:txBody>
+      </p:sp>
+      <p:sp>
+        <p:nvSpPr>
+          <p:cNvPr id="5" name="Slide Number Placeholder 4">
+            <a:extLst>
+              <a:ext uri="{FF2B5EF4-FFF2-40B4-BE49-F238E27FC236}">
+                <a16:creationId xmlns:a16="http://schemas.microsoft.com/office/drawing/2014/main" id="{7A42E7F4-02E4-DB43-C276-75A15D36DEB2}"/>
+              </a:ext>
+            </a:extLst>
+          </p:cNvPr>
+          <p:cNvSpPr>
+            <a:spLocks noGrp="1"/>
+          </p:cNvSpPr>
+          <p:nvPr>
+            <p:ph type="sldNum" sz="quarter" idx="12"/>
+          </p:nvPr>
+        </p:nvSpPr>
+        <p:spPr>
+          <a:xfrm>
+            <a:off x="11454317" y="6420414"/>
+            <a:ext cx="637909" cy="365125"/>
+          </a:xfrm>
+        </p:spPr>
+        <p:txBody>
+          <a:bodyPr vert="horz" lIns="91440" tIns="45720" rIns="91440" bIns="45720" rtlCol="0" anchor="ctr">
+            <a:normAutofit/>
+          </a:bodyPr>
+          <a:lstStyle/>
+          <a:p>
+            <a:pPr>
+              <a:spcAft>
+                <a:spcPts val="600"/>
+              </a:spcAft>
+            </a:pPr>
+            <a:fld id="{DFDF98CC-160E-494C-8C3C-8CDC5FA257DE}" type="slidenum">
+              <a:rPr lang="en-US">
+                <a:solidFill>
+                  <a:srgbClr val="000000"/>
+                </a:solidFill>
+              </a:rPr>
+              <a:pPr>
+                <a:spcAft>
+                  <a:spcPts val="600"/>
+                </a:spcAft>
+              </a:pPr>
+              <a:t>12</a:t>
+            </a:fld>
+            <a:endParaRPr lang="en-US">
+              <a:solidFill>
+                <a:srgbClr val="000000"/>
+              </a:solidFill>
+            </a:endParaRPr>
+          </a:p>
+        </p:txBody>
+      </p:sp>
+      <p:sp>
+        <p:nvSpPr>
+          <p:cNvPr id="19" name="Freeform: Shape 18">
+            <a:extLst>
+              <a:ext uri="{FF2B5EF4-FFF2-40B4-BE49-F238E27FC236}">
+                <a16:creationId xmlns:a16="http://schemas.microsoft.com/office/drawing/2014/main" id="{6EC109E5-0396-8968-4F42-DFEC280363B6}"/>
+              </a:ext>
+              <a:ext uri="{C183D7F6-B498-43B3-948B-1728B52AA6E4}">
+                <adec:decorative xmlns:adec="http://schemas.microsoft.com/office/drawing/2017/decorative" val="1"/>
+              </a:ext>
+            </a:extLst>
+          </p:cNvPr>
+          <p:cNvSpPr>
+            <a:spLocks noGrp="1" noRot="1" noChangeAspect="1" noMove="1" noResize="1" noEditPoints="1" noAdjustHandles="1" noChangeArrowheads="1" noChangeShapeType="1" noTextEdit="1"/>
+          </p:cNvSpPr>
+          <p:nvPr>
+            <p:extLst>
+              <p:ext uri="{386F3935-93C4-4BCD-93E2-E3B085C9AB24}">
+                <p16:designElem xmlns:p16="http://schemas.microsoft.com/office/powerpoint/2015/main" val="1"/>
+              </p:ext>
+            </p:extLst>
+          </p:nvPr>
+        </p:nvSpPr>
+        <p:spPr>
+          <a:xfrm>
+            <a:off x="7016407" y="508090"/>
+            <a:ext cx="4660733" cy="149279"/>
+          </a:xfrm>
+          <a:custGeom>
+            <a:avLst/>
+            <a:gdLst>
+              <a:gd name="connsiteX0" fmla="*/ 0 w 6090847"/>
+              <a:gd name="connsiteY0" fmla="*/ 0 h 149279"/>
+              <a:gd name="connsiteX1" fmla="*/ 6090847 w 6090847"/>
+              <a:gd name="connsiteY1" fmla="*/ 0 h 149279"/>
+              <a:gd name="connsiteX2" fmla="*/ 6090847 w 6090847"/>
+              <a:gd name="connsiteY2" fmla="*/ 149279 h 149279"/>
+              <a:gd name="connsiteX3" fmla="*/ 0 w 6090847"/>
+              <a:gd name="connsiteY3" fmla="*/ 149279 h 149279"/>
+            </a:gdLst>
+            <a:ahLst/>
+            <a:cxnLst>
+              <a:cxn ang="0">
+                <a:pos x="connsiteX0" y="connsiteY0"/>
+              </a:cxn>
+              <a:cxn ang="0">
+                <a:pos x="connsiteX1" y="connsiteY1"/>
+              </a:cxn>
+              <a:cxn ang="0">
+                <a:pos x="connsiteX2" y="connsiteY2"/>
+              </a:cxn>
+              <a:cxn ang="0">
+                <a:pos x="connsiteX3" y="connsiteY3"/>
+              </a:cxn>
+            </a:cxnLst>
+            <a:rect l="l" t="t" r="r" b="b"/>
+            <a:pathLst>
+              <a:path w="6090847" h="149279">
+                <a:moveTo>
+                  <a:pt x="0" y="0"/>
+                </a:moveTo>
+                <a:lnTo>
+                  <a:pt x="6090847" y="0"/>
+                </a:lnTo>
+                <a:lnTo>
+                  <a:pt x="6090847" y="149279"/>
+                </a:lnTo>
+                <a:lnTo>
+                  <a:pt x="0" y="149279"/>
+                </a:lnTo>
+                <a:close/>
+              </a:path>
+            </a:pathLst>
+          </a:custGeom>
+          <a:solidFill>
+            <a:schemeClr val="tx1"/>
+          </a:solidFill>
+          <a:ln>
+            <a:noFill/>
+          </a:ln>
+        </p:spPr>
+        <p:style>
+          <a:lnRef idx="2">
+            <a:schemeClr val="accent1">
+              <a:shade val="50000"/>
+            </a:schemeClr>
+          </a:lnRef>
+          <a:fillRef idx="1">
+            <a:schemeClr val="accent1"/>
+          </a:fillRef>
+          <a:effectRef idx="0">
+            <a:schemeClr val="accent1"/>
+          </a:effectRef>
+          <a:fontRef idx="minor">
+            <a:schemeClr val="lt1"/>
+          </a:fontRef>
+        </p:style>
+        <p:txBody>
+          <a:bodyPr wrap="square" rtlCol="0" anchor="ctr">
+            <a:noAutofit/>
+          </a:bodyPr>
+          <a:lstStyle/>
+          <a:p>
+            <a:pPr marL="0" marR="0" lvl="0" indent="0" algn="ctr" defTabSz="914400" rtl="0" eaLnBrk="1" fontAlgn="auto" latinLnBrk="0" hangingPunct="1">
+              <a:lnSpc>
+                <a:spcPct val="100000"/>
+              </a:lnSpc>
+              <a:spcBef>
+                <a:spcPts val="0"/>
+              </a:spcBef>
+              <a:spcAft>
+                <a:spcPts val="0"/>
+              </a:spcAft>
+              <a:buClrTx/>
+              <a:buSzTx/>
+              <a:buFontTx/>
+              <a:buNone/>
+              <a:tabLst/>
+              <a:defRPr/>
+            </a:pPr>
+            <a:endParaRPr kumimoji="0" lang="en-US" sz="1800" b="0" i="0" u="none" strike="noStrike" kern="1200" cap="none" spc="0" normalizeH="0" baseline="0" noProof="0">
+              <a:ln>
+                <a:noFill/>
+              </a:ln>
+              <a:solidFill>
+                <a:prstClr val="white"/>
+              </a:solidFill>
+              <a:effectLst/>
+              <a:uLnTx/>
+              <a:uFillTx/>
+              <a:latin typeface="Bierstadt"/>
+              <a:ea typeface="+mn-ea"/>
+              <a:cs typeface="+mn-cs"/>
+            </a:endParaRPr>
+          </a:p>
+        </p:txBody>
+      </p:sp>
+    </p:spTree>
+    <p:extLst>
+      <p:ext uri="{BB962C8B-B14F-4D97-AF65-F5344CB8AC3E}">
+        <p14:creationId xmlns:p14="http://schemas.microsoft.com/office/powerpoint/2010/main" val="4000090222"/>
+      </p:ext>
+    </p:extLst>
+  </p:cSld>
+  <p:clrMapOvr>
+    <a:masterClrMapping/>
+  </p:clrMapOvr>
+</p:sld>
+</file>
+
+<file path=ppt/slides/slide13.xml><?xml version="1.0" encoding="utf-8"?>
+<p:sld xmlns:a="http://schemas.openxmlformats.org/drawingml/2006/main" xmlns:r="http://schemas.openxmlformats.org/officeDocument/2006/relationships" xmlns:p="http://schemas.openxmlformats.org/presentationml/2006/main">
+  <p:cSld>
+    <p:bg>
+      <p:bgPr>
+        <a:solidFill>
+          <a:schemeClr val="bg1"/>
+        </a:solidFill>
+        <a:effectLst/>
+      </p:bgPr>
+    </p:bg>
+    <p:spTree>
+      <p:nvGrpSpPr>
+        <p:cNvPr id="1" name=""/>
+        <p:cNvGrpSpPr/>
+        <p:nvPr/>
+      </p:nvGrpSpPr>
+      <p:grpSpPr>
+        <a:xfrm>
+          <a:off x="0" y="0"/>
+          <a:ext cx="0" cy="0"/>
+          <a:chOff x="0" y="0"/>
+          <a:chExt cx="0" cy="0"/>
+        </a:xfrm>
+      </p:grpSpPr>
+      <p:sp>
+        <p:nvSpPr>
+          <p:cNvPr id="10" name="Rectangle 9">
+            <a:extLst>
+              <a:ext uri="{FF2B5EF4-FFF2-40B4-BE49-F238E27FC236}">
+                <a16:creationId xmlns:a16="http://schemas.microsoft.com/office/drawing/2014/main" id="{ADE57300-C7FF-4578-99A0-42B0295B123C}"/>
+              </a:ext>
+              <a:ext uri="{C183D7F6-B498-43B3-948B-1728B52AA6E4}">
+                <adec:decorative xmlns:adec="http://schemas.microsoft.com/office/drawing/2017/decorative" val="1"/>
+              </a:ext>
+            </a:extLst>
+          </p:cNvPr>
+          <p:cNvSpPr>
+            <a:spLocks noGrp="1" noRot="1" noChangeAspect="1" noMove="1" noResize="1" noEditPoints="1" noAdjustHandles="1" noChangeArrowheads="1" noChangeShapeType="1" noTextEdit="1"/>
+          </p:cNvSpPr>
+          <p:nvPr>
+            <p:extLst>
+              <p:ext uri="{386F3935-93C4-4BCD-93E2-E3B085C9AB24}">
+                <p16:designElem xmlns:p16="http://schemas.microsoft.com/office/powerpoint/2015/main" val="1"/>
+              </p:ext>
+            </p:extLst>
+          </p:nvPr>
+        </p:nvSpPr>
+        <p:spPr>
+          <a:xfrm>
+            <a:off x="517870" y="508090"/>
+            <a:ext cx="5021183" cy="149279"/>
+          </a:xfrm>
+          <a:prstGeom prst="rect">
+            <a:avLst/>
+          </a:prstGeom>
+          <a:solidFill>
+            <a:schemeClr val="tx1"/>
+          </a:solidFill>
+          <a:ln>
+            <a:noFill/>
+          </a:ln>
+        </p:spPr>
+        <p:style>
+          <a:lnRef idx="2">
+            <a:schemeClr val="accent1">
+              <a:shade val="50000"/>
+            </a:schemeClr>
+          </a:lnRef>
+          <a:fillRef idx="1">
+            <a:schemeClr val="accent1"/>
+          </a:fillRef>
+          <a:effectRef idx="0">
+            <a:schemeClr val="accent1"/>
+          </a:effectRef>
+          <a:fontRef idx="minor">
+            <a:schemeClr val="lt1"/>
+          </a:fontRef>
+        </p:style>
+        <p:txBody>
+          <a:bodyPr rtlCol="0" anchor="ctr"/>
+          <a:lstStyle/>
+          <a:p>
+            <a:pPr algn="ctr"/>
+            <a:endParaRPr lang="en-US"/>
+          </a:p>
+        </p:txBody>
+      </p:sp>
+      <p:sp>
+        <p:nvSpPr>
+          <p:cNvPr id="12" name="Rectangle 11">
+            <a:extLst>
+              <a:ext uri="{FF2B5EF4-FFF2-40B4-BE49-F238E27FC236}">
+                <a16:creationId xmlns:a16="http://schemas.microsoft.com/office/drawing/2014/main" id="{DB8F8250-7A81-4A19-87AD-FFB2CE4E39A5}"/>
+              </a:ext>
+              <a:ext uri="{C183D7F6-B498-43B3-948B-1728B52AA6E4}">
+                <adec:decorative xmlns:adec="http://schemas.microsoft.com/office/drawing/2017/decorative" val="1"/>
+              </a:ext>
+            </a:extLst>
+          </p:cNvPr>
+          <p:cNvSpPr>
+            <a:spLocks noGrp="1" noRot="1" noChangeAspect="1" noMove="1" noResize="1" noEditPoints="1" noAdjustHandles="1" noChangeArrowheads="1" noChangeShapeType="1" noTextEdit="1"/>
+          </p:cNvSpPr>
+          <p:nvPr>
+            <p:extLst>
+              <p:ext uri="{386F3935-93C4-4BCD-93E2-E3B085C9AB24}">
+                <p16:designElem xmlns:p16="http://schemas.microsoft.com/office/powerpoint/2015/main" val="1"/>
+              </p:ext>
+            </p:extLst>
+          </p:nvPr>
+        </p:nvSpPr>
+        <p:spPr>
+          <a:xfrm>
+            <a:off x="517870" y="508090"/>
+            <a:ext cx="5021183" cy="149279"/>
+          </a:xfrm>
+          <a:prstGeom prst="rect">
+            <a:avLst/>
+          </a:prstGeom>
+          <a:solidFill>
+            <a:schemeClr val="tx1"/>
+          </a:solidFill>
+          <a:ln>
+            <a:noFill/>
+          </a:ln>
+        </p:spPr>
+        <p:style>
+          <a:lnRef idx="2">
+            <a:schemeClr val="accent1">
+              <a:shade val="50000"/>
+            </a:schemeClr>
+          </a:lnRef>
+          <a:fillRef idx="1">
+            <a:schemeClr val="accent1"/>
+          </a:fillRef>
+          <a:effectRef idx="0">
+            <a:schemeClr val="accent1"/>
+          </a:effectRef>
+          <a:fontRef idx="minor">
+            <a:schemeClr val="lt1"/>
+          </a:fontRef>
+        </p:style>
+        <p:txBody>
+          <a:bodyPr rtlCol="0" anchor="ctr"/>
+          <a:lstStyle/>
+          <a:p>
+            <a:pPr algn="ctr"/>
+            <a:endParaRPr lang="en-US"/>
+          </a:p>
+        </p:txBody>
+      </p:sp>
+      <p:sp>
+        <p:nvSpPr>
+          <p:cNvPr id="14" name="Rectangle 13">
+            <a:extLst>
+              <a:ext uri="{FF2B5EF4-FFF2-40B4-BE49-F238E27FC236}">
+                <a16:creationId xmlns:a16="http://schemas.microsoft.com/office/drawing/2014/main" id="{499F38FC-2DEA-2647-C409-EF75720C1017}"/>
+              </a:ext>
+              <a:ext uri="{C183D7F6-B498-43B3-948B-1728B52AA6E4}">
+                <adec:decorative xmlns:adec="http://schemas.microsoft.com/office/drawing/2017/decorative" val="1"/>
+              </a:ext>
+            </a:extLst>
+          </p:cNvPr>
+          <p:cNvSpPr>
+            <a:spLocks noGrp="1" noRot="1" noChangeAspect="1" noMove="1" noResize="1" noEditPoints="1" noAdjustHandles="1" noChangeArrowheads="1" noChangeShapeType="1" noTextEdit="1"/>
+          </p:cNvSpPr>
+          <p:nvPr>
+            <p:extLst>
+              <p:ext uri="{386F3935-93C4-4BCD-93E2-E3B085C9AB24}">
+                <p16:designElem xmlns:p16="http://schemas.microsoft.com/office/powerpoint/2015/main" val="1"/>
+              </p:ext>
+            </p:extLst>
+          </p:nvPr>
+        </p:nvSpPr>
+        <p:spPr>
+          <a:xfrm>
+            <a:off x="517870" y="508090"/>
+            <a:ext cx="5021183" cy="149279"/>
+          </a:xfrm>
+          <a:prstGeom prst="rect">
+            <a:avLst/>
+          </a:prstGeom>
+          <a:solidFill>
+            <a:schemeClr val="tx1"/>
+          </a:solidFill>
+          <a:ln>
+            <a:noFill/>
+          </a:ln>
+        </p:spPr>
+        <p:style>
+          <a:lnRef idx="2">
+            <a:schemeClr val="accent1">
+              <a:shade val="50000"/>
+            </a:schemeClr>
+          </a:lnRef>
+          <a:fillRef idx="1">
+            <a:schemeClr val="accent1"/>
+          </a:fillRef>
+          <a:effectRef idx="0">
+            <a:schemeClr val="accent1"/>
+          </a:effectRef>
+          <a:fontRef idx="minor">
+            <a:schemeClr val="lt1"/>
+          </a:fontRef>
+        </p:style>
+        <p:txBody>
+          <a:bodyPr rtlCol="0" anchor="ctr"/>
+          <a:lstStyle/>
+          <a:p>
+            <a:pPr algn="ctr"/>
+            <a:endParaRPr lang="en-US"/>
+          </a:p>
+        </p:txBody>
+      </p:sp>
+      <p:sp useBgFill="1">
+        <p:nvSpPr>
+          <p:cNvPr id="16" name="Rectangle 15">
+            <a:extLst>
+              <a:ext uri="{FF2B5EF4-FFF2-40B4-BE49-F238E27FC236}">
+                <a16:creationId xmlns:a16="http://schemas.microsoft.com/office/drawing/2014/main" id="{9E10BDB4-64F2-477D-A03B-9F8352D5E02E}"/>
+              </a:ext>
+              <a:ext uri="{C183D7F6-B498-43B3-948B-1728B52AA6E4}">
+                <adec:decorative xmlns:adec="http://schemas.microsoft.com/office/drawing/2017/decorative" val="1"/>
+              </a:ext>
+            </a:extLst>
+          </p:cNvPr>
+          <p:cNvSpPr>
+            <a:spLocks noGrp="1" noRot="1" noChangeAspect="1" noMove="1" noResize="1" noEditPoints="1" noAdjustHandles="1" noChangeArrowheads="1" noChangeShapeType="1" noTextEdit="1"/>
+          </p:cNvSpPr>
+          <p:nvPr>
+            <p:extLst>
+              <p:ext uri="{386F3935-93C4-4BCD-93E2-E3B085C9AB24}">
+                <p16:designElem xmlns:p16="http://schemas.microsoft.com/office/powerpoint/2015/main" val="1"/>
+              </p:ext>
+            </p:extLst>
+          </p:nvPr>
+        </p:nvSpPr>
+        <p:spPr>
+          <a:xfrm>
+            <a:off x="0" y="0"/>
+            <a:ext cx="12188952" cy="6857995"/>
+          </a:xfrm>
+          <a:prstGeom prst="rect">
+            <a:avLst/>
+          </a:prstGeom>
+          <a:ln>
+            <a:noFill/>
+          </a:ln>
+        </p:spPr>
+        <p:style>
+          <a:lnRef idx="2">
+            <a:schemeClr val="accent1">
+              <a:shade val="50000"/>
+            </a:schemeClr>
+          </a:lnRef>
+          <a:fillRef idx="1">
+            <a:schemeClr val="accent1"/>
+          </a:fillRef>
+          <a:effectRef idx="0">
+            <a:schemeClr val="accent1"/>
+          </a:effectRef>
+          <a:fontRef idx="minor">
+            <a:schemeClr val="lt1"/>
+          </a:fontRef>
+        </p:style>
+        <p:txBody>
+          <a:bodyPr rtlCol="0" anchor="ctr"/>
+          <a:lstStyle/>
+          <a:p>
+            <a:pPr marL="0" marR="0" lvl="0" indent="0" algn="ctr" defTabSz="914400" rtl="0" eaLnBrk="1" fontAlgn="auto" latinLnBrk="0" hangingPunct="1">
+              <a:lnSpc>
+                <a:spcPct val="100000"/>
+              </a:lnSpc>
+              <a:spcBef>
+                <a:spcPts val="0"/>
+              </a:spcBef>
+              <a:spcAft>
+                <a:spcPts val="0"/>
+              </a:spcAft>
+              <a:buClrTx/>
+              <a:buSzTx/>
+              <a:buFontTx/>
+              <a:buNone/>
+              <a:tabLst/>
+              <a:defRPr/>
+            </a:pPr>
+            <a:endParaRPr kumimoji="0" lang="en-US" sz="1800" b="0" i="0" u="none" strike="noStrike" kern="1200" cap="none" spc="0" normalizeH="0" baseline="0" noProof="0">
+              <a:ln>
+                <a:noFill/>
+              </a:ln>
+              <a:solidFill>
+                <a:prstClr val="white"/>
+              </a:solidFill>
+              <a:effectLst/>
+              <a:uLnTx/>
+              <a:uFillTx/>
+              <a:latin typeface="Bierstadt"/>
+              <a:ea typeface="+mn-ea"/>
+              <a:cs typeface="+mn-cs"/>
+            </a:endParaRPr>
+          </a:p>
+        </p:txBody>
+      </p:sp>
+      <p:pic>
+        <p:nvPicPr>
+          <p:cNvPr id="5" name="Content Placeholder 4" descr="3d illustration">
+            <a:extLst>
+              <a:ext uri="{FF2B5EF4-FFF2-40B4-BE49-F238E27FC236}">
+                <a16:creationId xmlns:a16="http://schemas.microsoft.com/office/drawing/2014/main" id="{D1FC101F-FD05-4172-9F01-B6A28B0938BB}"/>
+              </a:ext>
+            </a:extLst>
+          </p:cNvPr>
+          <p:cNvPicPr>
+            <a:picLocks noGrp="1" noChangeAspect="1"/>
+          </p:cNvPicPr>
+          <p:nvPr>
+            <p:ph sz="half" idx="1"/>
+          </p:nvPr>
+        </p:nvPicPr>
+        <p:blipFill>
+          <a:blip r:embed="rId3"/>
+          <a:srcRect t="18460" r="1" b="29942"/>
+          <a:stretch/>
+        </p:blipFill>
+        <p:spPr>
+          <a:xfrm>
+            <a:off x="517864" y="1863633"/>
+            <a:ext cx="8687096" cy="4482371"/>
+          </a:xfrm>
+          <a:prstGeom prst="rect">
+            <a:avLst/>
+          </a:prstGeom>
+        </p:spPr>
+      </p:pic>
+      <p:sp>
+        <p:nvSpPr>
+          <p:cNvPr id="2" name="Title 1">
+            <a:extLst>
+              <a:ext uri="{FF2B5EF4-FFF2-40B4-BE49-F238E27FC236}">
+                <a16:creationId xmlns:a16="http://schemas.microsoft.com/office/drawing/2014/main" id="{19293EEC-8062-E0B8-B5ED-158A1E42F64E}"/>
+              </a:ext>
+            </a:extLst>
+          </p:cNvPr>
+          <p:cNvSpPr>
+            <a:spLocks noGrp="1"/>
+          </p:cNvSpPr>
+          <p:nvPr>
+            <p:ph type="title"/>
+          </p:nvPr>
+        </p:nvSpPr>
+        <p:spPr>
+          <a:xfrm>
+            <a:off x="517865" y="976160"/>
+            <a:ext cx="8686800" cy="813063"/>
+          </a:xfrm>
+        </p:spPr>
+        <p:txBody>
+          <a:bodyPr vert="horz" lIns="91440" tIns="45720" rIns="91440" bIns="45720" rtlCol="0" anchor="t">
+            <a:normAutofit/>
+          </a:bodyPr>
+          <a:lstStyle/>
+          <a:p>
+            <a:r>
+              <a:rPr lang="en-US" sz="4400"/>
+              <a:t>Challenges of Big Data</a:t>
+            </a:r>
+          </a:p>
+        </p:txBody>
+      </p:sp>
+      <p:sp>
+        <p:nvSpPr>
+          <p:cNvPr id="4" name="Content Placeholder 3">
+            <a:extLst>
+              <a:ext uri="{FF2B5EF4-FFF2-40B4-BE49-F238E27FC236}">
+                <a16:creationId xmlns:a16="http://schemas.microsoft.com/office/drawing/2014/main" id="{21750363-FAF7-BBDE-5F81-9FB8C0C3F6F9}"/>
+              </a:ext>
+            </a:extLst>
+          </p:cNvPr>
+          <p:cNvSpPr>
+            <a:spLocks noGrp="1"/>
+          </p:cNvSpPr>
+          <p:nvPr>
+            <p:ph sz="half" idx="2"/>
+            <p:extLst>
+              <p:ext uri="{E7BDC344-281C-4309-B0C6-D0EE65EED2A8}">
+                <p202:designPr xmlns:p202="http://schemas.microsoft.com/office/powerpoint/2020/02/main">
+                  <p202:designTagLst>
+                    <p202:designTag name="ARCH:1:CLS" val="InformationBlock"/>
+                    <p202:designTag name="ARCH:1:VSVAR" val="TitledTextBox"/>
+                  </p202:designTagLst>
+                </p202:designPr>
+              </p:ext>
+            </p:extLst>
+          </p:nvPr>
+        </p:nvSpPr>
+        <p:spPr>
+          <a:xfrm>
+            <a:off x="9631680" y="1863632"/>
+            <a:ext cx="2042449" cy="4482371"/>
+          </a:xfrm>
+        </p:spPr>
+        <p:txBody>
+          <a:bodyPr>
+            <a:normAutofit/>
+          </a:bodyPr>
+          <a:lstStyle/>
+          <a:p>
+            <a:pPr marL="0" indent="0">
+              <a:spcBef>
+                <a:spcPts val="2500"/>
+              </a:spcBef>
+              <a:buNone/>
+            </a:pPr>
+            <a:endParaRPr lang="en-US" sz="1400" b="1"/>
+          </a:p>
+          <a:p>
+            <a:pPr marL="0" lvl="1" indent="0">
+              <a:buNone/>
+            </a:pPr>
+            <a:r>
+              <a:rPr lang="en-US" sz="1400"/>
+              <a:t>Big data poses several unique challenges, including data quality, security, and privacy. Technical challenges such as scalability and performance also present significant hurdles.</a:t>
+            </a:r>
+            <a:endParaRPr lang="en-IN" sz="1400"/>
+          </a:p>
+        </p:txBody>
+      </p:sp>
+      <p:sp>
+        <p:nvSpPr>
+          <p:cNvPr id="18" name="Rectangle 17">
+            <a:extLst>
+              <a:ext uri="{FF2B5EF4-FFF2-40B4-BE49-F238E27FC236}">
+                <a16:creationId xmlns:a16="http://schemas.microsoft.com/office/drawing/2014/main" id="{887F59F2-5FBC-40CD-AD35-376AECE49EA6}"/>
+              </a:ext>
+              <a:ext uri="{C183D7F6-B498-43B3-948B-1728B52AA6E4}">
+                <adec:decorative xmlns:adec="http://schemas.microsoft.com/office/drawing/2017/decorative" val="1"/>
+              </a:ext>
+            </a:extLst>
+          </p:cNvPr>
+          <p:cNvSpPr>
+            <a:spLocks noGrp="1" noRot="1" noChangeAspect="1" noMove="1" noResize="1" noEditPoints="1" noAdjustHandles="1" noChangeArrowheads="1" noChangeShapeType="1" noTextEdit="1"/>
+          </p:cNvSpPr>
+          <p:nvPr>
+            <p:extLst>
+              <p:ext uri="{386F3935-93C4-4BCD-93E2-E3B085C9AB24}">
+                <p16:designElem xmlns:p16="http://schemas.microsoft.com/office/powerpoint/2015/main" val="1"/>
+              </p:ext>
+            </p:extLst>
+          </p:nvPr>
+        </p:nvSpPr>
+        <p:spPr>
+          <a:xfrm>
+            <a:off x="517865" y="508090"/>
+            <a:ext cx="8111230" cy="149279"/>
+          </a:xfrm>
+          <a:prstGeom prst="rect">
+            <a:avLst/>
+          </a:prstGeom>
+          <a:solidFill>
+            <a:schemeClr val="tx1"/>
+          </a:solidFill>
+          <a:ln>
+            <a:noFill/>
+          </a:ln>
+        </p:spPr>
+        <p:style>
+          <a:lnRef idx="2">
+            <a:schemeClr val="accent1">
+              <a:shade val="50000"/>
+            </a:schemeClr>
+          </a:lnRef>
+          <a:fillRef idx="1">
+            <a:schemeClr val="accent1"/>
+          </a:fillRef>
+          <a:effectRef idx="0">
+            <a:schemeClr val="accent1"/>
+          </a:effectRef>
+          <a:fontRef idx="minor">
+            <a:schemeClr val="lt1"/>
+          </a:fontRef>
+        </p:style>
+        <p:txBody>
+          <a:bodyPr rtlCol="0" anchor="ctr"/>
+          <a:lstStyle/>
+          <a:p>
+            <a:pPr marL="0" marR="0" lvl="0" indent="0" algn="ctr" defTabSz="914400" rtl="0" eaLnBrk="1" fontAlgn="auto" latinLnBrk="0" hangingPunct="1">
+              <a:lnSpc>
+                <a:spcPct val="100000"/>
+              </a:lnSpc>
+              <a:spcBef>
+                <a:spcPts val="0"/>
+              </a:spcBef>
+              <a:spcAft>
+                <a:spcPts val="0"/>
+              </a:spcAft>
+              <a:buClrTx/>
+              <a:buSzTx/>
+              <a:buFontTx/>
+              <a:buNone/>
+              <a:tabLst/>
+              <a:defRPr/>
+            </a:pPr>
+            <a:endParaRPr kumimoji="0" lang="en-US" sz="1800" b="0" i="0" u="none" strike="noStrike" kern="1200" cap="none" spc="0" normalizeH="0" baseline="0" noProof="0">
+              <a:ln>
+                <a:noFill/>
+              </a:ln>
+              <a:solidFill>
+                <a:prstClr val="white"/>
+              </a:solidFill>
+              <a:effectLst/>
+              <a:uLnTx/>
+              <a:uFillTx/>
+              <a:latin typeface="Bierstadt"/>
+              <a:ea typeface="+mn-ea"/>
+              <a:cs typeface="+mn-cs"/>
+            </a:endParaRPr>
+          </a:p>
+        </p:txBody>
+      </p:sp>
+      <p:sp>
+        <p:nvSpPr>
+          <p:cNvPr id="20" name="Freeform: Shape 19">
+            <a:extLst>
+              <a:ext uri="{FF2B5EF4-FFF2-40B4-BE49-F238E27FC236}">
+                <a16:creationId xmlns:a16="http://schemas.microsoft.com/office/drawing/2014/main" id="{E94EA6C1-5B73-CB10-F9FB-B671500CC2D6}"/>
+              </a:ext>
+              <a:ext uri="{C183D7F6-B498-43B3-948B-1728B52AA6E4}">
+                <adec:decorative xmlns:adec="http://schemas.microsoft.com/office/drawing/2017/decorative" val="1"/>
+              </a:ext>
+            </a:extLst>
+          </p:cNvPr>
+          <p:cNvSpPr>
+            <a:spLocks noGrp="1" noRot="1" noChangeAspect="1" noMove="1" noResize="1" noEditPoints="1" noAdjustHandles="1" noChangeArrowheads="1" noChangeShapeType="1" noTextEdit="1"/>
+          </p:cNvSpPr>
+          <p:nvPr>
+            <p:extLst>
+              <p:ext uri="{386F3935-93C4-4BCD-93E2-E3B085C9AB24}">
+                <p16:designElem xmlns:p16="http://schemas.microsoft.com/office/powerpoint/2015/main" val="1"/>
+              </p:ext>
+            </p:extLst>
+          </p:nvPr>
+        </p:nvSpPr>
+        <p:spPr>
+          <a:xfrm>
+            <a:off x="517869" y="508090"/>
+            <a:ext cx="8686800" cy="149279"/>
+          </a:xfrm>
+          <a:custGeom>
+            <a:avLst/>
+            <a:gdLst>
+              <a:gd name="connsiteX0" fmla="*/ 0 w 8085002"/>
+              <a:gd name="connsiteY0" fmla="*/ 0 h 149279"/>
+              <a:gd name="connsiteX1" fmla="*/ 8085002 w 8085002"/>
+              <a:gd name="connsiteY1" fmla="*/ 0 h 149279"/>
+              <a:gd name="connsiteX2" fmla="*/ 8085002 w 8085002"/>
+              <a:gd name="connsiteY2" fmla="*/ 149279 h 149279"/>
+              <a:gd name="connsiteX3" fmla="*/ 0 w 8085002"/>
+              <a:gd name="connsiteY3" fmla="*/ 149279 h 149279"/>
+            </a:gdLst>
+            <a:ahLst/>
+            <a:cxnLst>
+              <a:cxn ang="0">
+                <a:pos x="connsiteX0" y="connsiteY0"/>
+              </a:cxn>
+              <a:cxn ang="0">
+                <a:pos x="connsiteX1" y="connsiteY1"/>
+              </a:cxn>
+              <a:cxn ang="0">
+                <a:pos x="connsiteX2" y="connsiteY2"/>
+              </a:cxn>
+              <a:cxn ang="0">
+                <a:pos x="connsiteX3" y="connsiteY3"/>
+              </a:cxn>
+            </a:cxnLst>
+            <a:rect l="l" t="t" r="r" b="b"/>
+            <a:pathLst>
+              <a:path w="8085002" h="149279">
+                <a:moveTo>
+                  <a:pt x="0" y="0"/>
+                </a:moveTo>
+                <a:lnTo>
+                  <a:pt x="8085002" y="0"/>
+                </a:lnTo>
+                <a:lnTo>
+                  <a:pt x="8085002" y="149279"/>
+                </a:lnTo>
+                <a:lnTo>
+                  <a:pt x="0" y="149279"/>
+                </a:lnTo>
+                <a:close/>
+              </a:path>
+            </a:pathLst>
+          </a:custGeom>
+          <a:solidFill>
+            <a:schemeClr val="tx1"/>
+          </a:solidFill>
+          <a:ln>
+            <a:noFill/>
+          </a:ln>
+        </p:spPr>
+        <p:style>
+          <a:lnRef idx="2">
+            <a:schemeClr val="accent1">
+              <a:shade val="50000"/>
+            </a:schemeClr>
+          </a:lnRef>
+          <a:fillRef idx="1">
+            <a:schemeClr val="accent1"/>
+          </a:fillRef>
+          <a:effectRef idx="0">
+            <a:schemeClr val="accent1"/>
+          </a:effectRef>
+          <a:fontRef idx="minor">
+            <a:schemeClr val="lt1"/>
+          </a:fontRef>
+        </p:style>
+        <p:txBody>
+          <a:bodyPr wrap="square" rtlCol="0" anchor="ctr">
+            <a:noAutofit/>
+          </a:bodyPr>
+          <a:lstStyle/>
+          <a:p>
+            <a:pPr marL="0" marR="0" lvl="0" indent="0" algn="ctr" defTabSz="914400" rtl="0" eaLnBrk="1" fontAlgn="auto" latinLnBrk="0" hangingPunct="1">
+              <a:lnSpc>
+                <a:spcPct val="100000"/>
+              </a:lnSpc>
+              <a:spcBef>
+                <a:spcPts val="0"/>
+              </a:spcBef>
+              <a:spcAft>
+                <a:spcPts val="0"/>
+              </a:spcAft>
+              <a:buClrTx/>
+              <a:buSzTx/>
+              <a:buFontTx/>
+              <a:buNone/>
+              <a:tabLst/>
+              <a:defRPr/>
+            </a:pPr>
+            <a:endParaRPr kumimoji="0" lang="en-US" sz="1800" b="0" i="0" u="none" strike="noStrike" kern="1200" cap="none" spc="0" normalizeH="0" baseline="0" noProof="0">
+              <a:ln>
+                <a:noFill/>
+              </a:ln>
+              <a:solidFill>
+                <a:prstClr val="white"/>
+              </a:solidFill>
+              <a:effectLst/>
+              <a:uLnTx/>
+              <a:uFillTx/>
+              <a:latin typeface="Bierstadt"/>
+              <a:ea typeface="+mn-ea"/>
+              <a:cs typeface="+mn-cs"/>
+            </a:endParaRPr>
+          </a:p>
+        </p:txBody>
+      </p:sp>
+      <p:sp>
+        <p:nvSpPr>
+          <p:cNvPr id="3" name="Slide Number Placeholder 2">
+            <a:extLst>
+              <a:ext uri="{FF2B5EF4-FFF2-40B4-BE49-F238E27FC236}">
+                <a16:creationId xmlns:a16="http://schemas.microsoft.com/office/drawing/2014/main" id="{31D1A568-480F-2CF7-B8B4-C18F74912D61}"/>
+              </a:ext>
+            </a:extLst>
+          </p:cNvPr>
+          <p:cNvSpPr>
+            <a:spLocks noGrp="1"/>
+          </p:cNvSpPr>
+          <p:nvPr>
+            <p:ph type="sldNum" sz="quarter" idx="12"/>
+          </p:nvPr>
+        </p:nvSpPr>
+        <p:spPr/>
+        <p:txBody>
+          <a:bodyPr/>
+          <a:lstStyle/>
+          <a:p>
+            <a:fld id="{DFDF98CC-160E-494C-8C3C-8CDC5FA257DE}" type="slidenum">
+              <a:rPr lang="en-US" smtClean="0"/>
+              <a:t>13</a:t>
+            </a:fld>
+            <a:endParaRPr lang="en-US"/>
+          </a:p>
+        </p:txBody>
+      </p:sp>
+    </p:spTree>
+    <p:extLst>
+      <p:ext uri="{BB962C8B-B14F-4D97-AF65-F5344CB8AC3E}">
+        <p14:creationId xmlns:p14="http://schemas.microsoft.com/office/powerpoint/2010/main" val="882583185"/>
+      </p:ext>
+    </p:extLst>
+  </p:cSld>
+  <p:clrMapOvr>
+    <a:masterClrMapping/>
+  </p:clrMapOvr>
+  <p:transition>
+    <p:fade/>
+  </p:transition>
+  <p:timing>
+    <p:tnLst>
+      <p:par>
+        <p:cTn id="1" dur="indefinite" restart="never" nodeType="tmRoot">
+          <p:childTnLst>
+            <p:seq concurrent="1" nextAc="seek">
+              <p:cTn id="2" dur="indefinite" nodeType="mainSeq">
+                <p:childTnLst>
+                  <p:par>
+                    <p:cTn id="3" fill="hold">
+                      <p:stCondLst>
+                        <p:cond delay="indefinite"/>
+                        <p:cond evt="onBegin" delay="0">
+                          <p:tn val="2"/>
+                        </p:cond>
+                      </p:stCondLst>
+                      <p:childTnLst>
+                        <p:par>
+                          <p:cTn id="4" fill="hold">
+                            <p:stCondLst>
+                              <p:cond delay="0"/>
+                            </p:stCondLst>
+                            <p:childTnLst>
+                              <p:par>
+                                <p:cTn id="5" presetID="42" presetClass="entr" presetSubtype="0" fill="hold" grpId="0" nodeType="withEffect">
+                                  <p:stCondLst>
+                                    <p:cond delay="250"/>
+                                  </p:stCondLst>
+                                  <p:iterate>
+                                    <p:tmPct val="10000"/>
+                                  </p:iterate>
+                                  <p:childTnLst>
+                                    <p:set>
+                                      <p:cBhvr>
+                                        <p:cTn id="6" dur="1" fill="hold">
+                                          <p:stCondLst>
+                                            <p:cond delay="0"/>
+                                          </p:stCondLst>
+                                        </p:cTn>
+                                        <p:tgtEl>
+                                          <p:spTgt spid="4"/>
+                                        </p:tgtEl>
+                                        <p:attrNameLst>
+                                          <p:attrName>style.visibility</p:attrName>
+                                        </p:attrNameLst>
+                                      </p:cBhvr>
+                                      <p:to>
+                                        <p:strVal val="visible"/>
+                                      </p:to>
+                                    </p:set>
+                                    <p:animEffect transition="in" filter="fade">
+                                      <p:cBhvr>
+                                        <p:cTn id="7" dur="250"/>
+                                        <p:tgtEl>
+                                          <p:spTgt spid="4"/>
+                                        </p:tgtEl>
+                                      </p:cBhvr>
+                                    </p:animEffect>
+                                    <p:anim calcmode="lin" valueType="num">
+                                      <p:cBhvr>
+                                        <p:cTn id="8" dur="250" fill="hold"/>
+                                        <p:tgtEl>
+                                          <p:spTgt spid="4"/>
+                                        </p:tgtEl>
+                                        <p:attrNameLst>
+                                          <p:attrName>ppt_x</p:attrName>
+                                        </p:attrNameLst>
+                                      </p:cBhvr>
+                                      <p:tavLst>
+                                        <p:tav tm="0">
+                                          <p:val>
+                                            <p:strVal val="#ppt_x"/>
+                                          </p:val>
+                                        </p:tav>
+                                        <p:tav tm="100000">
+                                          <p:val>
+                                            <p:strVal val="#ppt_x"/>
+                                          </p:val>
+                                        </p:tav>
+                                      </p:tavLst>
+                                    </p:anim>
+                                    <p:anim calcmode="lin" valueType="num">
+                                      <p:cBhvr>
+                                        <p:cTn id="9" dur="250" fill="hold"/>
+                                        <p:tgtEl>
+                                          <p:spTgt spid="4"/>
+                                        </p:tgtEl>
+                                        <p:attrNameLst>
+                                          <p:attrName>ppt_y</p:attrName>
+                                        </p:attrNameLst>
+                                      </p:cBhvr>
+                                      <p:tavLst>
+                                        <p:tav tm="0">
+                                          <p:val>
+                                            <p:strVal val="#ppt_y+.1"/>
+                                          </p:val>
+                                        </p:tav>
+                                        <p:tav tm="100000">
+                                          <p:val>
+                                            <p:strVal val="#ppt_y"/>
+                                          </p:val>
+                                        </p:tav>
+                                      </p:tavLst>
+                                    </p:anim>
+                                  </p:childTnLst>
+                                </p:cTn>
+                              </p:par>
+                            </p:childTnLst>
+                          </p:cTn>
+                        </p:par>
+                      </p:childTnLst>
+                    </p:cTn>
+                  </p:par>
+                </p:childTnLst>
+              </p:cTn>
+              <p:prevCondLst>
+                <p:cond evt="onPrev" delay="0">
+                  <p:tgtEl>
+                    <p:sldTgt/>
+                  </p:tgtEl>
+                </p:cond>
+              </p:prevCondLst>
+              <p:nextCondLst>
+                <p:cond evt="onNext" delay="0">
+                  <p:tgtEl>
+                    <p:sldTgt/>
+                  </p:tgtEl>
+                </p:cond>
+              </p:nextCondLst>
+            </p:seq>
+          </p:childTnLst>
+        </p:cTn>
+      </p:par>
+    </p:tnLst>
+    <p:bldLst>
+      <p:bldP spid="4" grpId="0"/>
+    </p:bldLst>
+  </p:timing>
+</p:sld>
+</file>
+
+<file path=ppt/slides/slide14.xml><?xml version="1.0" encoding="utf-8"?>
+<p:sld xmlns:a="http://schemas.openxmlformats.org/drawingml/2006/main" xmlns:r="http://schemas.openxmlformats.org/officeDocument/2006/relationships" xmlns:p="http://schemas.openxmlformats.org/presentationml/2006/main">
+  <p:cSld>
+    <p:bg>
+      <p:bgPr>
+        <a:solidFill>
+          <a:schemeClr val="bg1"/>
+        </a:solidFill>
+        <a:effectLst/>
+      </p:bgPr>
+    </p:bg>
+    <p:spTree>
+      <p:nvGrpSpPr>
+        <p:cNvPr id="1" name=""/>
+        <p:cNvGrpSpPr/>
+        <p:nvPr/>
+      </p:nvGrpSpPr>
+      <p:grpSpPr>
+        <a:xfrm>
+          <a:off x="0" y="0"/>
+          <a:ext cx="0" cy="0"/>
+          <a:chOff x="0" y="0"/>
+          <a:chExt cx="0" cy="0"/>
+        </a:xfrm>
+      </p:grpSpPr>
+      <p:sp>
+        <p:nvSpPr>
           <p:cNvPr id="10" name="Rectangle 9">
             <a:extLst>
               <a:ext uri="{FF2B5EF4-FFF2-40B4-BE49-F238E27FC236}">
@@ -10912,7 +12509,7 @@
           <a:p>
             <a:fld id="{DFDF98CC-160E-494C-8C3C-8CDC5FA257DE}" type="slidenum">
               <a:rPr lang="en-US" smtClean="0"/>
-              <a:t>12</a:t>
+              <a:t>14</a:t>
             </a:fld>
             <a:endParaRPr lang="en-US"/>
           </a:p>
@@ -11072,7 +12669,7 @@
 </p:sld>
 </file>
 
-<file path=ppt/slides/slide13.xml><?xml version="1.0" encoding="utf-8"?>
+<file path=ppt/slides/slide15.xml><?xml version="1.0" encoding="utf-8"?>
 <p:sld xmlns:a="http://schemas.openxmlformats.org/drawingml/2006/main" xmlns:r="http://schemas.openxmlformats.org/officeDocument/2006/relationships" xmlns:p="http://schemas.openxmlformats.org/presentationml/2006/main">
   <p:cSld>
     <p:bg>
@@ -11420,7 +13017,7 @@
           <a:p>
             <a:fld id="{DFDF98CC-160E-494C-8C3C-8CDC5FA257DE}" type="slidenum">
               <a:rPr lang="en-US" smtClean="0"/>
-              <a:t>13</a:t>
+              <a:t>15</a:t>
             </a:fld>
             <a:endParaRPr lang="en-US"/>
           </a:p>
@@ -11469,7 +13066,7 @@
       </p:grpSpPr>
       <p:sp>
         <p:nvSpPr>
-          <p:cNvPr id="10" name="Rectangle 9">
+          <p:cNvPr id="11" name="Rectangle 10">
             <a:extLst>
               <a:ext uri="{FF2B5EF4-FFF2-40B4-BE49-F238E27FC236}">
                 <a16:creationId xmlns:a16="http://schemas.microsoft.com/office/drawing/2014/main" id="{ADE57300-C7FF-4578-99A0-42B0295B123C}"/>
@@ -11532,7 +13129,7 @@
       </p:sp>
       <p:sp>
         <p:nvSpPr>
-          <p:cNvPr id="12" name="Rectangle 11">
+          <p:cNvPr id="13" name="Rectangle 12">
             <a:extLst>
               <a:ext uri="{FF2B5EF4-FFF2-40B4-BE49-F238E27FC236}">
                 <a16:creationId xmlns:a16="http://schemas.microsoft.com/office/drawing/2014/main" id="{DB8F8250-7A81-4A19-87AD-FFB2CE4E39A5}"/>
@@ -11595,7 +13192,7 @@
       </p:sp>
       <p:sp>
         <p:nvSpPr>
-          <p:cNvPr id="14" name="Rectangle 13">
+          <p:cNvPr id="15" name="Rectangle 14">
             <a:extLst>
               <a:ext uri="{FF2B5EF4-FFF2-40B4-BE49-F238E27FC236}">
                 <a16:creationId xmlns:a16="http://schemas.microsoft.com/office/drawing/2014/main" id="{499F38FC-2DEA-2647-C409-EF75720C1017}"/>
@@ -11658,7 +13255,7 @@
       </p:sp>
       <p:sp useBgFill="1">
         <p:nvSpPr>
-          <p:cNvPr id="16" name="Rectangle 15">
+          <p:cNvPr id="17" name="Rectangle 16">
             <a:extLst>
               <a:ext uri="{FF2B5EF4-FFF2-40B4-BE49-F238E27FC236}">
                 <a16:creationId xmlns:a16="http://schemas.microsoft.com/office/drawing/2014/main" id="{0EC38958-9A69-239A-BA79-2AEC73345F4B}"/>
@@ -11747,10 +13344,10 @@
       </p:sp>
       <p:pic>
         <p:nvPicPr>
-          <p:cNvPr id="5" name="Content Placeholder 4" descr="Abstract particle graph background.">
-            <a:extLst>
-              <a:ext uri="{FF2B5EF4-FFF2-40B4-BE49-F238E27FC236}">
-                <a16:creationId xmlns:a16="http://schemas.microsoft.com/office/drawing/2014/main" id="{95D74542-D4B4-4C2D-A600-188A6A5FE0F6}"/>
+          <p:cNvPr id="6" name="Content Placeholder 5" descr="Illuminated server room panel">
+            <a:extLst>
+              <a:ext uri="{FF2B5EF4-FFF2-40B4-BE49-F238E27FC236}">
+                <a16:creationId xmlns:a16="http://schemas.microsoft.com/office/drawing/2014/main" id="{1A42AB34-888A-4881-8DD3-8E22061FC7A7}"/>
               </a:ext>
             </a:extLst>
           </p:cNvPr>
@@ -11763,7 +13360,7 @@
         </p:nvPicPr>
         <p:blipFill>
           <a:blip r:embed="rId3"/>
-          <a:srcRect l="24128" r="10734" b="1"/>
+          <a:srcRect l="13815" r="21047" b="1"/>
           <a:stretch/>
         </p:blipFill>
         <p:spPr>
@@ -11781,7 +13378,7 @@
           <p:cNvPr id="2" name="Title 1">
             <a:extLst>
               <a:ext uri="{FF2B5EF4-FFF2-40B4-BE49-F238E27FC236}">
-                <a16:creationId xmlns:a16="http://schemas.microsoft.com/office/drawing/2014/main" id="{2FF2ECE7-8B3E-90B8-82A6-77DCF50F2830}"/>
+                <a16:creationId xmlns:a16="http://schemas.microsoft.com/office/drawing/2014/main" id="{290F863F-7559-7121-AC3E-3ABC5315A28F}"/>
               </a:ext>
             </a:extLst>
           </p:cNvPr>
@@ -11806,7 +13403,7 @@
           <a:p>
             <a:r>
               <a:rPr lang="en-US" sz="4400"/>
-              <a:t>Presentation Overview</a:t>
+              <a:t>Exploring the Data Ecosystem</a:t>
             </a:r>
           </a:p>
         </p:txBody>
@@ -11816,7 +13413,7 @@
           <p:cNvPr id="4" name="Content Placeholder 3">
             <a:extLst>
               <a:ext uri="{FF2B5EF4-FFF2-40B4-BE49-F238E27FC236}">
-                <a16:creationId xmlns:a16="http://schemas.microsoft.com/office/drawing/2014/main" id="{B7266B16-1D05-8C1C-3D22-EF9B25087A59}"/>
+                <a16:creationId xmlns:a16="http://schemas.microsoft.com/office/drawing/2014/main" id="{3681FA75-4893-82A3-A091-55C406CB5053}"/>
               </a:ext>
             </a:extLst>
           </p:cNvPr>
@@ -11841,20 +13438,74 @@
           <a:p>
             <a:r>
               <a:rPr lang="en-US" sz="1800"/>
-              <a:t>Structured and Unstructured Data</a:t>
+              <a:t>The 5 V's of Big Data</a:t>
             </a:r>
           </a:p>
           <a:p>
             <a:r>
               <a:rPr lang="en-US" sz="1800"/>
-              <a:t>Big Data</a:t>
+              <a:t>Key characteristics of Big Data</a:t>
             </a:r>
           </a:p>
         </p:txBody>
       </p:sp>
       <p:sp>
         <p:nvSpPr>
-          <p:cNvPr id="18" name="Freeform: Shape 17">
+          <p:cNvPr id="5" name="Slide Number Placeholder 4">
+            <a:extLst>
+              <a:ext uri="{FF2B5EF4-FFF2-40B4-BE49-F238E27FC236}">
+                <a16:creationId xmlns:a16="http://schemas.microsoft.com/office/drawing/2014/main" id="{7627711D-3135-3E78-D56C-93932106B226}"/>
+              </a:ext>
+            </a:extLst>
+          </p:cNvPr>
+          <p:cNvSpPr>
+            <a:spLocks noGrp="1"/>
+          </p:cNvSpPr>
+          <p:nvPr>
+            <p:ph type="sldNum" sz="quarter" idx="12"/>
+          </p:nvPr>
+        </p:nvSpPr>
+        <p:spPr>
+          <a:xfrm>
+            <a:off x="11454317" y="6420414"/>
+            <a:ext cx="637909" cy="365125"/>
+          </a:xfrm>
+        </p:spPr>
+        <p:txBody>
+          <a:bodyPr vert="horz" lIns="91440" tIns="45720" rIns="91440" bIns="45720" rtlCol="0" anchor="ctr">
+            <a:normAutofit/>
+          </a:bodyPr>
+          <a:lstStyle/>
+          <a:p>
+            <a:pPr>
+              <a:spcAft>
+                <a:spcPts val="600"/>
+              </a:spcAft>
+            </a:pPr>
+            <a:fld id="{DFDF98CC-160E-494C-8C3C-8CDC5FA257DE}" type="slidenum">
+              <a:rPr lang="en-US">
+                <a:solidFill>
+                  <a:srgbClr val="000000"/>
+                </a:solidFill>
+              </a:rPr>
+              <a:pPr>
+                <a:spcAft>
+                  <a:spcPts val="600"/>
+                </a:spcAft>
+              </a:pPr>
+              <a:t>2</a:t>
+            </a:fld>
+            <a:endParaRPr lang="en-US">
+              <a:solidFill>
+                <a:srgbClr val="000000"/>
+              </a:solidFill>
+            </a:endParaRPr>
+          </a:p>
+        </p:txBody>
+      </p:sp>
+      <p:sp>
+        <p:nvSpPr>
+          <p:cNvPr id="19" name="Freeform: Shape 18">
             <a:extLst>
               <a:ext uri="{FF2B5EF4-FFF2-40B4-BE49-F238E27FC236}">
                 <a16:creationId xmlns:a16="http://schemas.microsoft.com/office/drawing/2014/main" id="{6EC109E5-0396-8968-4F42-DFEC280363B6}"/>
@@ -11989,6 +13640,566 @@
           </a:p>
         </p:txBody>
       </p:sp>
+    </p:spTree>
+    <p:extLst>
+      <p:ext uri="{BB962C8B-B14F-4D97-AF65-F5344CB8AC3E}">
+        <p14:creationId xmlns:p14="http://schemas.microsoft.com/office/powerpoint/2010/main" val="3535809556"/>
+      </p:ext>
+    </p:extLst>
+  </p:cSld>
+  <p:clrMapOvr>
+    <a:masterClrMapping/>
+  </p:clrMapOvr>
+</p:sld>
+</file>
+
+<file path=ppt/slides/slide3.xml><?xml version="1.0" encoding="utf-8"?>
+<p:sld xmlns:a="http://schemas.openxmlformats.org/drawingml/2006/main" xmlns:r="http://schemas.openxmlformats.org/officeDocument/2006/relationships" xmlns:p="http://schemas.openxmlformats.org/presentationml/2006/main">
+  <p:cSld>
+    <p:bg>
+      <p:bgPr>
+        <a:solidFill>
+          <a:schemeClr val="bg1"/>
+        </a:solidFill>
+        <a:effectLst/>
+      </p:bgPr>
+    </p:bg>
+    <p:spTree>
+      <p:nvGrpSpPr>
+        <p:cNvPr id="1" name=""/>
+        <p:cNvGrpSpPr/>
+        <p:nvPr/>
+      </p:nvGrpSpPr>
+      <p:grpSpPr>
+        <a:xfrm>
+          <a:off x="0" y="0"/>
+          <a:ext cx="0" cy="0"/>
+          <a:chOff x="0" y="0"/>
+          <a:chExt cx="0" cy="0"/>
+        </a:xfrm>
+      </p:grpSpPr>
+      <p:sp>
+        <p:nvSpPr>
+          <p:cNvPr id="10" name="Rectangle 9">
+            <a:extLst>
+              <a:ext uri="{FF2B5EF4-FFF2-40B4-BE49-F238E27FC236}">
+                <a16:creationId xmlns:a16="http://schemas.microsoft.com/office/drawing/2014/main" id="{ADE57300-C7FF-4578-99A0-42B0295B123C}"/>
+              </a:ext>
+              <a:ext uri="{C183D7F6-B498-43B3-948B-1728B52AA6E4}">
+                <adec:decorative xmlns:adec="http://schemas.microsoft.com/office/drawing/2017/decorative" val="1"/>
+              </a:ext>
+            </a:extLst>
+          </p:cNvPr>
+          <p:cNvSpPr>
+            <a:spLocks noGrp="1" noRot="1" noChangeAspect="1" noMove="1" noResize="1" noEditPoints="1" noAdjustHandles="1" noChangeArrowheads="1" noChangeShapeType="1" noTextEdit="1"/>
+          </p:cNvSpPr>
+          <p:nvPr>
+            <p:extLst>
+              <p:ext uri="{386F3935-93C4-4BCD-93E2-E3B085C9AB24}">
+                <p16:designElem xmlns:p16="http://schemas.microsoft.com/office/powerpoint/2015/main" val="1"/>
+              </p:ext>
+            </p:extLst>
+          </p:nvPr>
+        </p:nvSpPr>
+        <p:spPr>
+          <a:xfrm>
+            <a:off x="517870" y="508090"/>
+            <a:ext cx="5021183" cy="149279"/>
+          </a:xfrm>
+          <a:prstGeom prst="rect">
+            <a:avLst/>
+          </a:prstGeom>
+          <a:solidFill>
+            <a:schemeClr val="tx1"/>
+          </a:solidFill>
+          <a:ln>
+            <a:noFill/>
+          </a:ln>
+        </p:spPr>
+        <p:style>
+          <a:lnRef idx="2">
+            <a:schemeClr val="accent1">
+              <a:shade val="50000"/>
+            </a:schemeClr>
+          </a:lnRef>
+          <a:fillRef idx="1">
+            <a:schemeClr val="accent1"/>
+          </a:fillRef>
+          <a:effectRef idx="0">
+            <a:schemeClr val="accent1"/>
+          </a:effectRef>
+          <a:fontRef idx="minor">
+            <a:schemeClr val="lt1"/>
+          </a:fontRef>
+        </p:style>
+        <p:txBody>
+          <a:bodyPr rtlCol="0" anchor="ctr"/>
+          <a:lstStyle/>
+          <a:p>
+            <a:pPr algn="ctr"/>
+            <a:endParaRPr lang="en-US"/>
+          </a:p>
+        </p:txBody>
+      </p:sp>
+      <p:sp>
+        <p:nvSpPr>
+          <p:cNvPr id="12" name="Rectangle 11">
+            <a:extLst>
+              <a:ext uri="{FF2B5EF4-FFF2-40B4-BE49-F238E27FC236}">
+                <a16:creationId xmlns:a16="http://schemas.microsoft.com/office/drawing/2014/main" id="{DB8F8250-7A81-4A19-87AD-FFB2CE4E39A5}"/>
+              </a:ext>
+              <a:ext uri="{C183D7F6-B498-43B3-948B-1728B52AA6E4}">
+                <adec:decorative xmlns:adec="http://schemas.microsoft.com/office/drawing/2017/decorative" val="1"/>
+              </a:ext>
+            </a:extLst>
+          </p:cNvPr>
+          <p:cNvSpPr>
+            <a:spLocks noGrp="1" noRot="1" noChangeAspect="1" noMove="1" noResize="1" noEditPoints="1" noAdjustHandles="1" noChangeArrowheads="1" noChangeShapeType="1" noTextEdit="1"/>
+          </p:cNvSpPr>
+          <p:nvPr>
+            <p:extLst>
+              <p:ext uri="{386F3935-93C4-4BCD-93E2-E3B085C9AB24}">
+                <p16:designElem xmlns:p16="http://schemas.microsoft.com/office/powerpoint/2015/main" val="1"/>
+              </p:ext>
+            </p:extLst>
+          </p:nvPr>
+        </p:nvSpPr>
+        <p:spPr>
+          <a:xfrm>
+            <a:off x="517870" y="508090"/>
+            <a:ext cx="5021183" cy="149279"/>
+          </a:xfrm>
+          <a:prstGeom prst="rect">
+            <a:avLst/>
+          </a:prstGeom>
+          <a:solidFill>
+            <a:schemeClr val="tx1"/>
+          </a:solidFill>
+          <a:ln>
+            <a:noFill/>
+          </a:ln>
+        </p:spPr>
+        <p:style>
+          <a:lnRef idx="2">
+            <a:schemeClr val="accent1">
+              <a:shade val="50000"/>
+            </a:schemeClr>
+          </a:lnRef>
+          <a:fillRef idx="1">
+            <a:schemeClr val="accent1"/>
+          </a:fillRef>
+          <a:effectRef idx="0">
+            <a:schemeClr val="accent1"/>
+          </a:effectRef>
+          <a:fontRef idx="minor">
+            <a:schemeClr val="lt1"/>
+          </a:fontRef>
+        </p:style>
+        <p:txBody>
+          <a:bodyPr rtlCol="0" anchor="ctr"/>
+          <a:lstStyle/>
+          <a:p>
+            <a:pPr algn="ctr"/>
+            <a:endParaRPr lang="en-US"/>
+          </a:p>
+        </p:txBody>
+      </p:sp>
+      <p:sp>
+        <p:nvSpPr>
+          <p:cNvPr id="14" name="Rectangle 13">
+            <a:extLst>
+              <a:ext uri="{FF2B5EF4-FFF2-40B4-BE49-F238E27FC236}">
+                <a16:creationId xmlns:a16="http://schemas.microsoft.com/office/drawing/2014/main" id="{499F38FC-2DEA-2647-C409-EF75720C1017}"/>
+              </a:ext>
+              <a:ext uri="{C183D7F6-B498-43B3-948B-1728B52AA6E4}">
+                <adec:decorative xmlns:adec="http://schemas.microsoft.com/office/drawing/2017/decorative" val="1"/>
+              </a:ext>
+            </a:extLst>
+          </p:cNvPr>
+          <p:cNvSpPr>
+            <a:spLocks noGrp="1" noRot="1" noChangeAspect="1" noMove="1" noResize="1" noEditPoints="1" noAdjustHandles="1" noChangeArrowheads="1" noChangeShapeType="1" noTextEdit="1"/>
+          </p:cNvSpPr>
+          <p:nvPr>
+            <p:extLst>
+              <p:ext uri="{386F3935-93C4-4BCD-93E2-E3B085C9AB24}">
+                <p16:designElem xmlns:p16="http://schemas.microsoft.com/office/powerpoint/2015/main" val="1"/>
+              </p:ext>
+            </p:extLst>
+          </p:nvPr>
+        </p:nvSpPr>
+        <p:spPr>
+          <a:xfrm>
+            <a:off x="517870" y="508090"/>
+            <a:ext cx="5021183" cy="149279"/>
+          </a:xfrm>
+          <a:prstGeom prst="rect">
+            <a:avLst/>
+          </a:prstGeom>
+          <a:solidFill>
+            <a:schemeClr val="tx1"/>
+          </a:solidFill>
+          <a:ln>
+            <a:noFill/>
+          </a:ln>
+        </p:spPr>
+        <p:style>
+          <a:lnRef idx="2">
+            <a:schemeClr val="accent1">
+              <a:shade val="50000"/>
+            </a:schemeClr>
+          </a:lnRef>
+          <a:fillRef idx="1">
+            <a:schemeClr val="accent1"/>
+          </a:fillRef>
+          <a:effectRef idx="0">
+            <a:schemeClr val="accent1"/>
+          </a:effectRef>
+          <a:fontRef idx="minor">
+            <a:schemeClr val="lt1"/>
+          </a:fontRef>
+        </p:style>
+        <p:txBody>
+          <a:bodyPr rtlCol="0" anchor="ctr"/>
+          <a:lstStyle/>
+          <a:p>
+            <a:pPr algn="ctr"/>
+            <a:endParaRPr lang="en-US"/>
+          </a:p>
+        </p:txBody>
+      </p:sp>
+      <p:sp useBgFill="1">
+        <p:nvSpPr>
+          <p:cNvPr id="16" name="Rectangle 15">
+            <a:extLst>
+              <a:ext uri="{FF2B5EF4-FFF2-40B4-BE49-F238E27FC236}">
+                <a16:creationId xmlns:a16="http://schemas.microsoft.com/office/drawing/2014/main" id="{0EC38958-9A69-239A-BA79-2AEC73345F4B}"/>
+              </a:ext>
+              <a:ext uri="{C183D7F6-B498-43B3-948B-1728B52AA6E4}">
+                <adec:decorative xmlns:adec="http://schemas.microsoft.com/office/drawing/2017/decorative" val="1"/>
+              </a:ext>
+            </a:extLst>
+          </p:cNvPr>
+          <p:cNvSpPr>
+            <a:spLocks noGrp="1" noRot="1" noChangeAspect="1" noMove="1" noResize="1" noEditPoints="1" noAdjustHandles="1" noChangeArrowheads="1" noChangeShapeType="1" noTextEdit="1"/>
+          </p:cNvSpPr>
+          <p:nvPr>
+            <p:extLst>
+              <p:ext uri="{386F3935-93C4-4BCD-93E2-E3B085C9AB24}">
+                <p16:designElem xmlns:p16="http://schemas.microsoft.com/office/powerpoint/2015/main" val="1"/>
+              </p:ext>
+            </p:extLst>
+          </p:nvPr>
+        </p:nvSpPr>
+        <p:spPr>
+          <a:xfrm>
+            <a:off x="0" y="0"/>
+            <a:ext cx="12188952" cy="6857995"/>
+          </a:xfrm>
+          <a:prstGeom prst="rect">
+            <a:avLst/>
+          </a:prstGeom>
+          <a:ln>
+            <a:noFill/>
+          </a:ln>
+        </p:spPr>
+        <p:style>
+          <a:lnRef idx="2">
+            <a:schemeClr val="accent1">
+              <a:shade val="50000"/>
+            </a:schemeClr>
+          </a:lnRef>
+          <a:fillRef idx="1">
+            <a:schemeClr val="accent1"/>
+          </a:fillRef>
+          <a:effectRef idx="0">
+            <a:schemeClr val="accent1"/>
+          </a:effectRef>
+          <a:fontRef idx="minor">
+            <a:schemeClr val="lt1"/>
+          </a:fontRef>
+        </p:style>
+        <p:txBody>
+          <a:bodyPr rtlCol="0" anchor="ctr"/>
+          <a:lstStyle/>
+          <a:p>
+            <a:pPr marL="0" marR="0" lvl="0" indent="0" algn="ctr" defTabSz="914400" rtl="0" eaLnBrk="1" fontAlgn="auto" latinLnBrk="0" hangingPunct="1">
+              <a:lnSpc>
+                <a:spcPct val="100000"/>
+              </a:lnSpc>
+              <a:spcBef>
+                <a:spcPts val="0"/>
+              </a:spcBef>
+              <a:spcAft>
+                <a:spcPts val="0"/>
+              </a:spcAft>
+              <a:buClrTx/>
+              <a:buSzTx/>
+              <a:buFontTx/>
+              <a:buNone/>
+              <a:tabLst/>
+              <a:defRPr/>
+            </a:pPr>
+            <a:endParaRPr kumimoji="0" lang="en-US" sz="1800" b="0" i="0" u="none" strike="noStrike" kern="1200" cap="none" spc="0" normalizeH="0" baseline="0" noProof="0" dirty="0">
+              <a:ln>
+                <a:noFill/>
+              </a:ln>
+              <a:solidFill>
+                <a:prstClr val="white"/>
+              </a:solidFill>
+              <a:effectLst/>
+              <a:uLnTx/>
+              <a:uFillTx/>
+              <a:latin typeface="Bierstadt"/>
+              <a:ea typeface="+mn-ea"/>
+              <a:cs typeface="+mn-cs"/>
+            </a:endParaRPr>
+          </a:p>
+        </p:txBody>
+      </p:sp>
+      <p:pic>
+        <p:nvPicPr>
+          <p:cNvPr id="5" name="Content Placeholder 4" descr="Abstract particle graph background.">
+            <a:extLst>
+              <a:ext uri="{FF2B5EF4-FFF2-40B4-BE49-F238E27FC236}">
+                <a16:creationId xmlns:a16="http://schemas.microsoft.com/office/drawing/2014/main" id="{95D74542-D4B4-4C2D-A600-188A6A5FE0F6}"/>
+              </a:ext>
+            </a:extLst>
+          </p:cNvPr>
+          <p:cNvPicPr>
+            <a:picLocks noGrp="1" noChangeAspect="1"/>
+          </p:cNvPicPr>
+          <p:nvPr>
+            <p:ph sz="half" idx="1"/>
+          </p:nvPr>
+        </p:nvPicPr>
+        <p:blipFill>
+          <a:blip r:embed="rId3"/>
+          <a:srcRect l="24128" r="10734" b="1"/>
+          <a:stretch/>
+        </p:blipFill>
+        <p:spPr>
+          <a:xfrm>
+            <a:off x="517868" y="508090"/>
+            <a:ext cx="5705856" cy="5846990"/>
+          </a:xfrm>
+          <a:prstGeom prst="rect">
+            <a:avLst/>
+          </a:prstGeom>
+        </p:spPr>
+      </p:pic>
+      <p:sp>
+        <p:nvSpPr>
+          <p:cNvPr id="2" name="Title 1">
+            <a:extLst>
+              <a:ext uri="{FF2B5EF4-FFF2-40B4-BE49-F238E27FC236}">
+                <a16:creationId xmlns:a16="http://schemas.microsoft.com/office/drawing/2014/main" id="{2FF2ECE7-8B3E-90B8-82A6-77DCF50F2830}"/>
+              </a:ext>
+            </a:extLst>
+          </p:cNvPr>
+          <p:cNvSpPr>
+            <a:spLocks noGrp="1"/>
+          </p:cNvSpPr>
+          <p:nvPr>
+            <p:ph type="title"/>
+          </p:nvPr>
+        </p:nvSpPr>
+        <p:spPr>
+          <a:xfrm>
+            <a:off x="7001547" y="976160"/>
+            <a:ext cx="4822899" cy="1463040"/>
+          </a:xfrm>
+        </p:spPr>
+        <p:txBody>
+          <a:bodyPr vert="horz" lIns="91440" tIns="45720" rIns="91440" bIns="45720" rtlCol="0" anchor="t">
+            <a:normAutofit/>
+          </a:bodyPr>
+          <a:lstStyle/>
+          <a:p>
+            <a:r>
+              <a:rPr lang="en-US" sz="4400"/>
+              <a:t>Presentation Overview</a:t>
+            </a:r>
+          </a:p>
+        </p:txBody>
+      </p:sp>
+      <p:sp>
+        <p:nvSpPr>
+          <p:cNvPr id="4" name="Content Placeholder 3">
+            <a:extLst>
+              <a:ext uri="{FF2B5EF4-FFF2-40B4-BE49-F238E27FC236}">
+                <a16:creationId xmlns:a16="http://schemas.microsoft.com/office/drawing/2014/main" id="{B7266B16-1D05-8C1C-3D22-EF9B25087A59}"/>
+              </a:ext>
+            </a:extLst>
+          </p:cNvPr>
+          <p:cNvSpPr>
+            <a:spLocks noGrp="1"/>
+          </p:cNvSpPr>
+          <p:nvPr>
+            <p:ph sz="half" idx="2"/>
+          </p:nvPr>
+        </p:nvSpPr>
+        <p:spPr>
+          <a:xfrm>
+            <a:off x="7001548" y="2578608"/>
+            <a:ext cx="4672584" cy="3767328"/>
+          </a:xfrm>
+        </p:spPr>
+        <p:txBody>
+          <a:bodyPr vert="horz" lIns="91440" tIns="45720" rIns="91440" bIns="45720" rtlCol="0">
+            <a:normAutofit/>
+          </a:bodyPr>
+          <a:lstStyle/>
+          <a:p>
+            <a:r>
+              <a:rPr lang="en-US" sz="1800"/>
+              <a:t>Structured and Unstructured Data</a:t>
+            </a:r>
+          </a:p>
+          <a:p>
+            <a:r>
+              <a:rPr lang="en-US" sz="1800"/>
+              <a:t>Big Data</a:t>
+            </a:r>
+          </a:p>
+        </p:txBody>
+      </p:sp>
+      <p:sp>
+        <p:nvSpPr>
+          <p:cNvPr id="18" name="Freeform: Shape 17">
+            <a:extLst>
+              <a:ext uri="{FF2B5EF4-FFF2-40B4-BE49-F238E27FC236}">
+                <a16:creationId xmlns:a16="http://schemas.microsoft.com/office/drawing/2014/main" id="{6EC109E5-0396-8968-4F42-DFEC280363B6}"/>
+              </a:ext>
+              <a:ext uri="{C183D7F6-B498-43B3-948B-1728B52AA6E4}">
+                <adec:decorative xmlns:adec="http://schemas.microsoft.com/office/drawing/2017/decorative" val="1"/>
+              </a:ext>
+            </a:extLst>
+          </p:cNvPr>
+          <p:cNvSpPr>
+            <a:spLocks noGrp="1" noRot="1" noChangeAspect="1" noMove="1" noResize="1" noEditPoints="1" noAdjustHandles="1" noChangeArrowheads="1" noChangeShapeType="1" noTextEdit="1"/>
+          </p:cNvSpPr>
+          <p:nvPr>
+            <p:extLst>
+              <p:ext uri="{386F3935-93C4-4BCD-93E2-E3B085C9AB24}">
+                <p16:designElem xmlns:p16="http://schemas.microsoft.com/office/powerpoint/2015/main" val="1"/>
+              </p:ext>
+            </p:extLst>
+          </p:nvPr>
+        </p:nvSpPr>
+        <p:spPr>
+          <a:xfrm>
+            <a:off x="7016407" y="508090"/>
+            <a:ext cx="4660733" cy="149279"/>
+          </a:xfrm>
+          <a:custGeom>
+            <a:avLst/>
+            <a:gdLst>
+              <a:gd name="connsiteX0" fmla="*/ 0 w 6090847"/>
+              <a:gd name="connsiteY0" fmla="*/ 0 h 149279"/>
+              <a:gd name="connsiteX1" fmla="*/ 6090847 w 6090847"/>
+              <a:gd name="connsiteY1" fmla="*/ 0 h 149279"/>
+              <a:gd name="connsiteX2" fmla="*/ 6090847 w 6090847"/>
+              <a:gd name="connsiteY2" fmla="*/ 149279 h 149279"/>
+              <a:gd name="connsiteX3" fmla="*/ 0 w 6090847"/>
+              <a:gd name="connsiteY3" fmla="*/ 149279 h 149279"/>
+            </a:gdLst>
+            <a:ahLst/>
+            <a:cxnLst>
+              <a:cxn ang="0">
+                <a:pos x="connsiteX0" y="connsiteY0"/>
+              </a:cxn>
+              <a:cxn ang="0">
+                <a:pos x="connsiteX1" y="connsiteY1"/>
+              </a:cxn>
+              <a:cxn ang="0">
+                <a:pos x="connsiteX2" y="connsiteY2"/>
+              </a:cxn>
+              <a:cxn ang="0">
+                <a:pos x="connsiteX3" y="connsiteY3"/>
+              </a:cxn>
+            </a:cxnLst>
+            <a:rect l="l" t="t" r="r" b="b"/>
+            <a:pathLst>
+              <a:path w="6090847" h="149279">
+                <a:moveTo>
+                  <a:pt x="0" y="0"/>
+                </a:moveTo>
+                <a:lnTo>
+                  <a:pt x="6090847" y="0"/>
+                </a:lnTo>
+                <a:lnTo>
+                  <a:pt x="6090847" y="149279"/>
+                </a:lnTo>
+                <a:lnTo>
+                  <a:pt x="0" y="149279"/>
+                </a:lnTo>
+                <a:close/>
+              </a:path>
+            </a:pathLst>
+          </a:custGeom>
+          <a:solidFill>
+            <a:schemeClr val="tx1"/>
+          </a:solidFill>
+          <a:ln>
+            <a:noFill/>
+          </a:ln>
+        </p:spPr>
+        <p:style>
+          <a:lnRef idx="2">
+            <a:schemeClr val="accent1">
+              <a:shade val="50000"/>
+            </a:schemeClr>
+          </a:lnRef>
+          <a:fillRef idx="1">
+            <a:schemeClr val="accent1"/>
+          </a:fillRef>
+          <a:effectRef idx="0">
+            <a:schemeClr val="accent1"/>
+          </a:effectRef>
+          <a:fontRef idx="minor">
+            <a:schemeClr val="lt1"/>
+          </a:fontRef>
+        </p:style>
+        <p:txBody>
+          <a:bodyPr wrap="square" rtlCol="0" anchor="ctr">
+            <a:noAutofit/>
+          </a:bodyPr>
+          <a:lstStyle/>
+          <a:p>
+            <a:pPr marL="0" marR="0" lvl="0" indent="0" algn="ctr" defTabSz="914400" rtl="0" eaLnBrk="1" fontAlgn="auto" latinLnBrk="0" hangingPunct="1">
+              <a:lnSpc>
+                <a:spcPct val="100000"/>
+              </a:lnSpc>
+              <a:spcBef>
+                <a:spcPts val="0"/>
+              </a:spcBef>
+              <a:spcAft>
+                <a:spcPts val="0"/>
+              </a:spcAft>
+              <a:buClrTx/>
+              <a:buSzTx/>
+              <a:buFontTx/>
+              <a:buNone/>
+              <a:tabLst/>
+              <a:defRPr/>
+            </a:pPr>
+            <a:endParaRPr kumimoji="0" lang="en-US" sz="1800" b="0" i="0" u="none" strike="noStrike" kern="1200" cap="none" spc="0" normalizeH="0" baseline="0" noProof="0">
+              <a:ln>
+                <a:noFill/>
+              </a:ln>
+              <a:solidFill>
+                <a:prstClr val="white"/>
+              </a:solidFill>
+              <a:effectLst/>
+              <a:uLnTx/>
+              <a:uFillTx/>
+              <a:latin typeface="Bierstadt"/>
+              <a:ea typeface="+mn-ea"/>
+              <a:cs typeface="+mn-cs"/>
+            </a:endParaRPr>
+          </a:p>
+        </p:txBody>
+      </p:sp>
       <p:sp>
         <p:nvSpPr>
           <p:cNvPr id="3" name="Slide Number Placeholder 2">
@@ -12012,7 +14223,7 @@
           <a:p>
             <a:fld id="{DFDF98CC-160E-494C-8C3C-8CDC5FA257DE}" type="slidenum">
               <a:rPr lang="en-US" smtClean="0"/>
-              <a:t>2</a:t>
+              <a:t>3</a:t>
             </a:fld>
             <a:endParaRPr lang="en-US"/>
           </a:p>
@@ -12172,7 +14383,7 @@
 </p:sld>
 </file>
 
-<file path=ppt/slides/slide3.xml><?xml version="1.0" encoding="utf-8"?>
+<file path=ppt/slides/slide4.xml><?xml version="1.0" encoding="utf-8"?>
 <p:sld xmlns:a="http://schemas.openxmlformats.org/drawingml/2006/main" xmlns:r="http://schemas.openxmlformats.org/officeDocument/2006/relationships" xmlns:p="http://schemas.openxmlformats.org/presentationml/2006/main">
   <p:cSld>
     <p:bg>
@@ -12799,7 +15010,7 @@
           <a:p>
             <a:fld id="{DFDF98CC-160E-494C-8C3C-8CDC5FA257DE}" type="slidenum">
               <a:rPr lang="en-US" smtClean="0"/>
-              <a:t>3</a:t>
+              <a:t>4</a:t>
             </a:fld>
             <a:endParaRPr lang="en-US"/>
           </a:p>
@@ -12913,7 +15124,7 @@
 </p:sld>
 </file>
 
-<file path=ppt/slides/slide4.xml><?xml version="1.0" encoding="utf-8"?>
+<file path=ppt/slides/slide5.xml><?xml version="1.0" encoding="utf-8"?>
 <p:sld xmlns:a="http://schemas.openxmlformats.org/drawingml/2006/main" xmlns:r="http://schemas.openxmlformats.org/officeDocument/2006/relationships" xmlns:p="http://schemas.openxmlformats.org/presentationml/2006/main">
   <p:cSld>
     <p:bg>
@@ -13592,7 +15803,7 @@
           <a:p>
             <a:fld id="{DFDF98CC-160E-494C-8C3C-8CDC5FA257DE}" type="slidenum">
               <a:rPr lang="en-US" smtClean="0"/>
-              <a:t>4</a:t>
+              <a:t>5</a:t>
             </a:fld>
             <a:endParaRPr lang="en-US"/>
           </a:p>
@@ -13602,740 +15813,6 @@
     <p:extLst>
       <p:ext uri="{BB962C8B-B14F-4D97-AF65-F5344CB8AC3E}">
         <p14:creationId xmlns:p14="http://schemas.microsoft.com/office/powerpoint/2010/main" val="527286289"/>
-      </p:ext>
-    </p:extLst>
-  </p:cSld>
-  <p:clrMapOvr>
-    <a:masterClrMapping/>
-  </p:clrMapOvr>
-  <p:transition>
-    <p:fade/>
-  </p:transition>
-  <p:timing>
-    <p:tnLst>
-      <p:par>
-        <p:cTn id="1" dur="indefinite" restart="never" nodeType="tmRoot">
-          <p:childTnLst>
-            <p:seq concurrent="1" nextAc="seek">
-              <p:cTn id="2" dur="indefinite" nodeType="mainSeq">
-                <p:childTnLst>
-                  <p:par>
-                    <p:cTn id="3" fill="hold">
-                      <p:stCondLst>
-                        <p:cond delay="indefinite"/>
-                        <p:cond evt="onBegin" delay="0">
-                          <p:tn val="2"/>
-                        </p:cond>
-                      </p:stCondLst>
-                      <p:childTnLst>
-                        <p:par>
-                          <p:cTn id="4" fill="hold">
-                            <p:stCondLst>
-                              <p:cond delay="0"/>
-                            </p:stCondLst>
-                            <p:childTnLst>
-                              <p:par>
-                                <p:cTn id="5" presetID="42" presetClass="entr" presetSubtype="0" fill="hold" grpId="0" nodeType="withEffect">
-                                  <p:stCondLst>
-                                    <p:cond delay="250"/>
-                                  </p:stCondLst>
-                                  <p:iterate>
-                                    <p:tmPct val="10000"/>
-                                  </p:iterate>
-                                  <p:childTnLst>
-                                    <p:set>
-                                      <p:cBhvr>
-                                        <p:cTn id="6" dur="1" fill="hold">
-                                          <p:stCondLst>
-                                            <p:cond delay="0"/>
-                                          </p:stCondLst>
-                                        </p:cTn>
-                                        <p:tgtEl>
-                                          <p:spTgt spid="4"/>
-                                        </p:tgtEl>
-                                        <p:attrNameLst>
-                                          <p:attrName>style.visibility</p:attrName>
-                                        </p:attrNameLst>
-                                      </p:cBhvr>
-                                      <p:to>
-                                        <p:strVal val="visible"/>
-                                      </p:to>
-                                    </p:set>
-                                    <p:animEffect transition="in" filter="fade">
-                                      <p:cBhvr>
-                                        <p:cTn id="7" dur="250"/>
-                                        <p:tgtEl>
-                                          <p:spTgt spid="4"/>
-                                        </p:tgtEl>
-                                      </p:cBhvr>
-                                    </p:animEffect>
-                                    <p:anim calcmode="lin" valueType="num">
-                                      <p:cBhvr>
-                                        <p:cTn id="8" dur="250" fill="hold"/>
-                                        <p:tgtEl>
-                                          <p:spTgt spid="4"/>
-                                        </p:tgtEl>
-                                        <p:attrNameLst>
-                                          <p:attrName>ppt_x</p:attrName>
-                                        </p:attrNameLst>
-                                      </p:cBhvr>
-                                      <p:tavLst>
-                                        <p:tav tm="0">
-                                          <p:val>
-                                            <p:strVal val="#ppt_x"/>
-                                          </p:val>
-                                        </p:tav>
-                                        <p:tav tm="100000">
-                                          <p:val>
-                                            <p:strVal val="#ppt_x"/>
-                                          </p:val>
-                                        </p:tav>
-                                      </p:tavLst>
-                                    </p:anim>
-                                    <p:anim calcmode="lin" valueType="num">
-                                      <p:cBhvr>
-                                        <p:cTn id="9" dur="250" fill="hold"/>
-                                        <p:tgtEl>
-                                          <p:spTgt spid="4"/>
-                                        </p:tgtEl>
-                                        <p:attrNameLst>
-                                          <p:attrName>ppt_y</p:attrName>
-                                        </p:attrNameLst>
-                                      </p:cBhvr>
-                                      <p:tavLst>
-                                        <p:tav tm="0">
-                                          <p:val>
-                                            <p:strVal val="#ppt_y+.1"/>
-                                          </p:val>
-                                        </p:tav>
-                                        <p:tav tm="100000">
-                                          <p:val>
-                                            <p:strVal val="#ppt_y"/>
-                                          </p:val>
-                                        </p:tav>
-                                      </p:tavLst>
-                                    </p:anim>
-                                  </p:childTnLst>
-                                </p:cTn>
-                              </p:par>
-                            </p:childTnLst>
-                          </p:cTn>
-                        </p:par>
-                      </p:childTnLst>
-                    </p:cTn>
-                  </p:par>
-                </p:childTnLst>
-              </p:cTn>
-              <p:prevCondLst>
-                <p:cond evt="onPrev" delay="0">
-                  <p:tgtEl>
-                    <p:sldTgt/>
-                  </p:tgtEl>
-                </p:cond>
-              </p:prevCondLst>
-              <p:nextCondLst>
-                <p:cond evt="onNext" delay="0">
-                  <p:tgtEl>
-                    <p:sldTgt/>
-                  </p:tgtEl>
-                </p:cond>
-              </p:nextCondLst>
-            </p:seq>
-          </p:childTnLst>
-        </p:cTn>
-      </p:par>
-    </p:tnLst>
-    <p:bldLst>
-      <p:bldP spid="4" grpId="0"/>
-    </p:bldLst>
-  </p:timing>
-</p:sld>
-</file>
-
-<file path=ppt/slides/slide5.xml><?xml version="1.0" encoding="utf-8"?>
-<p:sld xmlns:a="http://schemas.openxmlformats.org/drawingml/2006/main" xmlns:r="http://schemas.openxmlformats.org/officeDocument/2006/relationships" xmlns:p="http://schemas.openxmlformats.org/presentationml/2006/main">
-  <p:cSld>
-    <p:bg>
-      <p:bgPr>
-        <a:solidFill>
-          <a:schemeClr val="bg1"/>
-        </a:solidFill>
-        <a:effectLst/>
-      </p:bgPr>
-    </p:bg>
-    <p:spTree>
-      <p:nvGrpSpPr>
-        <p:cNvPr id="1" name=""/>
-        <p:cNvGrpSpPr/>
-        <p:nvPr/>
-      </p:nvGrpSpPr>
-      <p:grpSpPr>
-        <a:xfrm>
-          <a:off x="0" y="0"/>
-          <a:ext cx="0" cy="0"/>
-          <a:chOff x="0" y="0"/>
-          <a:chExt cx="0" cy="0"/>
-        </a:xfrm>
-      </p:grpSpPr>
-      <p:sp>
-        <p:nvSpPr>
-          <p:cNvPr id="10" name="Rectangle 9">
-            <a:extLst>
-              <a:ext uri="{FF2B5EF4-FFF2-40B4-BE49-F238E27FC236}">
-                <a16:creationId xmlns:a16="http://schemas.microsoft.com/office/drawing/2014/main" id="{ADE57300-C7FF-4578-99A0-42B0295B123C}"/>
-              </a:ext>
-              <a:ext uri="{C183D7F6-B498-43B3-948B-1728B52AA6E4}">
-                <adec:decorative xmlns:adec="http://schemas.microsoft.com/office/drawing/2017/decorative" val="1"/>
-              </a:ext>
-            </a:extLst>
-          </p:cNvPr>
-          <p:cNvSpPr>
-            <a:spLocks noGrp="1" noRot="1" noChangeAspect="1" noMove="1" noResize="1" noEditPoints="1" noAdjustHandles="1" noChangeArrowheads="1" noChangeShapeType="1" noTextEdit="1"/>
-          </p:cNvSpPr>
-          <p:nvPr>
-            <p:extLst>
-              <p:ext uri="{386F3935-93C4-4BCD-93E2-E3B085C9AB24}">
-                <p16:designElem xmlns:p16="http://schemas.microsoft.com/office/powerpoint/2015/main" val="1"/>
-              </p:ext>
-            </p:extLst>
-          </p:nvPr>
-        </p:nvSpPr>
-        <p:spPr>
-          <a:xfrm>
-            <a:off x="517870" y="508090"/>
-            <a:ext cx="5021183" cy="149279"/>
-          </a:xfrm>
-          <a:prstGeom prst="rect">
-            <a:avLst/>
-          </a:prstGeom>
-          <a:solidFill>
-            <a:schemeClr val="tx1"/>
-          </a:solidFill>
-          <a:ln>
-            <a:noFill/>
-          </a:ln>
-        </p:spPr>
-        <p:style>
-          <a:lnRef idx="2">
-            <a:schemeClr val="accent1">
-              <a:shade val="50000"/>
-            </a:schemeClr>
-          </a:lnRef>
-          <a:fillRef idx="1">
-            <a:schemeClr val="accent1"/>
-          </a:fillRef>
-          <a:effectRef idx="0">
-            <a:schemeClr val="accent1"/>
-          </a:effectRef>
-          <a:fontRef idx="minor">
-            <a:schemeClr val="lt1"/>
-          </a:fontRef>
-        </p:style>
-        <p:txBody>
-          <a:bodyPr rtlCol="0" anchor="ctr"/>
-          <a:lstStyle/>
-          <a:p>
-            <a:pPr algn="ctr"/>
-            <a:endParaRPr lang="en-US"/>
-          </a:p>
-        </p:txBody>
-      </p:sp>
-      <p:sp>
-        <p:nvSpPr>
-          <p:cNvPr id="12" name="Rectangle 11">
-            <a:extLst>
-              <a:ext uri="{FF2B5EF4-FFF2-40B4-BE49-F238E27FC236}">
-                <a16:creationId xmlns:a16="http://schemas.microsoft.com/office/drawing/2014/main" id="{DB8F8250-7A81-4A19-87AD-FFB2CE4E39A5}"/>
-              </a:ext>
-              <a:ext uri="{C183D7F6-B498-43B3-948B-1728B52AA6E4}">
-                <adec:decorative xmlns:adec="http://schemas.microsoft.com/office/drawing/2017/decorative" val="1"/>
-              </a:ext>
-            </a:extLst>
-          </p:cNvPr>
-          <p:cNvSpPr>
-            <a:spLocks noGrp="1" noRot="1" noChangeAspect="1" noMove="1" noResize="1" noEditPoints="1" noAdjustHandles="1" noChangeArrowheads="1" noChangeShapeType="1" noTextEdit="1"/>
-          </p:cNvSpPr>
-          <p:nvPr>
-            <p:extLst>
-              <p:ext uri="{386F3935-93C4-4BCD-93E2-E3B085C9AB24}">
-                <p16:designElem xmlns:p16="http://schemas.microsoft.com/office/powerpoint/2015/main" val="1"/>
-              </p:ext>
-            </p:extLst>
-          </p:nvPr>
-        </p:nvSpPr>
-        <p:spPr>
-          <a:xfrm>
-            <a:off x="517870" y="508090"/>
-            <a:ext cx="5021183" cy="149279"/>
-          </a:xfrm>
-          <a:prstGeom prst="rect">
-            <a:avLst/>
-          </a:prstGeom>
-          <a:solidFill>
-            <a:schemeClr val="tx1"/>
-          </a:solidFill>
-          <a:ln>
-            <a:noFill/>
-          </a:ln>
-        </p:spPr>
-        <p:style>
-          <a:lnRef idx="2">
-            <a:schemeClr val="accent1">
-              <a:shade val="50000"/>
-            </a:schemeClr>
-          </a:lnRef>
-          <a:fillRef idx="1">
-            <a:schemeClr val="accent1"/>
-          </a:fillRef>
-          <a:effectRef idx="0">
-            <a:schemeClr val="accent1"/>
-          </a:effectRef>
-          <a:fontRef idx="minor">
-            <a:schemeClr val="lt1"/>
-          </a:fontRef>
-        </p:style>
-        <p:txBody>
-          <a:bodyPr rtlCol="0" anchor="ctr"/>
-          <a:lstStyle/>
-          <a:p>
-            <a:pPr algn="ctr"/>
-            <a:endParaRPr lang="en-US"/>
-          </a:p>
-        </p:txBody>
-      </p:sp>
-      <p:sp>
-        <p:nvSpPr>
-          <p:cNvPr id="14" name="Rectangle 13">
-            <a:extLst>
-              <a:ext uri="{FF2B5EF4-FFF2-40B4-BE49-F238E27FC236}">
-                <a16:creationId xmlns:a16="http://schemas.microsoft.com/office/drawing/2014/main" id="{499F38FC-2DEA-2647-C409-EF75720C1017}"/>
-              </a:ext>
-              <a:ext uri="{C183D7F6-B498-43B3-948B-1728B52AA6E4}">
-                <adec:decorative xmlns:adec="http://schemas.microsoft.com/office/drawing/2017/decorative" val="1"/>
-              </a:ext>
-            </a:extLst>
-          </p:cNvPr>
-          <p:cNvSpPr>
-            <a:spLocks noGrp="1" noRot="1" noChangeAspect="1" noMove="1" noResize="1" noEditPoints="1" noAdjustHandles="1" noChangeArrowheads="1" noChangeShapeType="1" noTextEdit="1"/>
-          </p:cNvSpPr>
-          <p:nvPr>
-            <p:extLst>
-              <p:ext uri="{386F3935-93C4-4BCD-93E2-E3B085C9AB24}">
-                <p16:designElem xmlns:p16="http://schemas.microsoft.com/office/powerpoint/2015/main" val="1"/>
-              </p:ext>
-            </p:extLst>
-          </p:nvPr>
-        </p:nvSpPr>
-        <p:spPr>
-          <a:xfrm>
-            <a:off x="517870" y="508090"/>
-            <a:ext cx="5021183" cy="149279"/>
-          </a:xfrm>
-          <a:prstGeom prst="rect">
-            <a:avLst/>
-          </a:prstGeom>
-          <a:solidFill>
-            <a:schemeClr val="tx1"/>
-          </a:solidFill>
-          <a:ln>
-            <a:noFill/>
-          </a:ln>
-        </p:spPr>
-        <p:style>
-          <a:lnRef idx="2">
-            <a:schemeClr val="accent1">
-              <a:shade val="50000"/>
-            </a:schemeClr>
-          </a:lnRef>
-          <a:fillRef idx="1">
-            <a:schemeClr val="accent1"/>
-          </a:fillRef>
-          <a:effectRef idx="0">
-            <a:schemeClr val="accent1"/>
-          </a:effectRef>
-          <a:fontRef idx="minor">
-            <a:schemeClr val="lt1"/>
-          </a:fontRef>
-        </p:style>
-        <p:txBody>
-          <a:bodyPr rtlCol="0" anchor="ctr"/>
-          <a:lstStyle/>
-          <a:p>
-            <a:pPr algn="ctr"/>
-            <a:endParaRPr lang="en-US"/>
-          </a:p>
-        </p:txBody>
-      </p:sp>
-      <p:sp useBgFill="1">
-        <p:nvSpPr>
-          <p:cNvPr id="16" name="Rectangle 15">
-            <a:extLst>
-              <a:ext uri="{FF2B5EF4-FFF2-40B4-BE49-F238E27FC236}">
-                <a16:creationId xmlns:a16="http://schemas.microsoft.com/office/drawing/2014/main" id="{4C32CD27-7027-AB2B-38F1-71C08EB84030}"/>
-              </a:ext>
-              <a:ext uri="{C183D7F6-B498-43B3-948B-1728B52AA6E4}">
-                <adec:decorative xmlns:adec="http://schemas.microsoft.com/office/drawing/2017/decorative" val="1"/>
-              </a:ext>
-            </a:extLst>
-          </p:cNvPr>
-          <p:cNvSpPr>
-            <a:spLocks noGrp="1" noRot="1" noChangeAspect="1" noMove="1" noResize="1" noEditPoints="1" noAdjustHandles="1" noChangeArrowheads="1" noChangeShapeType="1" noTextEdit="1"/>
-          </p:cNvSpPr>
-          <p:nvPr>
-            <p:extLst>
-              <p:ext uri="{386F3935-93C4-4BCD-93E2-E3B085C9AB24}">
-                <p16:designElem xmlns:p16="http://schemas.microsoft.com/office/powerpoint/2015/main" val="1"/>
-              </p:ext>
-            </p:extLst>
-          </p:nvPr>
-        </p:nvSpPr>
-        <p:spPr>
-          <a:xfrm>
-            <a:off x="0" y="0"/>
-            <a:ext cx="12188952" cy="6857995"/>
-          </a:xfrm>
-          <a:prstGeom prst="rect">
-            <a:avLst/>
-          </a:prstGeom>
-          <a:ln>
-            <a:noFill/>
-          </a:ln>
-        </p:spPr>
-        <p:style>
-          <a:lnRef idx="2">
-            <a:schemeClr val="accent1">
-              <a:shade val="50000"/>
-            </a:schemeClr>
-          </a:lnRef>
-          <a:fillRef idx="1">
-            <a:schemeClr val="accent1"/>
-          </a:fillRef>
-          <a:effectRef idx="0">
-            <a:schemeClr val="accent1"/>
-          </a:effectRef>
-          <a:fontRef idx="minor">
-            <a:schemeClr val="lt1"/>
-          </a:fontRef>
-        </p:style>
-        <p:txBody>
-          <a:bodyPr rtlCol="0" anchor="ctr"/>
-          <a:lstStyle/>
-          <a:p>
-            <a:pPr algn="ctr"/>
-            <a:endParaRPr lang="en-US" dirty="0"/>
-          </a:p>
-        </p:txBody>
-      </p:sp>
-      <p:pic>
-        <p:nvPicPr>
-          <p:cNvPr id="5" name="Content Placeholder 4" descr="Piles of paper">
-            <a:extLst>
-              <a:ext uri="{FF2B5EF4-FFF2-40B4-BE49-F238E27FC236}">
-                <a16:creationId xmlns:a16="http://schemas.microsoft.com/office/drawing/2014/main" id="{86118461-0DB5-4FCF-9C4B-9DCD9C7908BF}"/>
-              </a:ext>
-            </a:extLst>
-          </p:cNvPr>
-          <p:cNvPicPr>
-            <a:picLocks noGrp="1" noChangeAspect="1"/>
-          </p:cNvPicPr>
-          <p:nvPr>
-            <p:ph sz="half" idx="1"/>
-          </p:nvPr>
-        </p:nvPicPr>
-        <p:blipFill>
-          <a:blip r:embed="rId3"/>
-          <a:srcRect l="35442" r="16286" b="1"/>
-          <a:stretch/>
-        </p:blipFill>
-        <p:spPr>
-          <a:xfrm>
-            <a:off x="517869" y="508091"/>
-            <a:ext cx="4221911" cy="5837918"/>
-          </a:xfrm>
-          <a:prstGeom prst="rect">
-            <a:avLst/>
-          </a:prstGeom>
-        </p:spPr>
-      </p:pic>
-      <p:sp>
-        <p:nvSpPr>
-          <p:cNvPr id="2" name="Title 1">
-            <a:extLst>
-              <a:ext uri="{FF2B5EF4-FFF2-40B4-BE49-F238E27FC236}">
-                <a16:creationId xmlns:a16="http://schemas.microsoft.com/office/drawing/2014/main" id="{E3478ED1-692F-1DAE-ECC1-F48DF3F3CEF9}"/>
-              </a:ext>
-            </a:extLst>
-          </p:cNvPr>
-          <p:cNvSpPr>
-            <a:spLocks noGrp="1"/>
-          </p:cNvSpPr>
-          <p:nvPr>
-            <p:ph type="title"/>
-          </p:nvPr>
-        </p:nvSpPr>
-        <p:spPr>
-          <a:xfrm>
-            <a:off x="5438762" y="976160"/>
-            <a:ext cx="6232310" cy="1463040"/>
-          </a:xfrm>
-        </p:spPr>
-        <p:txBody>
-          <a:bodyPr vert="horz" lIns="91440" tIns="45720" rIns="91440" bIns="45720" rtlCol="0" anchor="t">
-            <a:normAutofit/>
-          </a:bodyPr>
-          <a:lstStyle/>
-          <a:p>
-            <a:r>
-              <a:rPr lang="en-US" sz="4400"/>
-              <a:t>Unstructured Data</a:t>
-            </a:r>
-          </a:p>
-        </p:txBody>
-      </p:sp>
-      <p:sp>
-        <p:nvSpPr>
-          <p:cNvPr id="4" name="Content Placeholder 3">
-            <a:extLst>
-              <a:ext uri="{FF2B5EF4-FFF2-40B4-BE49-F238E27FC236}">
-                <a16:creationId xmlns:a16="http://schemas.microsoft.com/office/drawing/2014/main" id="{68A67076-BBB2-A4BB-770B-A4B8DB2BE009}"/>
-              </a:ext>
-            </a:extLst>
-          </p:cNvPr>
-          <p:cNvSpPr>
-            <a:spLocks noGrp="1"/>
-          </p:cNvSpPr>
-          <p:nvPr>
-            <p:ph sz="half" idx="2"/>
-            <p:extLst>
-              <p:ext uri="{E7BDC344-281C-4309-B0C6-D0EE65EED2A8}">
-                <p202:designPr xmlns:p202="http://schemas.microsoft.com/office/powerpoint/2020/02/main">
-                  <p202:designTagLst>
-                    <p202:designTag name="ARCH:1:CLS" val="InformationBlock"/>
-                    <p202:designTag name="ARCH:1:VSVAR" val="TitledTextBox"/>
-                  </p202:designTagLst>
-                </p202:designPr>
-              </p:ext>
-            </p:extLst>
-          </p:nvPr>
-        </p:nvSpPr>
-        <p:spPr>
-          <a:xfrm>
-            <a:off x="5438775" y="2577871"/>
-            <a:ext cx="6232310" cy="3768137"/>
-          </a:xfrm>
-        </p:spPr>
-        <p:txBody>
-          <a:bodyPr>
-            <a:normAutofit/>
-          </a:bodyPr>
-          <a:lstStyle/>
-          <a:p>
-            <a:pPr marL="0" indent="0">
-              <a:spcBef>
-                <a:spcPts val="2500"/>
-              </a:spcBef>
-              <a:buNone/>
-            </a:pPr>
-            <a:r>
-              <a:rPr lang="en-US" sz="1400" b="1"/>
-              <a:t>Definition of Unstructured Data</a:t>
-            </a:r>
-          </a:p>
-          <a:p>
-            <a:pPr marL="0" lvl="1" indent="0">
-              <a:buNone/>
-            </a:pPr>
-            <a:r>
-              <a:rPr lang="en-US" sz="1400"/>
-              <a:t>Unstructured data is data that does not follow a specific structure or format, making it difficult to manage and analyze with traditional data analytics tools.</a:t>
-            </a:r>
-          </a:p>
-          <a:p>
-            <a:pPr marL="0" indent="0">
-              <a:spcBef>
-                <a:spcPts val="2500"/>
-              </a:spcBef>
-              <a:buNone/>
-            </a:pPr>
-            <a:r>
-              <a:rPr lang="en-US" sz="1400" b="1"/>
-              <a:t>Examples of Unstructured Data</a:t>
-            </a:r>
-          </a:p>
-          <a:p>
-            <a:pPr marL="0" lvl="1" indent="0">
-              <a:buNone/>
-            </a:pPr>
-            <a:r>
-              <a:rPr lang="en-US" sz="1400"/>
-              <a:t>Examples of unstructured data include text, images, videos, audio files, and social media posts.</a:t>
-            </a:r>
-          </a:p>
-          <a:p>
-            <a:pPr marL="0" indent="0">
-              <a:spcBef>
-                <a:spcPts val="2500"/>
-              </a:spcBef>
-              <a:buNone/>
-            </a:pPr>
-            <a:r>
-              <a:rPr lang="en-US" sz="1400" b="1"/>
-              <a:t>Challenges of Analyzing Unstructured Data</a:t>
-            </a:r>
-          </a:p>
-          <a:p>
-            <a:pPr marL="0" lvl="1" indent="0">
-              <a:buNone/>
-            </a:pPr>
-            <a:r>
-              <a:rPr lang="en-US" sz="1400"/>
-              <a:t>Unstructured data is difficult to analyze with traditional data analytics tools because of its lack of structure and format. It requires specialized tools and techniques to extract meaningful insights from unstructured data.</a:t>
-            </a:r>
-            <a:endParaRPr lang="en-IN" sz="1400"/>
-          </a:p>
-        </p:txBody>
-      </p:sp>
-      <p:sp>
-        <p:nvSpPr>
-          <p:cNvPr id="18" name="Freeform: Shape 17">
-            <a:extLst>
-              <a:ext uri="{FF2B5EF4-FFF2-40B4-BE49-F238E27FC236}">
-                <a16:creationId xmlns:a16="http://schemas.microsoft.com/office/drawing/2014/main" id="{C6DD38CD-CFFE-4ABA-3DC8-01ED90559EBE}"/>
-              </a:ext>
-              <a:ext uri="{C183D7F6-B498-43B3-948B-1728B52AA6E4}">
-                <adec:decorative xmlns:adec="http://schemas.microsoft.com/office/drawing/2017/decorative" val="1"/>
-              </a:ext>
-            </a:extLst>
-          </p:cNvPr>
-          <p:cNvSpPr>
-            <a:spLocks noGrp="1" noRot="1" noChangeAspect="1" noMove="1" noResize="1" noEditPoints="1" noAdjustHandles="1" noChangeArrowheads="1" noChangeShapeType="1" noTextEdit="1"/>
-          </p:cNvSpPr>
-          <p:nvPr>
-            <p:extLst>
-              <p:ext uri="{386F3935-93C4-4BCD-93E2-E3B085C9AB24}">
-                <p16:designElem xmlns:p16="http://schemas.microsoft.com/office/powerpoint/2015/main" val="1"/>
-              </p:ext>
-            </p:extLst>
-          </p:nvPr>
-        </p:nvSpPr>
-        <p:spPr>
-          <a:xfrm>
-            <a:off x="5484611" y="508090"/>
-            <a:ext cx="6186474" cy="149279"/>
-          </a:xfrm>
-          <a:custGeom>
-            <a:avLst/>
-            <a:gdLst>
-              <a:gd name="connsiteX0" fmla="*/ 0 w 6090847"/>
-              <a:gd name="connsiteY0" fmla="*/ 0 h 149279"/>
-              <a:gd name="connsiteX1" fmla="*/ 6090847 w 6090847"/>
-              <a:gd name="connsiteY1" fmla="*/ 0 h 149279"/>
-              <a:gd name="connsiteX2" fmla="*/ 6090847 w 6090847"/>
-              <a:gd name="connsiteY2" fmla="*/ 149279 h 149279"/>
-              <a:gd name="connsiteX3" fmla="*/ 0 w 6090847"/>
-              <a:gd name="connsiteY3" fmla="*/ 149279 h 149279"/>
-            </a:gdLst>
-            <a:ahLst/>
-            <a:cxnLst>
-              <a:cxn ang="0">
-                <a:pos x="connsiteX0" y="connsiteY0"/>
-              </a:cxn>
-              <a:cxn ang="0">
-                <a:pos x="connsiteX1" y="connsiteY1"/>
-              </a:cxn>
-              <a:cxn ang="0">
-                <a:pos x="connsiteX2" y="connsiteY2"/>
-              </a:cxn>
-              <a:cxn ang="0">
-                <a:pos x="connsiteX3" y="connsiteY3"/>
-              </a:cxn>
-            </a:cxnLst>
-            <a:rect l="l" t="t" r="r" b="b"/>
-            <a:pathLst>
-              <a:path w="6090847" h="149279">
-                <a:moveTo>
-                  <a:pt x="0" y="0"/>
-                </a:moveTo>
-                <a:lnTo>
-                  <a:pt x="6090847" y="0"/>
-                </a:lnTo>
-                <a:lnTo>
-                  <a:pt x="6090847" y="149279"/>
-                </a:lnTo>
-                <a:lnTo>
-                  <a:pt x="0" y="149279"/>
-                </a:lnTo>
-                <a:close/>
-              </a:path>
-            </a:pathLst>
-          </a:custGeom>
-          <a:solidFill>
-            <a:schemeClr val="tx1"/>
-          </a:solidFill>
-          <a:ln>
-            <a:noFill/>
-          </a:ln>
-        </p:spPr>
-        <p:style>
-          <a:lnRef idx="2">
-            <a:schemeClr val="accent1">
-              <a:shade val="50000"/>
-            </a:schemeClr>
-          </a:lnRef>
-          <a:fillRef idx="1">
-            <a:schemeClr val="accent1"/>
-          </a:fillRef>
-          <a:effectRef idx="0">
-            <a:schemeClr val="accent1"/>
-          </a:effectRef>
-          <a:fontRef idx="minor">
-            <a:schemeClr val="lt1"/>
-          </a:fontRef>
-        </p:style>
-        <p:txBody>
-          <a:bodyPr wrap="square" rtlCol="0" anchor="ctr">
-            <a:noAutofit/>
-          </a:bodyPr>
-          <a:lstStyle/>
-          <a:p>
-            <a:pPr algn="ctr"/>
-            <a:endParaRPr lang="en-US"/>
-          </a:p>
-        </p:txBody>
-      </p:sp>
-      <p:sp>
-        <p:nvSpPr>
-          <p:cNvPr id="3" name="Slide Number Placeholder 2">
-            <a:extLst>
-              <a:ext uri="{FF2B5EF4-FFF2-40B4-BE49-F238E27FC236}">
-                <a16:creationId xmlns:a16="http://schemas.microsoft.com/office/drawing/2014/main" id="{AC50A4E5-2833-DD03-22B8-E2FAFBD188B9}"/>
-              </a:ext>
-            </a:extLst>
-          </p:cNvPr>
-          <p:cNvSpPr>
-            <a:spLocks noGrp="1"/>
-          </p:cNvSpPr>
-          <p:nvPr>
-            <p:ph type="sldNum" sz="quarter" idx="12"/>
-          </p:nvPr>
-        </p:nvSpPr>
-        <p:spPr/>
-        <p:txBody>
-          <a:bodyPr/>
-          <a:lstStyle/>
-          <a:p>
-            <a:fld id="{DFDF98CC-160E-494C-8C3C-8CDC5FA257DE}" type="slidenum">
-              <a:rPr lang="en-US" smtClean="0"/>
-              <a:t>5</a:t>
-            </a:fld>
-            <a:endParaRPr lang="en-US"/>
-          </a:p>
-        </p:txBody>
-      </p:sp>
-    </p:spTree>
-    <p:extLst>
-      <p:ext uri="{BB962C8B-B14F-4D97-AF65-F5344CB8AC3E}">
-        <p14:creationId xmlns:p14="http://schemas.microsoft.com/office/powerpoint/2010/main" val="1961148299"/>
       </p:ext>
     </p:extLst>
   </p:cSld>
@@ -14705,7 +16182,7 @@
           <p:cNvPr id="16" name="Rectangle 15">
             <a:extLst>
               <a:ext uri="{FF2B5EF4-FFF2-40B4-BE49-F238E27FC236}">
-                <a16:creationId xmlns:a16="http://schemas.microsoft.com/office/drawing/2014/main" id="{9E10BDB4-64F2-477D-A03B-9F8352D5E02E}"/>
+                <a16:creationId xmlns:a16="http://schemas.microsoft.com/office/drawing/2014/main" id="{4C32CD27-7027-AB2B-38F1-71C08EB84030}"/>
               </a:ext>
               <a:ext uri="{C183D7F6-B498-43B3-948B-1728B52AA6E4}">
                 <adec:decorative xmlns:adec="http://schemas.microsoft.com/office/drawing/2017/decorative" val="1"/>
@@ -14755,46 +16232,17 @@
           <a:bodyPr rtlCol="0" anchor="ctr"/>
           <a:lstStyle/>
           <a:p>
-            <a:pPr marL="0" marR="0" lvl="0" indent="0" algn="ctr" defTabSz="914400" rtl="0" eaLnBrk="1" fontAlgn="auto" latinLnBrk="0" hangingPunct="1">
-              <a:lnSpc>
-                <a:spcPct val="100000"/>
-              </a:lnSpc>
-              <a:spcBef>
-                <a:spcPts val="0"/>
-              </a:spcBef>
-              <a:spcAft>
-                <a:spcPts val="0"/>
-              </a:spcAft>
-              <a:buClrTx/>
-              <a:buSzTx/>
-              <a:buFontTx/>
-              <a:buNone/>
-              <a:tabLst/>
-              <a:defRPr/>
-            </a:pPr>
-            <a:endParaRPr kumimoji="0" lang="en-US" sz="1800" b="0" i="0" u="none" strike="noStrike" kern="1200" cap="none" spc="0" normalizeH="0" baseline="0" noProof="0">
-              <a:ln>
-                <a:noFill/>
-              </a:ln>
-              <a:solidFill>
-                <a:prstClr val="white"/>
-              </a:solidFill>
-              <a:effectLst/>
-              <a:uLnTx/>
-              <a:uFillTx/>
-              <a:latin typeface="Bierstadt"/>
-              <a:ea typeface="+mn-ea"/>
-              <a:cs typeface="+mn-cs"/>
-            </a:endParaRPr>
+            <a:pPr algn="ctr"/>
+            <a:endParaRPr lang="en-US" dirty="0"/>
           </a:p>
         </p:txBody>
       </p:sp>
       <p:pic>
         <p:nvPicPr>
-          <p:cNvPr id="5" name="Content Placeholder 4" descr="Transistors on the circuit. The circuit is wrong side up, but can be seen on the top part of the photo, where it is focused. Also has nice and recognizable structure.">
-            <a:extLst>
-              <a:ext uri="{FF2B5EF4-FFF2-40B4-BE49-F238E27FC236}">
-                <a16:creationId xmlns:a16="http://schemas.microsoft.com/office/drawing/2014/main" id="{E0F80F10-C7DA-49F0-B90F-385A56FCB71B}"/>
+          <p:cNvPr id="5" name="Content Placeholder 4" descr="Piles of paper">
+            <a:extLst>
+              <a:ext uri="{FF2B5EF4-FFF2-40B4-BE49-F238E27FC236}">
+                <a16:creationId xmlns:a16="http://schemas.microsoft.com/office/drawing/2014/main" id="{86118461-0DB5-4FCF-9C4B-9DCD9C7908BF}"/>
               </a:ext>
             </a:extLst>
           </p:cNvPr>
@@ -14807,13 +16255,13 @@
         </p:nvPicPr>
         <p:blipFill>
           <a:blip r:embed="rId3"/>
-          <a:srcRect t="7058" r="1" b="15931"/>
+          <a:srcRect l="35442" r="16286" b="1"/>
           <a:stretch/>
         </p:blipFill>
         <p:spPr>
           <a:xfrm>
-            <a:off x="517864" y="1863633"/>
-            <a:ext cx="8687096" cy="4482371"/>
+            <a:off x="517869" y="508091"/>
+            <a:ext cx="4221911" cy="5837918"/>
           </a:xfrm>
           <a:prstGeom prst="rect">
             <a:avLst/>
@@ -14825,7 +16273,7 @@
           <p:cNvPr id="2" name="Title 1">
             <a:extLst>
               <a:ext uri="{FF2B5EF4-FFF2-40B4-BE49-F238E27FC236}">
-                <a16:creationId xmlns:a16="http://schemas.microsoft.com/office/drawing/2014/main" id="{157A8034-8D20-96D1-14D5-5F4A1BFA43B1}"/>
+                <a16:creationId xmlns:a16="http://schemas.microsoft.com/office/drawing/2014/main" id="{E3478ED1-692F-1DAE-ECC1-F48DF3F3CEF9}"/>
               </a:ext>
             </a:extLst>
           </p:cNvPr>
@@ -14838,8 +16286,8 @@
         </p:nvSpPr>
         <p:spPr>
           <a:xfrm>
-            <a:off x="517865" y="976160"/>
-            <a:ext cx="8686800" cy="813063"/>
+            <a:off x="5438762" y="976160"/>
+            <a:ext cx="6232310" cy="1463040"/>
           </a:xfrm>
         </p:spPr>
         <p:txBody>
@@ -14850,7 +16298,7 @@
           <a:p>
             <a:r>
               <a:rPr lang="en-US" sz="4400"/>
-              <a:t>Semi-Structured Data</a:t>
+              <a:t>Unstructured Data</a:t>
             </a:r>
           </a:p>
         </p:txBody>
@@ -14860,7 +16308,7 @@
           <p:cNvPr id="4" name="Content Placeholder 3">
             <a:extLst>
               <a:ext uri="{FF2B5EF4-FFF2-40B4-BE49-F238E27FC236}">
-                <a16:creationId xmlns:a16="http://schemas.microsoft.com/office/drawing/2014/main" id="{CAEA97FA-2A10-5700-6C40-69D1F721980F}"/>
+                <a16:creationId xmlns:a16="http://schemas.microsoft.com/office/drawing/2014/main" id="{68A67076-BBB2-A4BB-770B-A4B8DB2BE009}"/>
               </a:ext>
             </a:extLst>
           </p:cNvPr>
@@ -14883,8 +16331,8 @@
         </p:nvSpPr>
         <p:spPr>
           <a:xfrm>
-            <a:off x="9631680" y="1863632"/>
-            <a:ext cx="2042449" cy="4482371"/>
+            <a:off x="5438775" y="2577871"/>
+            <a:ext cx="6232310" cy="3768137"/>
           </a:xfrm>
         </p:spPr>
         <p:txBody>
@@ -14899,7 +16347,10 @@
               </a:spcBef>
               <a:buNone/>
             </a:pPr>
-            <a:endParaRPr lang="en-US" sz="1400" b="1"/>
+            <a:r>
+              <a:rPr lang="en-US" sz="1400" b="1"/>
+              <a:t>Definition of Unstructured Data</a:t>
+            </a:r>
           </a:p>
           <a:p>
             <a:pPr marL="0" lvl="1" indent="0">
@@ -14907,7 +16358,49 @@
             </a:pPr>
             <a:r>
               <a:rPr lang="en-US" sz="1400"/>
-              <a:t>Semi-structured data is a type of data that contains both structured and unstructured elements. It has some organizational structure, but also allows for flexibility in the data model and content.</a:t>
+              <a:t>Unstructured data is data that does not follow a specific structure or format, making it difficult to manage and analyze with traditional data analytics tools.</a:t>
+            </a:r>
+          </a:p>
+          <a:p>
+            <a:pPr marL="0" indent="0">
+              <a:spcBef>
+                <a:spcPts val="2500"/>
+              </a:spcBef>
+              <a:buNone/>
+            </a:pPr>
+            <a:r>
+              <a:rPr lang="en-US" sz="1400" b="1"/>
+              <a:t>Examples of Unstructured Data</a:t>
+            </a:r>
+          </a:p>
+          <a:p>
+            <a:pPr marL="0" lvl="1" indent="0">
+              <a:buNone/>
+            </a:pPr>
+            <a:r>
+              <a:rPr lang="en-US" sz="1400"/>
+              <a:t>Examples of unstructured data include text, images, videos, audio files, and social media posts.</a:t>
+            </a:r>
+          </a:p>
+          <a:p>
+            <a:pPr marL="0" indent="0">
+              <a:spcBef>
+                <a:spcPts val="2500"/>
+              </a:spcBef>
+              <a:buNone/>
+            </a:pPr>
+            <a:r>
+              <a:rPr lang="en-US" sz="1400" b="1"/>
+              <a:t>Challenges of Analyzing Unstructured Data</a:t>
+            </a:r>
+          </a:p>
+          <a:p>
+            <a:pPr marL="0" lvl="1" indent="0">
+              <a:buNone/>
+            </a:pPr>
+            <a:r>
+              <a:rPr lang="en-US" sz="1400"/>
+              <a:t>Unstructured data is difficult to analyze with traditional data analytics tools because of its lack of structure and format. It requires specialized tools and techniques to extract meaningful insights from unstructured data.</a:t>
             </a:r>
             <a:endParaRPr lang="en-IN" sz="1400"/>
           </a:p>
@@ -14915,10 +16408,10 @@
       </p:sp>
       <p:sp>
         <p:nvSpPr>
-          <p:cNvPr id="18" name="Rectangle 17">
-            <a:extLst>
-              <a:ext uri="{FF2B5EF4-FFF2-40B4-BE49-F238E27FC236}">
-                <a16:creationId xmlns:a16="http://schemas.microsoft.com/office/drawing/2014/main" id="{887F59F2-5FBC-40CD-AD35-376AECE49EA6}"/>
+          <p:cNvPr id="18" name="Freeform: Shape 17">
+            <a:extLst>
+              <a:ext uri="{FF2B5EF4-FFF2-40B4-BE49-F238E27FC236}">
+                <a16:creationId xmlns:a16="http://schemas.microsoft.com/office/drawing/2014/main" id="{C6DD38CD-CFFE-4ABA-3DC8-01ED90559EBE}"/>
               </a:ext>
               <a:ext uri="{C183D7F6-B498-43B3-948B-1728B52AA6E4}">
                 <adec:decorative xmlns:adec="http://schemas.microsoft.com/office/drawing/2017/decorative" val="1"/>
@@ -14938,111 +16431,19 @@
         </p:nvSpPr>
         <p:spPr>
           <a:xfrm>
-            <a:off x="517865" y="508090"/>
-            <a:ext cx="8111230" cy="149279"/>
-          </a:xfrm>
-          <a:prstGeom prst="rect">
-            <a:avLst/>
-          </a:prstGeom>
-          <a:solidFill>
-            <a:schemeClr val="tx1"/>
-          </a:solidFill>
-          <a:ln>
-            <a:noFill/>
-          </a:ln>
-        </p:spPr>
-        <p:style>
-          <a:lnRef idx="2">
-            <a:schemeClr val="accent1">
-              <a:shade val="50000"/>
-            </a:schemeClr>
-          </a:lnRef>
-          <a:fillRef idx="1">
-            <a:schemeClr val="accent1"/>
-          </a:fillRef>
-          <a:effectRef idx="0">
-            <a:schemeClr val="accent1"/>
-          </a:effectRef>
-          <a:fontRef idx="minor">
-            <a:schemeClr val="lt1"/>
-          </a:fontRef>
-        </p:style>
-        <p:txBody>
-          <a:bodyPr rtlCol="0" anchor="ctr"/>
-          <a:lstStyle/>
-          <a:p>
-            <a:pPr marL="0" marR="0" lvl="0" indent="0" algn="ctr" defTabSz="914400" rtl="0" eaLnBrk="1" fontAlgn="auto" latinLnBrk="0" hangingPunct="1">
-              <a:lnSpc>
-                <a:spcPct val="100000"/>
-              </a:lnSpc>
-              <a:spcBef>
-                <a:spcPts val="0"/>
-              </a:spcBef>
-              <a:spcAft>
-                <a:spcPts val="0"/>
-              </a:spcAft>
-              <a:buClrTx/>
-              <a:buSzTx/>
-              <a:buFontTx/>
-              <a:buNone/>
-              <a:tabLst/>
-              <a:defRPr/>
-            </a:pPr>
-            <a:endParaRPr kumimoji="0" lang="en-US" sz="1800" b="0" i="0" u="none" strike="noStrike" kern="1200" cap="none" spc="0" normalizeH="0" baseline="0" noProof="0">
-              <a:ln>
-                <a:noFill/>
-              </a:ln>
-              <a:solidFill>
-                <a:prstClr val="white"/>
-              </a:solidFill>
-              <a:effectLst/>
-              <a:uLnTx/>
-              <a:uFillTx/>
-              <a:latin typeface="Bierstadt"/>
-              <a:ea typeface="+mn-ea"/>
-              <a:cs typeface="+mn-cs"/>
-            </a:endParaRPr>
-          </a:p>
-        </p:txBody>
-      </p:sp>
-      <p:sp>
-        <p:nvSpPr>
-          <p:cNvPr id="20" name="Freeform: Shape 19">
-            <a:extLst>
-              <a:ext uri="{FF2B5EF4-FFF2-40B4-BE49-F238E27FC236}">
-                <a16:creationId xmlns:a16="http://schemas.microsoft.com/office/drawing/2014/main" id="{E94EA6C1-5B73-CB10-F9FB-B671500CC2D6}"/>
-              </a:ext>
-              <a:ext uri="{C183D7F6-B498-43B3-948B-1728B52AA6E4}">
-                <adec:decorative xmlns:adec="http://schemas.microsoft.com/office/drawing/2017/decorative" val="1"/>
-              </a:ext>
-            </a:extLst>
-          </p:cNvPr>
-          <p:cNvSpPr>
-            <a:spLocks noGrp="1" noRot="1" noChangeAspect="1" noMove="1" noResize="1" noEditPoints="1" noAdjustHandles="1" noChangeArrowheads="1" noChangeShapeType="1" noTextEdit="1"/>
-          </p:cNvSpPr>
-          <p:nvPr>
-            <p:extLst>
-              <p:ext uri="{386F3935-93C4-4BCD-93E2-E3B085C9AB24}">
-                <p16:designElem xmlns:p16="http://schemas.microsoft.com/office/powerpoint/2015/main" val="1"/>
-              </p:ext>
-            </p:extLst>
-          </p:nvPr>
-        </p:nvSpPr>
-        <p:spPr>
-          <a:xfrm>
-            <a:off x="517869" y="508090"/>
-            <a:ext cx="8686800" cy="149279"/>
+            <a:off x="5484611" y="508090"/>
+            <a:ext cx="6186474" cy="149279"/>
           </a:xfrm>
           <a:custGeom>
             <a:avLst/>
             <a:gdLst>
-              <a:gd name="connsiteX0" fmla="*/ 0 w 8085002"/>
+              <a:gd name="connsiteX0" fmla="*/ 0 w 6090847"/>
               <a:gd name="connsiteY0" fmla="*/ 0 h 149279"/>
-              <a:gd name="connsiteX1" fmla="*/ 8085002 w 8085002"/>
+              <a:gd name="connsiteX1" fmla="*/ 6090847 w 6090847"/>
               <a:gd name="connsiteY1" fmla="*/ 0 h 149279"/>
-              <a:gd name="connsiteX2" fmla="*/ 8085002 w 8085002"/>
+              <a:gd name="connsiteX2" fmla="*/ 6090847 w 6090847"/>
               <a:gd name="connsiteY2" fmla="*/ 149279 h 149279"/>
-              <a:gd name="connsiteX3" fmla="*/ 0 w 8085002"/>
+              <a:gd name="connsiteX3" fmla="*/ 0 w 6090847"/>
               <a:gd name="connsiteY3" fmla="*/ 149279 h 149279"/>
             </a:gdLst>
             <a:ahLst/>
@@ -15062,15 +16463,15 @@
             </a:cxnLst>
             <a:rect l="l" t="t" r="r" b="b"/>
             <a:pathLst>
-              <a:path w="8085002" h="149279">
+              <a:path w="6090847" h="149279">
                 <a:moveTo>
                   <a:pt x="0" y="0"/>
                 </a:moveTo>
                 <a:lnTo>
-                  <a:pt x="8085002" y="0"/>
+                  <a:pt x="6090847" y="0"/>
                 </a:lnTo>
                 <a:lnTo>
-                  <a:pt x="8085002" y="149279"/>
+                  <a:pt x="6090847" y="149279"/>
                 </a:lnTo>
                 <a:lnTo>
                   <a:pt x="0" y="149279"/>
@@ -15108,37 +16509,8 @@
           </a:bodyPr>
           <a:lstStyle/>
           <a:p>
-            <a:pPr marL="0" marR="0" lvl="0" indent="0" algn="ctr" defTabSz="914400" rtl="0" eaLnBrk="1" fontAlgn="auto" latinLnBrk="0" hangingPunct="1">
-              <a:lnSpc>
-                <a:spcPct val="100000"/>
-              </a:lnSpc>
-              <a:spcBef>
-                <a:spcPts val="0"/>
-              </a:spcBef>
-              <a:spcAft>
-                <a:spcPts val="0"/>
-              </a:spcAft>
-              <a:buClrTx/>
-              <a:buSzTx/>
-              <a:buFontTx/>
-              <a:buNone/>
-              <a:tabLst/>
-              <a:defRPr/>
-            </a:pPr>
-            <a:endParaRPr kumimoji="0" lang="en-US" sz="1800" b="0" i="0" u="none" strike="noStrike" kern="1200" cap="none" spc="0" normalizeH="0" baseline="0" noProof="0">
-              <a:ln>
-                <a:noFill/>
-              </a:ln>
-              <a:solidFill>
-                <a:prstClr val="white"/>
-              </a:solidFill>
-              <a:effectLst/>
-              <a:uLnTx/>
-              <a:uFillTx/>
-              <a:latin typeface="Bierstadt"/>
-              <a:ea typeface="+mn-ea"/>
-              <a:cs typeface="+mn-cs"/>
-            </a:endParaRPr>
+            <a:pPr algn="ctr"/>
+            <a:endParaRPr lang="en-US"/>
           </a:p>
         </p:txBody>
       </p:sp>
@@ -15147,7 +16519,7 @@
           <p:cNvPr id="3" name="Slide Number Placeholder 2">
             <a:extLst>
               <a:ext uri="{FF2B5EF4-FFF2-40B4-BE49-F238E27FC236}">
-                <a16:creationId xmlns:a16="http://schemas.microsoft.com/office/drawing/2014/main" id="{3E4E3C7A-03D6-99F6-9620-31F47F322DDA}"/>
+                <a16:creationId xmlns:a16="http://schemas.microsoft.com/office/drawing/2014/main" id="{AC50A4E5-2833-DD03-22B8-E2FAFBD188B9}"/>
               </a:ext>
             </a:extLst>
           </p:cNvPr>
@@ -15174,7 +16546,7 @@
     </p:spTree>
     <p:extLst>
       <p:ext uri="{BB962C8B-B14F-4D97-AF65-F5344CB8AC3E}">
-        <p14:creationId xmlns:p14="http://schemas.microsoft.com/office/powerpoint/2010/main" val="112881370"/>
+        <p14:creationId xmlns:p14="http://schemas.microsoft.com/office/powerpoint/2010/main" val="1961148299"/>
       </p:ext>
     </p:extLst>
   </p:cSld>
@@ -15544,7 +16916,7 @@
           <p:cNvPr id="16" name="Rectangle 15">
             <a:extLst>
               <a:ext uri="{FF2B5EF4-FFF2-40B4-BE49-F238E27FC236}">
-                <a16:creationId xmlns:a16="http://schemas.microsoft.com/office/drawing/2014/main" id="{34C0330F-1D4F-4552-B799-615DD237B6DE}"/>
+                <a16:creationId xmlns:a16="http://schemas.microsoft.com/office/drawing/2014/main" id="{9E10BDB4-64F2-477D-A03B-9F8352D5E02E}"/>
               </a:ext>
               <a:ext uri="{C183D7F6-B498-43B3-948B-1728B52AA6E4}">
                 <adec:decorative xmlns:adec="http://schemas.microsoft.com/office/drawing/2017/decorative" val="1"/>
@@ -15570,246 +16942,6 @@
           <a:prstGeom prst="rect">
             <a:avLst/>
           </a:prstGeom>
-          <a:ln>
-            <a:noFill/>
-          </a:ln>
-        </p:spPr>
-        <p:style>
-          <a:lnRef idx="2">
-            <a:schemeClr val="accent1">
-              <a:shade val="50000"/>
-            </a:schemeClr>
-          </a:lnRef>
-          <a:fillRef idx="1">
-            <a:schemeClr val="accent1"/>
-          </a:fillRef>
-          <a:effectRef idx="0">
-            <a:schemeClr val="accent1"/>
-          </a:effectRef>
-          <a:fontRef idx="minor">
-            <a:schemeClr val="lt1"/>
-          </a:fontRef>
-        </p:style>
-        <p:txBody>
-          <a:bodyPr rtlCol="0" anchor="ctr"/>
-          <a:lstStyle/>
-          <a:p>
-            <a:pPr marL="0" marR="0" lvl="0" indent="0" algn="ctr" defTabSz="914400" rtl="0" eaLnBrk="1" fontAlgn="auto" latinLnBrk="0" hangingPunct="1">
-              <a:lnSpc>
-                <a:spcPct val="100000"/>
-              </a:lnSpc>
-              <a:spcBef>
-                <a:spcPts val="0"/>
-              </a:spcBef>
-              <a:spcAft>
-                <a:spcPts val="0"/>
-              </a:spcAft>
-              <a:buClrTx/>
-              <a:buSzTx/>
-              <a:buFontTx/>
-              <a:buNone/>
-              <a:tabLst/>
-              <a:defRPr/>
-            </a:pPr>
-            <a:endParaRPr kumimoji="0" lang="en-US" sz="1800" b="0" i="0" u="none" strike="noStrike" kern="1200" cap="none" spc="0" normalizeH="0" baseline="0" noProof="0" dirty="0">
-              <a:ln>
-                <a:noFill/>
-              </a:ln>
-              <a:solidFill>
-                <a:prstClr val="white"/>
-              </a:solidFill>
-              <a:effectLst/>
-              <a:uLnTx/>
-              <a:uFillTx/>
-              <a:latin typeface="Bierstadt"/>
-              <a:ea typeface="+mn-ea"/>
-              <a:cs typeface="+mn-cs"/>
-            </a:endParaRPr>
-          </a:p>
-        </p:txBody>
-      </p:sp>
-      <p:pic>
-        <p:nvPicPr>
-          <p:cNvPr id="5" name="Content Placeholder 4" descr="science abstract element">
-            <a:extLst>
-              <a:ext uri="{FF2B5EF4-FFF2-40B4-BE49-F238E27FC236}">
-                <a16:creationId xmlns:a16="http://schemas.microsoft.com/office/drawing/2014/main" id="{D7A56AF9-60C9-4DF1-8D14-15082424ED06}"/>
-              </a:ext>
-            </a:extLst>
-          </p:cNvPr>
-          <p:cNvPicPr>
-            <a:picLocks noGrp="1" noChangeAspect="1"/>
-          </p:cNvPicPr>
-          <p:nvPr>
-            <p:ph sz="half" idx="1"/>
-          </p:nvPr>
-        </p:nvPicPr>
-        <p:blipFill>
-          <a:blip r:embed="rId3"/>
-          <a:srcRect l="6525" r="19990" b="-1"/>
-          <a:stretch/>
-        </p:blipFill>
-        <p:spPr>
-          <a:xfrm>
-            <a:off x="5958018" y="508090"/>
-            <a:ext cx="5709726" cy="5846989"/>
-          </a:xfrm>
-          <a:prstGeom prst="rect">
-            <a:avLst/>
-          </a:prstGeom>
-        </p:spPr>
-      </p:pic>
-      <p:sp>
-        <p:nvSpPr>
-          <p:cNvPr id="2" name="Title 1">
-            <a:extLst>
-              <a:ext uri="{FF2B5EF4-FFF2-40B4-BE49-F238E27FC236}">
-                <a16:creationId xmlns:a16="http://schemas.microsoft.com/office/drawing/2014/main" id="{2CDF4940-FFD6-2D42-7E4A-82F426B11814}"/>
-              </a:ext>
-            </a:extLst>
-          </p:cNvPr>
-          <p:cNvSpPr>
-            <a:spLocks noGrp="1"/>
-          </p:cNvSpPr>
-          <p:nvPr>
-            <p:ph type="title"/>
-          </p:nvPr>
-        </p:nvSpPr>
-        <p:spPr>
-          <a:xfrm>
-            <a:off x="517871" y="976160"/>
-            <a:ext cx="4798200" cy="1463040"/>
-          </a:xfrm>
-        </p:spPr>
-        <p:txBody>
-          <a:bodyPr vert="horz" lIns="91440" tIns="45720" rIns="91440" bIns="45720" rtlCol="0" anchor="t">
-            <a:normAutofit/>
-          </a:bodyPr>
-          <a:lstStyle/>
-          <a:p>
-            <a:r>
-              <a:rPr lang="en-US" sz="4400"/>
-              <a:t>Differences and Use Cases</a:t>
-            </a:r>
-          </a:p>
-        </p:txBody>
-      </p:sp>
-      <p:sp>
-        <p:nvSpPr>
-          <p:cNvPr id="4" name="Content Placeholder 3">
-            <a:extLst>
-              <a:ext uri="{FF2B5EF4-FFF2-40B4-BE49-F238E27FC236}">
-                <a16:creationId xmlns:a16="http://schemas.microsoft.com/office/drawing/2014/main" id="{3BD0BF8E-AD93-9122-0143-3515D0CA0F5F}"/>
-              </a:ext>
-            </a:extLst>
-          </p:cNvPr>
-          <p:cNvSpPr>
-            <a:spLocks noGrp="1"/>
-          </p:cNvSpPr>
-          <p:nvPr>
-            <p:ph sz="half" idx="2"/>
-            <p:extLst>
-              <p:ext uri="{E7BDC344-281C-4309-B0C6-D0EE65EED2A8}">
-                <p202:designPr xmlns:p202="http://schemas.microsoft.com/office/powerpoint/2020/02/main">
-                  <p202:designTagLst>
-                    <p202:designTag name="ARCH:1:CLS" val="InformationBlock"/>
-                    <p202:designTag name="ARCH:1:VSVAR" val="TitledTextBox"/>
-                  </p202:designTagLst>
-                </p202:designPr>
-              </p:ext>
-            </p:extLst>
-          </p:nvPr>
-        </p:nvSpPr>
-        <p:spPr>
-          <a:xfrm>
-            <a:off x="517871" y="2578608"/>
-            <a:ext cx="4672966" cy="3767328"/>
-          </a:xfrm>
-        </p:spPr>
-        <p:txBody>
-          <a:bodyPr>
-            <a:normAutofit/>
-          </a:bodyPr>
-          <a:lstStyle/>
-          <a:p>
-            <a:pPr marL="0" indent="0">
-              <a:spcBef>
-                <a:spcPts val="2500"/>
-              </a:spcBef>
-              <a:buNone/>
-            </a:pPr>
-            <a:r>
-              <a:rPr lang="en-US" sz="1400" b="1"/>
-              <a:t>Structured Data</a:t>
-            </a:r>
-          </a:p>
-          <a:p>
-            <a:pPr marL="0" lvl="1" indent="0">
-              <a:buNone/>
-            </a:pPr>
-            <a:r>
-              <a:rPr lang="en-US" sz="1400"/>
-              <a:t>Structured data is highly organized and can be easily analyzed using traditional data analytics tools. It is ideal for data that has a well-defined schema and is stored in tables or spreadsheets.</a:t>
-            </a:r>
-          </a:p>
-          <a:p>
-            <a:pPr marL="0" indent="0">
-              <a:spcBef>
-                <a:spcPts val="2500"/>
-              </a:spcBef>
-              <a:buNone/>
-            </a:pPr>
-            <a:r>
-              <a:rPr lang="en-US" sz="1400" b="1"/>
-              <a:t>Unstructured Data</a:t>
-            </a:r>
-          </a:p>
-          <a:p>
-            <a:pPr marL="0" lvl="1" indent="0">
-              <a:buNone/>
-            </a:pPr>
-            <a:r>
-              <a:rPr lang="en-US" sz="1400"/>
-              <a:t>Unstructured data is not organized and cannot be easily analyzed using traditional data analytics tools. It requires more advanced tools, such as natural language processing and machine learning. It is ideal for data that is not easily classified, such as social media posts and emails.</a:t>
-            </a:r>
-            <a:endParaRPr lang="en-IN" sz="1400"/>
-          </a:p>
-        </p:txBody>
-      </p:sp>
-      <p:sp>
-        <p:nvSpPr>
-          <p:cNvPr id="18" name="Rectangle 17">
-            <a:extLst>
-              <a:ext uri="{FF2B5EF4-FFF2-40B4-BE49-F238E27FC236}">
-                <a16:creationId xmlns:a16="http://schemas.microsoft.com/office/drawing/2014/main" id="{92BE0106-0C20-465B-A1BE-0BAC2737B1AD}"/>
-              </a:ext>
-              <a:ext uri="{C183D7F6-B498-43B3-948B-1728B52AA6E4}">
-                <adec:decorative xmlns:adec="http://schemas.microsoft.com/office/drawing/2017/decorative" val="1"/>
-              </a:ext>
-            </a:extLst>
-          </p:cNvPr>
-          <p:cNvSpPr>
-            <a:spLocks noGrp="1" noRot="1" noChangeAspect="1" noMove="1" noResize="1" noEditPoints="1" noAdjustHandles="1" noChangeArrowheads="1" noChangeShapeType="1" noTextEdit="1"/>
-          </p:cNvSpPr>
-          <p:nvPr>
-            <p:extLst>
-              <p:ext uri="{386F3935-93C4-4BCD-93E2-E3B085C9AB24}">
-                <p16:designElem xmlns:p16="http://schemas.microsoft.com/office/powerpoint/2015/main" val="1"/>
-              </p:ext>
-            </p:extLst>
-          </p:nvPr>
-        </p:nvSpPr>
-        <p:spPr>
-          <a:xfrm>
-            <a:off x="517871" y="508090"/>
-            <a:ext cx="4672966" cy="149279"/>
-          </a:xfrm>
-          <a:prstGeom prst="rect">
-            <a:avLst/>
-          </a:prstGeom>
-          <a:solidFill>
-            <a:schemeClr val="tx1"/>
-          </a:solidFill>
           <a:ln>
             <a:noFill/>
           </a:ln>
@@ -15868,12 +17000,365 @@
           </a:p>
         </p:txBody>
       </p:sp>
+      <p:pic>
+        <p:nvPicPr>
+          <p:cNvPr id="5" name="Content Placeholder 4" descr="Transistors on the circuit. The circuit is wrong side up, but can be seen on the top part of the photo, where it is focused. Also has nice and recognizable structure.">
+            <a:extLst>
+              <a:ext uri="{FF2B5EF4-FFF2-40B4-BE49-F238E27FC236}">
+                <a16:creationId xmlns:a16="http://schemas.microsoft.com/office/drawing/2014/main" id="{E0F80F10-C7DA-49F0-B90F-385A56FCB71B}"/>
+              </a:ext>
+            </a:extLst>
+          </p:cNvPr>
+          <p:cNvPicPr>
+            <a:picLocks noGrp="1" noChangeAspect="1"/>
+          </p:cNvPicPr>
+          <p:nvPr>
+            <p:ph sz="half" idx="1"/>
+          </p:nvPr>
+        </p:nvPicPr>
+        <p:blipFill>
+          <a:blip r:embed="rId3"/>
+          <a:srcRect t="7058" r="1" b="15931"/>
+          <a:stretch/>
+        </p:blipFill>
+        <p:spPr>
+          <a:xfrm>
+            <a:off x="517864" y="1863633"/>
+            <a:ext cx="8687096" cy="4482371"/>
+          </a:xfrm>
+          <a:prstGeom prst="rect">
+            <a:avLst/>
+          </a:prstGeom>
+        </p:spPr>
+      </p:pic>
+      <p:sp>
+        <p:nvSpPr>
+          <p:cNvPr id="2" name="Title 1">
+            <a:extLst>
+              <a:ext uri="{FF2B5EF4-FFF2-40B4-BE49-F238E27FC236}">
+                <a16:creationId xmlns:a16="http://schemas.microsoft.com/office/drawing/2014/main" id="{157A8034-8D20-96D1-14D5-5F4A1BFA43B1}"/>
+              </a:ext>
+            </a:extLst>
+          </p:cNvPr>
+          <p:cNvSpPr>
+            <a:spLocks noGrp="1"/>
+          </p:cNvSpPr>
+          <p:nvPr>
+            <p:ph type="title"/>
+          </p:nvPr>
+        </p:nvSpPr>
+        <p:spPr>
+          <a:xfrm>
+            <a:off x="517865" y="976160"/>
+            <a:ext cx="8686800" cy="813063"/>
+          </a:xfrm>
+        </p:spPr>
+        <p:txBody>
+          <a:bodyPr vert="horz" lIns="91440" tIns="45720" rIns="91440" bIns="45720" rtlCol="0" anchor="t">
+            <a:normAutofit/>
+          </a:bodyPr>
+          <a:lstStyle/>
+          <a:p>
+            <a:r>
+              <a:rPr lang="en-US" sz="4400"/>
+              <a:t>Semi-Structured Data</a:t>
+            </a:r>
+          </a:p>
+        </p:txBody>
+      </p:sp>
+      <p:sp>
+        <p:nvSpPr>
+          <p:cNvPr id="4" name="Content Placeholder 3">
+            <a:extLst>
+              <a:ext uri="{FF2B5EF4-FFF2-40B4-BE49-F238E27FC236}">
+                <a16:creationId xmlns:a16="http://schemas.microsoft.com/office/drawing/2014/main" id="{CAEA97FA-2A10-5700-6C40-69D1F721980F}"/>
+              </a:ext>
+            </a:extLst>
+          </p:cNvPr>
+          <p:cNvSpPr>
+            <a:spLocks noGrp="1"/>
+          </p:cNvSpPr>
+          <p:nvPr>
+            <p:ph sz="half" idx="2"/>
+            <p:extLst>
+              <p:ext uri="{E7BDC344-281C-4309-B0C6-D0EE65EED2A8}">
+                <p202:designPr xmlns:p202="http://schemas.microsoft.com/office/powerpoint/2020/02/main">
+                  <p202:designTagLst>
+                    <p202:designTag name="ARCH:1:CLS" val="InformationBlock"/>
+                    <p202:designTag name="ARCH:1:VSVAR" val="TitledTextBox"/>
+                  </p202:designTagLst>
+                </p202:designPr>
+              </p:ext>
+            </p:extLst>
+          </p:nvPr>
+        </p:nvSpPr>
+        <p:spPr>
+          <a:xfrm>
+            <a:off x="9631680" y="1863632"/>
+            <a:ext cx="2042449" cy="4482371"/>
+          </a:xfrm>
+        </p:spPr>
+        <p:txBody>
+          <a:bodyPr>
+            <a:normAutofit/>
+          </a:bodyPr>
+          <a:lstStyle/>
+          <a:p>
+            <a:pPr marL="0" indent="0">
+              <a:spcBef>
+                <a:spcPts val="2500"/>
+              </a:spcBef>
+              <a:buNone/>
+            </a:pPr>
+            <a:endParaRPr lang="en-US" sz="1400" b="1"/>
+          </a:p>
+          <a:p>
+            <a:pPr marL="0" lvl="1" indent="0">
+              <a:buNone/>
+            </a:pPr>
+            <a:r>
+              <a:rPr lang="en-US" sz="1400"/>
+              <a:t>Semi-structured data is a type of data that contains both structured and unstructured elements. It has some organizational structure, but also allows for flexibility in the data model and content.</a:t>
+            </a:r>
+            <a:endParaRPr lang="en-IN" sz="1400"/>
+          </a:p>
+        </p:txBody>
+      </p:sp>
+      <p:sp>
+        <p:nvSpPr>
+          <p:cNvPr id="18" name="Rectangle 17">
+            <a:extLst>
+              <a:ext uri="{FF2B5EF4-FFF2-40B4-BE49-F238E27FC236}">
+                <a16:creationId xmlns:a16="http://schemas.microsoft.com/office/drawing/2014/main" id="{887F59F2-5FBC-40CD-AD35-376AECE49EA6}"/>
+              </a:ext>
+              <a:ext uri="{C183D7F6-B498-43B3-948B-1728B52AA6E4}">
+                <adec:decorative xmlns:adec="http://schemas.microsoft.com/office/drawing/2017/decorative" val="1"/>
+              </a:ext>
+            </a:extLst>
+          </p:cNvPr>
+          <p:cNvSpPr>
+            <a:spLocks noGrp="1" noRot="1" noChangeAspect="1" noMove="1" noResize="1" noEditPoints="1" noAdjustHandles="1" noChangeArrowheads="1" noChangeShapeType="1" noTextEdit="1"/>
+          </p:cNvSpPr>
+          <p:nvPr>
+            <p:extLst>
+              <p:ext uri="{386F3935-93C4-4BCD-93E2-E3B085C9AB24}">
+                <p16:designElem xmlns:p16="http://schemas.microsoft.com/office/powerpoint/2015/main" val="1"/>
+              </p:ext>
+            </p:extLst>
+          </p:nvPr>
+        </p:nvSpPr>
+        <p:spPr>
+          <a:xfrm>
+            <a:off x="517865" y="508090"/>
+            <a:ext cx="8111230" cy="149279"/>
+          </a:xfrm>
+          <a:prstGeom prst="rect">
+            <a:avLst/>
+          </a:prstGeom>
+          <a:solidFill>
+            <a:schemeClr val="tx1"/>
+          </a:solidFill>
+          <a:ln>
+            <a:noFill/>
+          </a:ln>
+        </p:spPr>
+        <p:style>
+          <a:lnRef idx="2">
+            <a:schemeClr val="accent1">
+              <a:shade val="50000"/>
+            </a:schemeClr>
+          </a:lnRef>
+          <a:fillRef idx="1">
+            <a:schemeClr val="accent1"/>
+          </a:fillRef>
+          <a:effectRef idx="0">
+            <a:schemeClr val="accent1"/>
+          </a:effectRef>
+          <a:fontRef idx="minor">
+            <a:schemeClr val="lt1"/>
+          </a:fontRef>
+        </p:style>
+        <p:txBody>
+          <a:bodyPr rtlCol="0" anchor="ctr"/>
+          <a:lstStyle/>
+          <a:p>
+            <a:pPr marL="0" marR="0" lvl="0" indent="0" algn="ctr" defTabSz="914400" rtl="0" eaLnBrk="1" fontAlgn="auto" latinLnBrk="0" hangingPunct="1">
+              <a:lnSpc>
+                <a:spcPct val="100000"/>
+              </a:lnSpc>
+              <a:spcBef>
+                <a:spcPts val="0"/>
+              </a:spcBef>
+              <a:spcAft>
+                <a:spcPts val="0"/>
+              </a:spcAft>
+              <a:buClrTx/>
+              <a:buSzTx/>
+              <a:buFontTx/>
+              <a:buNone/>
+              <a:tabLst/>
+              <a:defRPr/>
+            </a:pPr>
+            <a:endParaRPr kumimoji="0" lang="en-US" sz="1800" b="0" i="0" u="none" strike="noStrike" kern="1200" cap="none" spc="0" normalizeH="0" baseline="0" noProof="0">
+              <a:ln>
+                <a:noFill/>
+              </a:ln>
+              <a:solidFill>
+                <a:prstClr val="white"/>
+              </a:solidFill>
+              <a:effectLst/>
+              <a:uLnTx/>
+              <a:uFillTx/>
+              <a:latin typeface="Bierstadt"/>
+              <a:ea typeface="+mn-ea"/>
+              <a:cs typeface="+mn-cs"/>
+            </a:endParaRPr>
+          </a:p>
+        </p:txBody>
+      </p:sp>
+      <p:sp>
+        <p:nvSpPr>
+          <p:cNvPr id="20" name="Freeform: Shape 19">
+            <a:extLst>
+              <a:ext uri="{FF2B5EF4-FFF2-40B4-BE49-F238E27FC236}">
+                <a16:creationId xmlns:a16="http://schemas.microsoft.com/office/drawing/2014/main" id="{E94EA6C1-5B73-CB10-F9FB-B671500CC2D6}"/>
+              </a:ext>
+              <a:ext uri="{C183D7F6-B498-43B3-948B-1728B52AA6E4}">
+                <adec:decorative xmlns:adec="http://schemas.microsoft.com/office/drawing/2017/decorative" val="1"/>
+              </a:ext>
+            </a:extLst>
+          </p:cNvPr>
+          <p:cNvSpPr>
+            <a:spLocks noGrp="1" noRot="1" noChangeAspect="1" noMove="1" noResize="1" noEditPoints="1" noAdjustHandles="1" noChangeArrowheads="1" noChangeShapeType="1" noTextEdit="1"/>
+          </p:cNvSpPr>
+          <p:nvPr>
+            <p:extLst>
+              <p:ext uri="{386F3935-93C4-4BCD-93E2-E3B085C9AB24}">
+                <p16:designElem xmlns:p16="http://schemas.microsoft.com/office/powerpoint/2015/main" val="1"/>
+              </p:ext>
+            </p:extLst>
+          </p:nvPr>
+        </p:nvSpPr>
+        <p:spPr>
+          <a:xfrm>
+            <a:off x="517869" y="508090"/>
+            <a:ext cx="8686800" cy="149279"/>
+          </a:xfrm>
+          <a:custGeom>
+            <a:avLst/>
+            <a:gdLst>
+              <a:gd name="connsiteX0" fmla="*/ 0 w 8085002"/>
+              <a:gd name="connsiteY0" fmla="*/ 0 h 149279"/>
+              <a:gd name="connsiteX1" fmla="*/ 8085002 w 8085002"/>
+              <a:gd name="connsiteY1" fmla="*/ 0 h 149279"/>
+              <a:gd name="connsiteX2" fmla="*/ 8085002 w 8085002"/>
+              <a:gd name="connsiteY2" fmla="*/ 149279 h 149279"/>
+              <a:gd name="connsiteX3" fmla="*/ 0 w 8085002"/>
+              <a:gd name="connsiteY3" fmla="*/ 149279 h 149279"/>
+            </a:gdLst>
+            <a:ahLst/>
+            <a:cxnLst>
+              <a:cxn ang="0">
+                <a:pos x="connsiteX0" y="connsiteY0"/>
+              </a:cxn>
+              <a:cxn ang="0">
+                <a:pos x="connsiteX1" y="connsiteY1"/>
+              </a:cxn>
+              <a:cxn ang="0">
+                <a:pos x="connsiteX2" y="connsiteY2"/>
+              </a:cxn>
+              <a:cxn ang="0">
+                <a:pos x="connsiteX3" y="connsiteY3"/>
+              </a:cxn>
+            </a:cxnLst>
+            <a:rect l="l" t="t" r="r" b="b"/>
+            <a:pathLst>
+              <a:path w="8085002" h="149279">
+                <a:moveTo>
+                  <a:pt x="0" y="0"/>
+                </a:moveTo>
+                <a:lnTo>
+                  <a:pt x="8085002" y="0"/>
+                </a:lnTo>
+                <a:lnTo>
+                  <a:pt x="8085002" y="149279"/>
+                </a:lnTo>
+                <a:lnTo>
+                  <a:pt x="0" y="149279"/>
+                </a:lnTo>
+                <a:close/>
+              </a:path>
+            </a:pathLst>
+          </a:custGeom>
+          <a:solidFill>
+            <a:schemeClr val="tx1"/>
+          </a:solidFill>
+          <a:ln>
+            <a:noFill/>
+          </a:ln>
+        </p:spPr>
+        <p:style>
+          <a:lnRef idx="2">
+            <a:schemeClr val="accent1">
+              <a:shade val="50000"/>
+            </a:schemeClr>
+          </a:lnRef>
+          <a:fillRef idx="1">
+            <a:schemeClr val="accent1"/>
+          </a:fillRef>
+          <a:effectRef idx="0">
+            <a:schemeClr val="accent1"/>
+          </a:effectRef>
+          <a:fontRef idx="minor">
+            <a:schemeClr val="lt1"/>
+          </a:fontRef>
+        </p:style>
+        <p:txBody>
+          <a:bodyPr wrap="square" rtlCol="0" anchor="ctr">
+            <a:noAutofit/>
+          </a:bodyPr>
+          <a:lstStyle/>
+          <a:p>
+            <a:pPr marL="0" marR="0" lvl="0" indent="0" algn="ctr" defTabSz="914400" rtl="0" eaLnBrk="1" fontAlgn="auto" latinLnBrk="0" hangingPunct="1">
+              <a:lnSpc>
+                <a:spcPct val="100000"/>
+              </a:lnSpc>
+              <a:spcBef>
+                <a:spcPts val="0"/>
+              </a:spcBef>
+              <a:spcAft>
+                <a:spcPts val="0"/>
+              </a:spcAft>
+              <a:buClrTx/>
+              <a:buSzTx/>
+              <a:buFontTx/>
+              <a:buNone/>
+              <a:tabLst/>
+              <a:defRPr/>
+            </a:pPr>
+            <a:endParaRPr kumimoji="0" lang="en-US" sz="1800" b="0" i="0" u="none" strike="noStrike" kern="1200" cap="none" spc="0" normalizeH="0" baseline="0" noProof="0">
+              <a:ln>
+                <a:noFill/>
+              </a:ln>
+              <a:solidFill>
+                <a:prstClr val="white"/>
+              </a:solidFill>
+              <a:effectLst/>
+              <a:uLnTx/>
+              <a:uFillTx/>
+              <a:latin typeface="Bierstadt"/>
+              <a:ea typeface="+mn-ea"/>
+              <a:cs typeface="+mn-cs"/>
+            </a:endParaRPr>
+          </a:p>
+        </p:txBody>
+      </p:sp>
       <p:sp>
         <p:nvSpPr>
           <p:cNvPr id="3" name="Slide Number Placeholder 2">
             <a:extLst>
               <a:ext uri="{FF2B5EF4-FFF2-40B4-BE49-F238E27FC236}">
-                <a16:creationId xmlns:a16="http://schemas.microsoft.com/office/drawing/2014/main" id="{F073C339-D6D0-4C7A-494E-5E487DACF6EC}"/>
+                <a16:creationId xmlns:a16="http://schemas.microsoft.com/office/drawing/2014/main" id="{3E4E3C7A-03D6-99F6-9620-31F47F322DDA}"/>
               </a:ext>
             </a:extLst>
           </p:cNvPr>
@@ -15900,7 +17385,7 @@
     </p:spTree>
     <p:extLst>
       <p:ext uri="{BB962C8B-B14F-4D97-AF65-F5344CB8AC3E}">
-        <p14:creationId xmlns:p14="http://schemas.microsoft.com/office/powerpoint/2010/main" val="3022707596"/>
+        <p14:creationId xmlns:p14="http://schemas.microsoft.com/office/powerpoint/2010/main" val="112881370"/>
       </p:ext>
     </p:extLst>
   </p:cSld>
@@ -16078,7 +17563,7 @@
       </p:grpSpPr>
       <p:sp>
         <p:nvSpPr>
-          <p:cNvPr id="7" name="Rectangle 6">
+          <p:cNvPr id="10" name="Rectangle 9">
             <a:extLst>
               <a:ext uri="{FF2B5EF4-FFF2-40B4-BE49-F238E27FC236}">
                 <a16:creationId xmlns:a16="http://schemas.microsoft.com/office/drawing/2014/main" id="{ADE57300-C7FF-4578-99A0-42B0295B123C}"/>
@@ -16141,7 +17626,7 @@
       </p:sp>
       <p:sp>
         <p:nvSpPr>
-          <p:cNvPr id="9" name="Rectangle 8">
+          <p:cNvPr id="12" name="Rectangle 11">
             <a:extLst>
               <a:ext uri="{FF2B5EF4-FFF2-40B4-BE49-F238E27FC236}">
                 <a16:creationId xmlns:a16="http://schemas.microsoft.com/office/drawing/2014/main" id="{DB8F8250-7A81-4A19-87AD-FFB2CE4E39A5}"/>
@@ -16204,7 +17689,7 @@
       </p:sp>
       <p:sp>
         <p:nvSpPr>
-          <p:cNvPr id="11" name="Rectangle 10">
+          <p:cNvPr id="14" name="Rectangle 13">
             <a:extLst>
               <a:ext uri="{FF2B5EF4-FFF2-40B4-BE49-F238E27FC236}">
                 <a16:creationId xmlns:a16="http://schemas.microsoft.com/office/drawing/2014/main" id="{499F38FC-2DEA-2647-C409-EF75720C1017}"/>
@@ -16265,12 +17750,12 @@
           </a:p>
         </p:txBody>
       </p:sp>
-      <p:sp>
-        <p:nvSpPr>
-          <p:cNvPr id="13" name="Rectangle 12">
-            <a:extLst>
-              <a:ext uri="{FF2B5EF4-FFF2-40B4-BE49-F238E27FC236}">
-                <a16:creationId xmlns:a16="http://schemas.microsoft.com/office/drawing/2014/main" id="{26E9A97B-1917-9176-B980-E15E8CBDB12F}"/>
+      <p:sp useBgFill="1">
+        <p:nvSpPr>
+          <p:cNvPr id="16" name="Rectangle 15">
+            <a:extLst>
+              <a:ext uri="{FF2B5EF4-FFF2-40B4-BE49-F238E27FC236}">
+                <a16:creationId xmlns:a16="http://schemas.microsoft.com/office/drawing/2014/main" id="{34C0330F-1D4F-4552-B799-615DD237B6DE}"/>
               </a:ext>
               <a:ext uri="{C183D7F6-B498-43B3-948B-1728B52AA6E4}">
                 <adec:decorative xmlns:adec="http://schemas.microsoft.com/office/drawing/2017/decorative" val="1"/>
@@ -16290,15 +17775,12 @@
         </p:nvSpPr>
         <p:spPr>
           <a:xfrm>
-            <a:off x="517870" y="508090"/>
-            <a:ext cx="5021183" cy="149279"/>
+            <a:off x="0" y="0"/>
+            <a:ext cx="12188952" cy="6857995"/>
           </a:xfrm>
           <a:prstGeom prst="rect">
             <a:avLst/>
           </a:prstGeom>
-          <a:solidFill>
-            <a:schemeClr val="tx1"/>
-          </a:solidFill>
           <a:ln>
             <a:noFill/>
           </a:ln>
@@ -16323,17 +17805,194 @@
           <a:bodyPr rtlCol="0" anchor="ctr"/>
           <a:lstStyle/>
           <a:p>
-            <a:pPr algn="ctr"/>
-            <a:endParaRPr lang="en-US"/>
-          </a:p>
-        </p:txBody>
-      </p:sp>
-      <p:sp>
-        <p:nvSpPr>
-          <p:cNvPr id="15" name="Rectangle 14">
-            <a:extLst>
-              <a:ext uri="{FF2B5EF4-FFF2-40B4-BE49-F238E27FC236}">
-                <a16:creationId xmlns:a16="http://schemas.microsoft.com/office/drawing/2014/main" id="{F3FF94B3-6D3E-44FE-BB02-A9027C0003C7}"/>
+            <a:pPr marL="0" marR="0" lvl="0" indent="0" algn="ctr" defTabSz="914400" rtl="0" eaLnBrk="1" fontAlgn="auto" latinLnBrk="0" hangingPunct="1">
+              <a:lnSpc>
+                <a:spcPct val="100000"/>
+              </a:lnSpc>
+              <a:spcBef>
+                <a:spcPts val="0"/>
+              </a:spcBef>
+              <a:spcAft>
+                <a:spcPts val="0"/>
+              </a:spcAft>
+              <a:buClrTx/>
+              <a:buSzTx/>
+              <a:buFontTx/>
+              <a:buNone/>
+              <a:tabLst/>
+              <a:defRPr/>
+            </a:pPr>
+            <a:endParaRPr kumimoji="0" lang="en-US" sz="1800" b="0" i="0" u="none" strike="noStrike" kern="1200" cap="none" spc="0" normalizeH="0" baseline="0" noProof="0" dirty="0">
+              <a:ln>
+                <a:noFill/>
+              </a:ln>
+              <a:solidFill>
+                <a:prstClr val="white"/>
+              </a:solidFill>
+              <a:effectLst/>
+              <a:uLnTx/>
+              <a:uFillTx/>
+              <a:latin typeface="Bierstadt"/>
+              <a:ea typeface="+mn-ea"/>
+              <a:cs typeface="+mn-cs"/>
+            </a:endParaRPr>
+          </a:p>
+        </p:txBody>
+      </p:sp>
+      <p:pic>
+        <p:nvPicPr>
+          <p:cNvPr id="5" name="Content Placeholder 4" descr="science abstract element">
+            <a:extLst>
+              <a:ext uri="{FF2B5EF4-FFF2-40B4-BE49-F238E27FC236}">
+                <a16:creationId xmlns:a16="http://schemas.microsoft.com/office/drawing/2014/main" id="{D7A56AF9-60C9-4DF1-8D14-15082424ED06}"/>
+              </a:ext>
+            </a:extLst>
+          </p:cNvPr>
+          <p:cNvPicPr>
+            <a:picLocks noGrp="1" noChangeAspect="1"/>
+          </p:cNvPicPr>
+          <p:nvPr>
+            <p:ph sz="half" idx="1"/>
+          </p:nvPr>
+        </p:nvPicPr>
+        <p:blipFill>
+          <a:blip r:embed="rId3"/>
+          <a:srcRect l="6525" r="19990" b="-1"/>
+          <a:stretch/>
+        </p:blipFill>
+        <p:spPr>
+          <a:xfrm>
+            <a:off x="5958018" y="508090"/>
+            <a:ext cx="5709726" cy="5846989"/>
+          </a:xfrm>
+          <a:prstGeom prst="rect">
+            <a:avLst/>
+          </a:prstGeom>
+        </p:spPr>
+      </p:pic>
+      <p:sp>
+        <p:nvSpPr>
+          <p:cNvPr id="2" name="Title 1">
+            <a:extLst>
+              <a:ext uri="{FF2B5EF4-FFF2-40B4-BE49-F238E27FC236}">
+                <a16:creationId xmlns:a16="http://schemas.microsoft.com/office/drawing/2014/main" id="{2CDF4940-FFD6-2D42-7E4A-82F426B11814}"/>
+              </a:ext>
+            </a:extLst>
+          </p:cNvPr>
+          <p:cNvSpPr>
+            <a:spLocks noGrp="1"/>
+          </p:cNvSpPr>
+          <p:nvPr>
+            <p:ph type="title"/>
+          </p:nvPr>
+        </p:nvSpPr>
+        <p:spPr>
+          <a:xfrm>
+            <a:off x="517871" y="976160"/>
+            <a:ext cx="4798200" cy="1463040"/>
+          </a:xfrm>
+        </p:spPr>
+        <p:txBody>
+          <a:bodyPr vert="horz" lIns="91440" tIns="45720" rIns="91440" bIns="45720" rtlCol="0" anchor="t">
+            <a:normAutofit/>
+          </a:bodyPr>
+          <a:lstStyle/>
+          <a:p>
+            <a:r>
+              <a:rPr lang="en-US" sz="4400"/>
+              <a:t>Differences and Use Cases</a:t>
+            </a:r>
+          </a:p>
+        </p:txBody>
+      </p:sp>
+      <p:sp>
+        <p:nvSpPr>
+          <p:cNvPr id="4" name="Content Placeholder 3">
+            <a:extLst>
+              <a:ext uri="{FF2B5EF4-FFF2-40B4-BE49-F238E27FC236}">
+                <a16:creationId xmlns:a16="http://schemas.microsoft.com/office/drawing/2014/main" id="{3BD0BF8E-AD93-9122-0143-3515D0CA0F5F}"/>
+              </a:ext>
+            </a:extLst>
+          </p:cNvPr>
+          <p:cNvSpPr>
+            <a:spLocks noGrp="1"/>
+          </p:cNvSpPr>
+          <p:nvPr>
+            <p:ph sz="half" idx="2"/>
+            <p:extLst>
+              <p:ext uri="{E7BDC344-281C-4309-B0C6-D0EE65EED2A8}">
+                <p202:designPr xmlns:p202="http://schemas.microsoft.com/office/powerpoint/2020/02/main">
+                  <p202:designTagLst>
+                    <p202:designTag name="ARCH:1:CLS" val="InformationBlock"/>
+                    <p202:designTag name="ARCH:1:VSVAR" val="TitledTextBox"/>
+                  </p202:designTagLst>
+                </p202:designPr>
+              </p:ext>
+            </p:extLst>
+          </p:nvPr>
+        </p:nvSpPr>
+        <p:spPr>
+          <a:xfrm>
+            <a:off x="517871" y="2578608"/>
+            <a:ext cx="4672966" cy="3767328"/>
+          </a:xfrm>
+        </p:spPr>
+        <p:txBody>
+          <a:bodyPr>
+            <a:normAutofit/>
+          </a:bodyPr>
+          <a:lstStyle/>
+          <a:p>
+            <a:pPr marL="0" indent="0">
+              <a:spcBef>
+                <a:spcPts val="2500"/>
+              </a:spcBef>
+              <a:buNone/>
+            </a:pPr>
+            <a:r>
+              <a:rPr lang="en-US" sz="1400" b="1"/>
+              <a:t>Structured Data</a:t>
+            </a:r>
+          </a:p>
+          <a:p>
+            <a:pPr marL="0" lvl="1" indent="0">
+              <a:buNone/>
+            </a:pPr>
+            <a:r>
+              <a:rPr lang="en-US" sz="1400"/>
+              <a:t>Structured data is highly organized and can be easily analyzed using traditional data analytics tools. It is ideal for data that has a well-defined schema and is stored in tables or spreadsheets.</a:t>
+            </a:r>
+          </a:p>
+          <a:p>
+            <a:pPr marL="0" indent="0">
+              <a:spcBef>
+                <a:spcPts val="2500"/>
+              </a:spcBef>
+              <a:buNone/>
+            </a:pPr>
+            <a:r>
+              <a:rPr lang="en-US" sz="1400" b="1"/>
+              <a:t>Unstructured Data</a:t>
+            </a:r>
+          </a:p>
+          <a:p>
+            <a:pPr marL="0" lvl="1" indent="0">
+              <a:buNone/>
+            </a:pPr>
+            <a:r>
+              <a:rPr lang="en-US" sz="1400"/>
+              <a:t>Unstructured data is not organized and cannot be easily analyzed using traditional data analytics tools. It requires more advanced tools, such as natural language processing and machine learning. It is ideal for data that is not easily classified, such as social media posts and emails.</a:t>
+            </a:r>
+            <a:endParaRPr lang="en-IN" sz="1400"/>
+          </a:p>
+        </p:txBody>
+      </p:sp>
+      <p:sp>
+        <p:nvSpPr>
+          <p:cNvPr id="18" name="Rectangle 17">
+            <a:extLst>
+              <a:ext uri="{FF2B5EF4-FFF2-40B4-BE49-F238E27FC236}">
+                <a16:creationId xmlns:a16="http://schemas.microsoft.com/office/drawing/2014/main" id="{92BE0106-0C20-465B-A1BE-0BAC2737B1AD}"/>
               </a:ext>
               <a:ext uri="{C183D7F6-B498-43B3-948B-1728B52AA6E4}">
                 <adec:decorative xmlns:adec="http://schemas.microsoft.com/office/drawing/2017/decorative" val="1"/>
@@ -16353,8 +18012,8 @@
         </p:nvSpPr>
         <p:spPr>
           <a:xfrm>
-            <a:off x="6662168" y="6209925"/>
-            <a:ext cx="5021183" cy="45719"/>
+            <a:off x="517871" y="508090"/>
+            <a:ext cx="4672966" cy="149279"/>
           </a:xfrm>
           <a:prstGeom prst="rect">
             <a:avLst/>
@@ -16370,69 +18029,6 @@
           <a:lnRef idx="2">
             <a:schemeClr val="accent1">
               <a:shade val="50000"/>
-            </a:schemeClr>
-          </a:lnRef>
-          <a:fillRef idx="1">
-            <a:schemeClr val="accent1"/>
-          </a:fillRef>
-          <a:effectRef idx="0">
-            <a:schemeClr val="accent1"/>
-          </a:effectRef>
-          <a:fontRef idx="minor">
-            <a:schemeClr val="lt1"/>
-          </a:fontRef>
-        </p:style>
-        <p:txBody>
-          <a:bodyPr rtlCol="0" anchor="ctr"/>
-          <a:lstStyle/>
-          <a:p>
-            <a:pPr algn="ctr"/>
-            <a:endParaRPr lang="en-US"/>
-          </a:p>
-        </p:txBody>
-      </p:sp>
-      <p:sp useBgFill="1">
-        <p:nvSpPr>
-          <p:cNvPr id="17" name="Rectangle 16">
-            <a:extLst>
-              <a:ext uri="{FF2B5EF4-FFF2-40B4-BE49-F238E27FC236}">
-                <a16:creationId xmlns:a16="http://schemas.microsoft.com/office/drawing/2014/main" id="{C7EFAAB5-34A3-C2FC-70BA-7720CC8ADBAC}"/>
-              </a:ext>
-              <a:ext uri="{C183D7F6-B498-43B3-948B-1728B52AA6E4}">
-                <adec:decorative xmlns:adec="http://schemas.microsoft.com/office/drawing/2017/decorative" val="1"/>
-              </a:ext>
-            </a:extLst>
-          </p:cNvPr>
-          <p:cNvSpPr>
-            <a:spLocks noGrp="1" noRot="1" noChangeAspect="1" noMove="1" noResize="1" noEditPoints="1" noAdjustHandles="1" noChangeArrowheads="1" noChangeShapeType="1" noTextEdit="1"/>
-          </p:cNvSpPr>
-          <p:nvPr>
-            <p:extLst>
-              <p:ext uri="{386F3935-93C4-4BCD-93E2-E3B085C9AB24}">
-                <p16:designElem xmlns:p16="http://schemas.microsoft.com/office/powerpoint/2015/main" val="1"/>
-              </p:ext>
-            </p:extLst>
-          </p:nvPr>
-        </p:nvSpPr>
-        <p:spPr>
-          <a:xfrm>
-            <a:off x="0" y="0"/>
-            <a:ext cx="12192000" cy="6858000"/>
-          </a:xfrm>
-          <a:prstGeom prst="rect">
-            <a:avLst/>
-          </a:prstGeom>
-          <a:ln w="12700" cap="flat" cmpd="sng" algn="ctr">
-            <a:noFill/>
-            <a:prstDash val="solid"/>
-            <a:miter lim="800000"/>
-          </a:ln>
-          <a:effectLst/>
-        </p:spPr>
-        <p:style>
-          <a:lnRef idx="2">
-            <a:schemeClr val="accent1">
-              <a:shade val="15000"/>
             </a:schemeClr>
           </a:lnRef>
           <a:fillRef idx="1">
@@ -16485,182 +18081,10 @@
       </p:sp>
       <p:sp>
         <p:nvSpPr>
-          <p:cNvPr id="2" name="Title 1">
-            <a:extLst>
-              <a:ext uri="{FF2B5EF4-FFF2-40B4-BE49-F238E27FC236}">
-                <a16:creationId xmlns:a16="http://schemas.microsoft.com/office/drawing/2014/main" id="{88EC1CDD-FD2A-96E4-85A8-AD7825D21F55}"/>
-              </a:ext>
-            </a:extLst>
-          </p:cNvPr>
-          <p:cNvSpPr>
-            <a:spLocks noGrp="1"/>
-          </p:cNvSpPr>
-          <p:nvPr>
-            <p:ph type="title"/>
-          </p:nvPr>
-        </p:nvSpPr>
-        <p:spPr>
-          <a:xfrm>
-            <a:off x="521208" y="1211766"/>
-            <a:ext cx="7237052" cy="4727988"/>
-          </a:xfrm>
-        </p:spPr>
-        <p:txBody>
-          <a:bodyPr vert="horz" lIns="91440" tIns="45720" rIns="91440" bIns="45720" rtlCol="0" anchor="b">
-            <a:normAutofit/>
-          </a:bodyPr>
-          <a:lstStyle/>
-          <a:p>
-            <a:r>
-              <a:rPr lang="en-US" sz="7400"/>
-              <a:t>Big Data</a:t>
-            </a:r>
-          </a:p>
-        </p:txBody>
-      </p:sp>
-      <p:sp>
-        <p:nvSpPr>
-          <p:cNvPr id="19" name="Freeform: Shape 18">
-            <a:extLst>
-              <a:ext uri="{FF2B5EF4-FFF2-40B4-BE49-F238E27FC236}">
-                <a16:creationId xmlns:a16="http://schemas.microsoft.com/office/drawing/2014/main" id="{A8A44BC8-2508-4575-75F6-0ED3F11E721E}"/>
-              </a:ext>
-              <a:ext uri="{C183D7F6-B498-43B3-948B-1728B52AA6E4}">
-                <adec:decorative xmlns:adec="http://schemas.microsoft.com/office/drawing/2017/decorative" val="1"/>
-              </a:ext>
-            </a:extLst>
-          </p:cNvPr>
-          <p:cNvSpPr>
-            <a:spLocks noGrp="1" noRot="1" noChangeAspect="1" noMove="1" noResize="1" noEditPoints="1" noAdjustHandles="1" noChangeArrowheads="1" noChangeShapeType="1" noTextEdit="1"/>
-          </p:cNvSpPr>
-          <p:nvPr>
-            <p:extLst>
-              <p:ext uri="{386F3935-93C4-4BCD-93E2-E3B085C9AB24}">
-                <p16:designElem xmlns:p16="http://schemas.microsoft.com/office/powerpoint/2015/main" val="1"/>
-              </p:ext>
-            </p:extLst>
-          </p:nvPr>
-        </p:nvSpPr>
-        <p:spPr>
-          <a:xfrm>
-            <a:off x="517869" y="6208776"/>
-            <a:ext cx="7269480" cy="149279"/>
-          </a:xfrm>
-          <a:custGeom>
-            <a:avLst/>
-            <a:gdLst>
-              <a:gd name="connsiteX0" fmla="*/ 0 w 8085002"/>
-              <a:gd name="connsiteY0" fmla="*/ 0 h 149279"/>
-              <a:gd name="connsiteX1" fmla="*/ 8085002 w 8085002"/>
-              <a:gd name="connsiteY1" fmla="*/ 0 h 149279"/>
-              <a:gd name="connsiteX2" fmla="*/ 8085002 w 8085002"/>
-              <a:gd name="connsiteY2" fmla="*/ 149279 h 149279"/>
-              <a:gd name="connsiteX3" fmla="*/ 0 w 8085002"/>
-              <a:gd name="connsiteY3" fmla="*/ 149279 h 149279"/>
-            </a:gdLst>
-            <a:ahLst/>
-            <a:cxnLst>
-              <a:cxn ang="0">
-                <a:pos x="connsiteX0" y="connsiteY0"/>
-              </a:cxn>
-              <a:cxn ang="0">
-                <a:pos x="connsiteX1" y="connsiteY1"/>
-              </a:cxn>
-              <a:cxn ang="0">
-                <a:pos x="connsiteX2" y="connsiteY2"/>
-              </a:cxn>
-              <a:cxn ang="0">
-                <a:pos x="connsiteX3" y="connsiteY3"/>
-              </a:cxn>
-            </a:cxnLst>
-            <a:rect l="l" t="t" r="r" b="b"/>
-            <a:pathLst>
-              <a:path w="8085002" h="149279">
-                <a:moveTo>
-                  <a:pt x="0" y="0"/>
-                </a:moveTo>
-                <a:lnTo>
-                  <a:pt x="8085002" y="0"/>
-                </a:lnTo>
-                <a:lnTo>
-                  <a:pt x="8085002" y="149279"/>
-                </a:lnTo>
-                <a:lnTo>
-                  <a:pt x="0" y="149279"/>
-                </a:lnTo>
-                <a:close/>
-              </a:path>
-            </a:pathLst>
-          </a:custGeom>
-          <a:solidFill>
-            <a:schemeClr val="tx1"/>
-          </a:solidFill>
-          <a:ln>
-            <a:noFill/>
-          </a:ln>
-        </p:spPr>
-        <p:style>
-          <a:lnRef idx="2">
-            <a:schemeClr val="accent1">
-              <a:shade val="50000"/>
-            </a:schemeClr>
-          </a:lnRef>
-          <a:fillRef idx="1">
-            <a:schemeClr val="accent1"/>
-          </a:fillRef>
-          <a:effectRef idx="0">
-            <a:schemeClr val="accent1"/>
-          </a:effectRef>
-          <a:fontRef idx="minor">
-            <a:schemeClr val="lt1"/>
-          </a:fontRef>
-        </p:style>
-        <p:txBody>
-          <a:bodyPr wrap="square" rtlCol="0" anchor="ctr">
-            <a:noAutofit/>
-          </a:bodyPr>
-          <a:lstStyle/>
-          <a:p>
-            <a:pPr marL="0" marR="0" lvl="0" indent="0" algn="ctr" defTabSz="914400" rtl="0" eaLnBrk="1" fontAlgn="auto" latinLnBrk="0" hangingPunct="1">
-              <a:lnSpc>
-                <a:spcPct val="100000"/>
-              </a:lnSpc>
-              <a:spcBef>
-                <a:spcPts val="0"/>
-              </a:spcBef>
-              <a:spcAft>
-                <a:spcPts val="0"/>
-              </a:spcAft>
-              <a:buClrTx/>
-              <a:buSzTx/>
-              <a:buFontTx/>
-              <a:buNone/>
-              <a:tabLst/>
-              <a:defRPr/>
-            </a:pPr>
-            <a:endParaRPr kumimoji="0" lang="en-US" sz="1800" b="0" i="0" u="none" strike="noStrike" kern="1200" cap="none" spc="0" normalizeH="0" baseline="0" noProof="0">
-              <a:ln>
-                <a:noFill/>
-              </a:ln>
-              <a:solidFill>
-                <a:prstClr val="white"/>
-              </a:solidFill>
-              <a:effectLst/>
-              <a:uLnTx/>
-              <a:uFillTx/>
-              <a:latin typeface="Bierstadt"/>
-              <a:ea typeface="+mn-ea"/>
-              <a:cs typeface="+mn-cs"/>
-            </a:endParaRPr>
-          </a:p>
-        </p:txBody>
-      </p:sp>
-      <p:sp>
-        <p:nvSpPr>
           <p:cNvPr id="3" name="Slide Number Placeholder 2">
             <a:extLst>
               <a:ext uri="{FF2B5EF4-FFF2-40B4-BE49-F238E27FC236}">
-                <a16:creationId xmlns:a16="http://schemas.microsoft.com/office/drawing/2014/main" id="{DB64F268-9FE2-C905-17E3-19CD2E794942}"/>
+                <a16:creationId xmlns:a16="http://schemas.microsoft.com/office/drawing/2014/main" id="{F073C339-D6D0-4C7A-494E-5E487DACF6EC}"/>
               </a:ext>
             </a:extLst>
           </p:cNvPr>
@@ -16687,708 +18111,7 @@
     </p:spTree>
     <p:extLst>
       <p:ext uri="{BB962C8B-B14F-4D97-AF65-F5344CB8AC3E}">
-        <p14:creationId xmlns:p14="http://schemas.microsoft.com/office/powerpoint/2010/main" val="3636276435"/>
-      </p:ext>
-    </p:extLst>
-  </p:cSld>
-  <p:clrMapOvr>
-    <a:overrideClrMapping bg1="dk1" tx1="lt1" bg2="dk2" tx2="lt2" accent1="accent1" accent2="accent2" accent3="accent3" accent4="accent4" accent5="accent5" accent6="accent6" hlink="hlink" folHlink="folHlink"/>
-  </p:clrMapOvr>
-  <p:transition>
-    <p:fade/>
-  </p:transition>
-  <p:timing>
-    <p:tnLst>
-      <p:par>
-        <p:cTn id="1" dur="indefinite" restart="never" nodeType="tmRoot">
-          <p:childTnLst>
-            <p:seq concurrent="1" nextAc="seek">
-              <p:cTn id="2" dur="indefinite" nodeType="mainSeq">
-                <p:childTnLst>
-                  <p:par>
-                    <p:cTn id="3" fill="hold">
-                      <p:stCondLst>
-                        <p:cond delay="indefinite"/>
-                        <p:cond evt="onBegin" delay="0">
-                          <p:tn val="2"/>
-                        </p:cond>
-                      </p:stCondLst>
-                      <p:childTnLst>
-                        <p:par>
-                          <p:cTn id="4" fill="hold">
-                            <p:stCondLst>
-                              <p:cond delay="0"/>
-                            </p:stCondLst>
-                            <p:childTnLst>
-                              <p:par>
-                                <p:cTn id="5" presetID="10" presetClass="entr" presetSubtype="0" fill="hold" grpId="0" nodeType="withEffect">
-                                  <p:stCondLst>
-                                    <p:cond delay="500"/>
-                                  </p:stCondLst>
-                                  <p:iterate>
-                                    <p:tmPct val="10000"/>
-                                  </p:iterate>
-                                  <p:childTnLst>
-                                    <p:set>
-                                      <p:cBhvr>
-                                        <p:cTn id="6" dur="1" fill="hold">
-                                          <p:stCondLst>
-                                            <p:cond delay="0"/>
-                                          </p:stCondLst>
-                                        </p:cTn>
-                                        <p:tgtEl>
-                                          <p:spTgt spid="2"/>
-                                        </p:tgtEl>
-                                        <p:attrNameLst>
-                                          <p:attrName>style.visibility</p:attrName>
-                                        </p:attrNameLst>
-                                      </p:cBhvr>
-                                      <p:to>
-                                        <p:strVal val="visible"/>
-                                      </p:to>
-                                    </p:set>
-                                    <p:animEffect transition="in" filter="fade">
-                                      <p:cBhvr>
-                                        <p:cTn id="7" dur="700"/>
-                                        <p:tgtEl>
-                                          <p:spTgt spid="2"/>
-                                        </p:tgtEl>
-                                      </p:cBhvr>
-                                    </p:animEffect>
-                                  </p:childTnLst>
-                                </p:cTn>
-                              </p:par>
-                            </p:childTnLst>
-                          </p:cTn>
-                        </p:par>
-                      </p:childTnLst>
-                    </p:cTn>
-                  </p:par>
-                </p:childTnLst>
-              </p:cTn>
-              <p:prevCondLst>
-                <p:cond evt="onPrev" delay="0">
-                  <p:tgtEl>
-                    <p:sldTgt/>
-                  </p:tgtEl>
-                </p:cond>
-              </p:prevCondLst>
-              <p:nextCondLst>
-                <p:cond evt="onNext" delay="0">
-                  <p:tgtEl>
-                    <p:sldTgt/>
-                  </p:tgtEl>
-                </p:cond>
-              </p:nextCondLst>
-            </p:seq>
-          </p:childTnLst>
-        </p:cTn>
-      </p:par>
-    </p:tnLst>
-    <p:bldLst>
-      <p:bldP spid="2" grpId="0"/>
-    </p:bldLst>
-  </p:timing>
-</p:sld>
-</file>
-
-<file path=ppt/slides/slide9.xml><?xml version="1.0" encoding="utf-8"?>
-<p:sld xmlns:a="http://schemas.openxmlformats.org/drawingml/2006/main" xmlns:r="http://schemas.openxmlformats.org/officeDocument/2006/relationships" xmlns:p="http://schemas.openxmlformats.org/presentationml/2006/main">
-  <p:cSld>
-    <p:bg>
-      <p:bgPr>
-        <a:solidFill>
-          <a:schemeClr val="bg1"/>
-        </a:solidFill>
-        <a:effectLst/>
-      </p:bgPr>
-    </p:bg>
-    <p:spTree>
-      <p:nvGrpSpPr>
-        <p:cNvPr id="1" name=""/>
-        <p:cNvGrpSpPr/>
-        <p:nvPr/>
-      </p:nvGrpSpPr>
-      <p:grpSpPr>
-        <a:xfrm>
-          <a:off x="0" y="0"/>
-          <a:ext cx="0" cy="0"/>
-          <a:chOff x="0" y="0"/>
-          <a:chExt cx="0" cy="0"/>
-        </a:xfrm>
-      </p:grpSpPr>
-      <p:sp>
-        <p:nvSpPr>
-          <p:cNvPr id="10" name="Rectangle 9">
-            <a:extLst>
-              <a:ext uri="{FF2B5EF4-FFF2-40B4-BE49-F238E27FC236}">
-                <a16:creationId xmlns:a16="http://schemas.microsoft.com/office/drawing/2014/main" id="{ADE57300-C7FF-4578-99A0-42B0295B123C}"/>
-              </a:ext>
-              <a:ext uri="{C183D7F6-B498-43B3-948B-1728B52AA6E4}">
-                <adec:decorative xmlns:adec="http://schemas.microsoft.com/office/drawing/2017/decorative" val="1"/>
-              </a:ext>
-            </a:extLst>
-          </p:cNvPr>
-          <p:cNvSpPr>
-            <a:spLocks noGrp="1" noRot="1" noChangeAspect="1" noMove="1" noResize="1" noEditPoints="1" noAdjustHandles="1" noChangeArrowheads="1" noChangeShapeType="1" noTextEdit="1"/>
-          </p:cNvSpPr>
-          <p:nvPr>
-            <p:extLst>
-              <p:ext uri="{386F3935-93C4-4BCD-93E2-E3B085C9AB24}">
-                <p16:designElem xmlns:p16="http://schemas.microsoft.com/office/powerpoint/2015/main" val="1"/>
-              </p:ext>
-            </p:extLst>
-          </p:nvPr>
-        </p:nvSpPr>
-        <p:spPr>
-          <a:xfrm>
-            <a:off x="517870" y="508090"/>
-            <a:ext cx="5021183" cy="149279"/>
-          </a:xfrm>
-          <a:prstGeom prst="rect">
-            <a:avLst/>
-          </a:prstGeom>
-          <a:solidFill>
-            <a:schemeClr val="tx1"/>
-          </a:solidFill>
-          <a:ln>
-            <a:noFill/>
-          </a:ln>
-        </p:spPr>
-        <p:style>
-          <a:lnRef idx="2">
-            <a:schemeClr val="accent1">
-              <a:shade val="50000"/>
-            </a:schemeClr>
-          </a:lnRef>
-          <a:fillRef idx="1">
-            <a:schemeClr val="accent1"/>
-          </a:fillRef>
-          <a:effectRef idx="0">
-            <a:schemeClr val="accent1"/>
-          </a:effectRef>
-          <a:fontRef idx="minor">
-            <a:schemeClr val="lt1"/>
-          </a:fontRef>
-        </p:style>
-        <p:txBody>
-          <a:bodyPr rtlCol="0" anchor="ctr"/>
-          <a:lstStyle/>
-          <a:p>
-            <a:pPr algn="ctr"/>
-            <a:endParaRPr lang="en-US"/>
-          </a:p>
-        </p:txBody>
-      </p:sp>
-      <p:sp>
-        <p:nvSpPr>
-          <p:cNvPr id="12" name="Rectangle 11">
-            <a:extLst>
-              <a:ext uri="{FF2B5EF4-FFF2-40B4-BE49-F238E27FC236}">
-                <a16:creationId xmlns:a16="http://schemas.microsoft.com/office/drawing/2014/main" id="{DB8F8250-7A81-4A19-87AD-FFB2CE4E39A5}"/>
-              </a:ext>
-              <a:ext uri="{C183D7F6-B498-43B3-948B-1728B52AA6E4}">
-                <adec:decorative xmlns:adec="http://schemas.microsoft.com/office/drawing/2017/decorative" val="1"/>
-              </a:ext>
-            </a:extLst>
-          </p:cNvPr>
-          <p:cNvSpPr>
-            <a:spLocks noGrp="1" noRot="1" noChangeAspect="1" noMove="1" noResize="1" noEditPoints="1" noAdjustHandles="1" noChangeArrowheads="1" noChangeShapeType="1" noTextEdit="1"/>
-          </p:cNvSpPr>
-          <p:nvPr>
-            <p:extLst>
-              <p:ext uri="{386F3935-93C4-4BCD-93E2-E3B085C9AB24}">
-                <p16:designElem xmlns:p16="http://schemas.microsoft.com/office/powerpoint/2015/main" val="1"/>
-              </p:ext>
-            </p:extLst>
-          </p:nvPr>
-        </p:nvSpPr>
-        <p:spPr>
-          <a:xfrm>
-            <a:off x="517870" y="508090"/>
-            <a:ext cx="5021183" cy="149279"/>
-          </a:xfrm>
-          <a:prstGeom prst="rect">
-            <a:avLst/>
-          </a:prstGeom>
-          <a:solidFill>
-            <a:schemeClr val="tx1"/>
-          </a:solidFill>
-          <a:ln>
-            <a:noFill/>
-          </a:ln>
-        </p:spPr>
-        <p:style>
-          <a:lnRef idx="2">
-            <a:schemeClr val="accent1">
-              <a:shade val="50000"/>
-            </a:schemeClr>
-          </a:lnRef>
-          <a:fillRef idx="1">
-            <a:schemeClr val="accent1"/>
-          </a:fillRef>
-          <a:effectRef idx="0">
-            <a:schemeClr val="accent1"/>
-          </a:effectRef>
-          <a:fontRef idx="minor">
-            <a:schemeClr val="lt1"/>
-          </a:fontRef>
-        </p:style>
-        <p:txBody>
-          <a:bodyPr rtlCol="0" anchor="ctr"/>
-          <a:lstStyle/>
-          <a:p>
-            <a:pPr algn="ctr"/>
-            <a:endParaRPr lang="en-US"/>
-          </a:p>
-        </p:txBody>
-      </p:sp>
-      <p:sp>
-        <p:nvSpPr>
-          <p:cNvPr id="14" name="Rectangle 13">
-            <a:extLst>
-              <a:ext uri="{FF2B5EF4-FFF2-40B4-BE49-F238E27FC236}">
-                <a16:creationId xmlns:a16="http://schemas.microsoft.com/office/drawing/2014/main" id="{499F38FC-2DEA-2647-C409-EF75720C1017}"/>
-              </a:ext>
-              <a:ext uri="{C183D7F6-B498-43B3-948B-1728B52AA6E4}">
-                <adec:decorative xmlns:adec="http://schemas.microsoft.com/office/drawing/2017/decorative" val="1"/>
-              </a:ext>
-            </a:extLst>
-          </p:cNvPr>
-          <p:cNvSpPr>
-            <a:spLocks noGrp="1" noRot="1" noChangeAspect="1" noMove="1" noResize="1" noEditPoints="1" noAdjustHandles="1" noChangeArrowheads="1" noChangeShapeType="1" noTextEdit="1"/>
-          </p:cNvSpPr>
-          <p:nvPr>
-            <p:extLst>
-              <p:ext uri="{386F3935-93C4-4BCD-93E2-E3B085C9AB24}">
-                <p16:designElem xmlns:p16="http://schemas.microsoft.com/office/powerpoint/2015/main" val="1"/>
-              </p:ext>
-            </p:extLst>
-          </p:nvPr>
-        </p:nvSpPr>
-        <p:spPr>
-          <a:xfrm>
-            <a:off x="517870" y="508090"/>
-            <a:ext cx="5021183" cy="149279"/>
-          </a:xfrm>
-          <a:prstGeom prst="rect">
-            <a:avLst/>
-          </a:prstGeom>
-          <a:solidFill>
-            <a:schemeClr val="tx1"/>
-          </a:solidFill>
-          <a:ln>
-            <a:noFill/>
-          </a:ln>
-        </p:spPr>
-        <p:style>
-          <a:lnRef idx="2">
-            <a:schemeClr val="accent1">
-              <a:shade val="50000"/>
-            </a:schemeClr>
-          </a:lnRef>
-          <a:fillRef idx="1">
-            <a:schemeClr val="accent1"/>
-          </a:fillRef>
-          <a:effectRef idx="0">
-            <a:schemeClr val="accent1"/>
-          </a:effectRef>
-          <a:fontRef idx="minor">
-            <a:schemeClr val="lt1"/>
-          </a:fontRef>
-        </p:style>
-        <p:txBody>
-          <a:bodyPr rtlCol="0" anchor="ctr"/>
-          <a:lstStyle/>
-          <a:p>
-            <a:pPr algn="ctr"/>
-            <a:endParaRPr lang="en-US"/>
-          </a:p>
-        </p:txBody>
-      </p:sp>
-      <p:sp useBgFill="1">
-        <p:nvSpPr>
-          <p:cNvPr id="16" name="Rectangle 15">
-            <a:extLst>
-              <a:ext uri="{FF2B5EF4-FFF2-40B4-BE49-F238E27FC236}">
-                <a16:creationId xmlns:a16="http://schemas.microsoft.com/office/drawing/2014/main" id="{0EC38958-9A69-239A-BA79-2AEC73345F4B}"/>
-              </a:ext>
-              <a:ext uri="{C183D7F6-B498-43B3-948B-1728B52AA6E4}">
-                <adec:decorative xmlns:adec="http://schemas.microsoft.com/office/drawing/2017/decorative" val="1"/>
-              </a:ext>
-            </a:extLst>
-          </p:cNvPr>
-          <p:cNvSpPr>
-            <a:spLocks noGrp="1" noRot="1" noChangeAspect="1" noMove="1" noResize="1" noEditPoints="1" noAdjustHandles="1" noChangeArrowheads="1" noChangeShapeType="1" noTextEdit="1"/>
-          </p:cNvSpPr>
-          <p:nvPr>
-            <p:extLst>
-              <p:ext uri="{386F3935-93C4-4BCD-93E2-E3B085C9AB24}">
-                <p16:designElem xmlns:p16="http://schemas.microsoft.com/office/powerpoint/2015/main" val="1"/>
-              </p:ext>
-            </p:extLst>
-          </p:nvPr>
-        </p:nvSpPr>
-        <p:spPr>
-          <a:xfrm>
-            <a:off x="0" y="0"/>
-            <a:ext cx="12188952" cy="6857995"/>
-          </a:xfrm>
-          <a:prstGeom prst="rect">
-            <a:avLst/>
-          </a:prstGeom>
-          <a:ln>
-            <a:noFill/>
-          </a:ln>
-        </p:spPr>
-        <p:style>
-          <a:lnRef idx="2">
-            <a:schemeClr val="accent1">
-              <a:shade val="50000"/>
-            </a:schemeClr>
-          </a:lnRef>
-          <a:fillRef idx="1">
-            <a:schemeClr val="accent1"/>
-          </a:fillRef>
-          <a:effectRef idx="0">
-            <a:schemeClr val="accent1"/>
-          </a:effectRef>
-          <a:fontRef idx="minor">
-            <a:schemeClr val="lt1"/>
-          </a:fontRef>
-        </p:style>
-        <p:txBody>
-          <a:bodyPr rtlCol="0" anchor="ctr"/>
-          <a:lstStyle/>
-          <a:p>
-            <a:pPr marL="0" marR="0" lvl="0" indent="0" algn="ctr" defTabSz="914400" rtl="0" eaLnBrk="1" fontAlgn="auto" latinLnBrk="0" hangingPunct="1">
-              <a:lnSpc>
-                <a:spcPct val="100000"/>
-              </a:lnSpc>
-              <a:spcBef>
-                <a:spcPts val="0"/>
-              </a:spcBef>
-              <a:spcAft>
-                <a:spcPts val="0"/>
-              </a:spcAft>
-              <a:buClrTx/>
-              <a:buSzTx/>
-              <a:buFontTx/>
-              <a:buNone/>
-              <a:tabLst/>
-              <a:defRPr/>
-            </a:pPr>
-            <a:endParaRPr kumimoji="0" lang="en-US" sz="1800" b="0" i="0" u="none" strike="noStrike" kern="1200" cap="none" spc="0" normalizeH="0" baseline="0" noProof="0" dirty="0">
-              <a:ln>
-                <a:noFill/>
-              </a:ln>
-              <a:solidFill>
-                <a:prstClr val="white"/>
-              </a:solidFill>
-              <a:effectLst/>
-              <a:uLnTx/>
-              <a:uFillTx/>
-              <a:latin typeface="Bierstadt"/>
-              <a:ea typeface="+mn-ea"/>
-              <a:cs typeface="+mn-cs"/>
-            </a:endParaRPr>
-          </a:p>
-        </p:txBody>
-      </p:sp>
-      <p:pic>
-        <p:nvPicPr>
-          <p:cNvPr id="5" name="Content Placeholder 4" descr="Big Data banner - abstract background technology image, concept for big data analytics, data science, cloud big data. 3d rendered image isolated on white background.">
-            <a:extLst>
-              <a:ext uri="{FF2B5EF4-FFF2-40B4-BE49-F238E27FC236}">
-                <a16:creationId xmlns:a16="http://schemas.microsoft.com/office/drawing/2014/main" id="{5927F1AB-672D-4FFD-830E-808308B6F26A}"/>
-              </a:ext>
-            </a:extLst>
-          </p:cNvPr>
-          <p:cNvPicPr>
-            <a:picLocks noGrp="1" noChangeAspect="1"/>
-          </p:cNvPicPr>
-          <p:nvPr>
-            <p:ph sz="half" idx="1"/>
-          </p:nvPr>
-        </p:nvPicPr>
-        <p:blipFill>
-          <a:blip r:embed="rId3"/>
-          <a:srcRect l="18352" r="26757" b="1"/>
-          <a:stretch/>
-        </p:blipFill>
-        <p:spPr>
-          <a:xfrm>
-            <a:off x="517868" y="508090"/>
-            <a:ext cx="5705856" cy="5846990"/>
-          </a:xfrm>
-          <a:prstGeom prst="rect">
-            <a:avLst/>
-          </a:prstGeom>
-        </p:spPr>
-      </p:pic>
-      <p:sp>
-        <p:nvSpPr>
-          <p:cNvPr id="2" name="Title 1">
-            <a:extLst>
-              <a:ext uri="{FF2B5EF4-FFF2-40B4-BE49-F238E27FC236}">
-                <a16:creationId xmlns:a16="http://schemas.microsoft.com/office/drawing/2014/main" id="{C565D3F9-3B71-9465-D5F3-96323EF36CB4}"/>
-              </a:ext>
-            </a:extLst>
-          </p:cNvPr>
-          <p:cNvSpPr>
-            <a:spLocks noGrp="1"/>
-          </p:cNvSpPr>
-          <p:nvPr>
-            <p:ph type="title"/>
-          </p:nvPr>
-        </p:nvSpPr>
-        <p:spPr>
-          <a:xfrm>
-            <a:off x="7001547" y="976160"/>
-            <a:ext cx="4822899" cy="1463040"/>
-          </a:xfrm>
-        </p:spPr>
-        <p:txBody>
-          <a:bodyPr vert="horz" lIns="91440" tIns="45720" rIns="91440" bIns="45720" rtlCol="0" anchor="t">
-            <a:normAutofit/>
-          </a:bodyPr>
-          <a:lstStyle/>
-          <a:p>
-            <a:r>
-              <a:rPr lang="en-US" sz="4400"/>
-              <a:t>Definition of Big Data</a:t>
-            </a:r>
-          </a:p>
-        </p:txBody>
-      </p:sp>
-      <p:sp>
-        <p:nvSpPr>
-          <p:cNvPr id="4" name="Content Placeholder 3">
-            <a:extLst>
-              <a:ext uri="{FF2B5EF4-FFF2-40B4-BE49-F238E27FC236}">
-                <a16:creationId xmlns:a16="http://schemas.microsoft.com/office/drawing/2014/main" id="{A0E8489E-D7F6-C2B5-86C8-916CA67CB7EA}"/>
-              </a:ext>
-            </a:extLst>
-          </p:cNvPr>
-          <p:cNvSpPr>
-            <a:spLocks noGrp="1"/>
-          </p:cNvSpPr>
-          <p:nvPr>
-            <p:ph sz="half" idx="2"/>
-            <p:extLst>
-              <p:ext uri="{E7BDC344-281C-4309-B0C6-D0EE65EED2A8}">
-                <p202:designPr xmlns:p202="http://schemas.microsoft.com/office/powerpoint/2020/02/main">
-                  <p202:designTagLst>
-                    <p202:designTag name="ARCH:1:CLS" val="InformationBlock"/>
-                    <p202:designTag name="ARCH:1:VSVAR" val="TitledTextBox"/>
-                  </p202:designTagLst>
-                </p202:designPr>
-              </p:ext>
-            </p:extLst>
-          </p:nvPr>
-        </p:nvSpPr>
-        <p:spPr>
-          <a:xfrm>
-            <a:off x="7001548" y="2578608"/>
-            <a:ext cx="4672584" cy="3767328"/>
-          </a:xfrm>
-        </p:spPr>
-        <p:txBody>
-          <a:bodyPr>
-            <a:normAutofit/>
-          </a:bodyPr>
-          <a:lstStyle/>
-          <a:p>
-            <a:pPr marL="0" indent="0">
-              <a:spcBef>
-                <a:spcPts val="2500"/>
-              </a:spcBef>
-              <a:buNone/>
-            </a:pPr>
-            <a:endParaRPr lang="en-US" sz="1400" b="1"/>
-          </a:p>
-          <a:p>
-            <a:pPr marL="0" lvl="1" indent="0">
-              <a:buNone/>
-            </a:pPr>
-            <a:r>
-              <a:rPr lang="en-US" sz="1400"/>
-              <a:t>Big data is defined by the four Vs: volume, velocity, variety, and veracity. Volume refers to the sheer size of data, velocity refers to the speed at which data is generated, variety refers to the different types of data, and veracity refers to the accuracy and reliability of data.</a:t>
-            </a:r>
-            <a:endParaRPr lang="en-IN" sz="1400"/>
-          </a:p>
-        </p:txBody>
-      </p:sp>
-      <p:sp>
-        <p:nvSpPr>
-          <p:cNvPr id="18" name="Freeform: Shape 17">
-            <a:extLst>
-              <a:ext uri="{FF2B5EF4-FFF2-40B4-BE49-F238E27FC236}">
-                <a16:creationId xmlns:a16="http://schemas.microsoft.com/office/drawing/2014/main" id="{6EC109E5-0396-8968-4F42-DFEC280363B6}"/>
-              </a:ext>
-              <a:ext uri="{C183D7F6-B498-43B3-948B-1728B52AA6E4}">
-                <adec:decorative xmlns:adec="http://schemas.microsoft.com/office/drawing/2017/decorative" val="1"/>
-              </a:ext>
-            </a:extLst>
-          </p:cNvPr>
-          <p:cNvSpPr>
-            <a:spLocks noGrp="1" noRot="1" noChangeAspect="1" noMove="1" noResize="1" noEditPoints="1" noAdjustHandles="1" noChangeArrowheads="1" noChangeShapeType="1" noTextEdit="1"/>
-          </p:cNvSpPr>
-          <p:nvPr>
-            <p:extLst>
-              <p:ext uri="{386F3935-93C4-4BCD-93E2-E3B085C9AB24}">
-                <p16:designElem xmlns:p16="http://schemas.microsoft.com/office/powerpoint/2015/main" val="1"/>
-              </p:ext>
-            </p:extLst>
-          </p:nvPr>
-        </p:nvSpPr>
-        <p:spPr>
-          <a:xfrm>
-            <a:off x="7016407" y="508090"/>
-            <a:ext cx="4660733" cy="149279"/>
-          </a:xfrm>
-          <a:custGeom>
-            <a:avLst/>
-            <a:gdLst>
-              <a:gd name="connsiteX0" fmla="*/ 0 w 6090847"/>
-              <a:gd name="connsiteY0" fmla="*/ 0 h 149279"/>
-              <a:gd name="connsiteX1" fmla="*/ 6090847 w 6090847"/>
-              <a:gd name="connsiteY1" fmla="*/ 0 h 149279"/>
-              <a:gd name="connsiteX2" fmla="*/ 6090847 w 6090847"/>
-              <a:gd name="connsiteY2" fmla="*/ 149279 h 149279"/>
-              <a:gd name="connsiteX3" fmla="*/ 0 w 6090847"/>
-              <a:gd name="connsiteY3" fmla="*/ 149279 h 149279"/>
-            </a:gdLst>
-            <a:ahLst/>
-            <a:cxnLst>
-              <a:cxn ang="0">
-                <a:pos x="connsiteX0" y="connsiteY0"/>
-              </a:cxn>
-              <a:cxn ang="0">
-                <a:pos x="connsiteX1" y="connsiteY1"/>
-              </a:cxn>
-              <a:cxn ang="0">
-                <a:pos x="connsiteX2" y="connsiteY2"/>
-              </a:cxn>
-              <a:cxn ang="0">
-                <a:pos x="connsiteX3" y="connsiteY3"/>
-              </a:cxn>
-            </a:cxnLst>
-            <a:rect l="l" t="t" r="r" b="b"/>
-            <a:pathLst>
-              <a:path w="6090847" h="149279">
-                <a:moveTo>
-                  <a:pt x="0" y="0"/>
-                </a:moveTo>
-                <a:lnTo>
-                  <a:pt x="6090847" y="0"/>
-                </a:lnTo>
-                <a:lnTo>
-                  <a:pt x="6090847" y="149279"/>
-                </a:lnTo>
-                <a:lnTo>
-                  <a:pt x="0" y="149279"/>
-                </a:lnTo>
-                <a:close/>
-              </a:path>
-            </a:pathLst>
-          </a:custGeom>
-          <a:solidFill>
-            <a:schemeClr val="tx1"/>
-          </a:solidFill>
-          <a:ln>
-            <a:noFill/>
-          </a:ln>
-        </p:spPr>
-        <p:style>
-          <a:lnRef idx="2">
-            <a:schemeClr val="accent1">
-              <a:shade val="50000"/>
-            </a:schemeClr>
-          </a:lnRef>
-          <a:fillRef idx="1">
-            <a:schemeClr val="accent1"/>
-          </a:fillRef>
-          <a:effectRef idx="0">
-            <a:schemeClr val="accent1"/>
-          </a:effectRef>
-          <a:fontRef idx="minor">
-            <a:schemeClr val="lt1"/>
-          </a:fontRef>
-        </p:style>
-        <p:txBody>
-          <a:bodyPr wrap="square" rtlCol="0" anchor="ctr">
-            <a:noAutofit/>
-          </a:bodyPr>
-          <a:lstStyle/>
-          <a:p>
-            <a:pPr marL="0" marR="0" lvl="0" indent="0" algn="ctr" defTabSz="914400" rtl="0" eaLnBrk="1" fontAlgn="auto" latinLnBrk="0" hangingPunct="1">
-              <a:lnSpc>
-                <a:spcPct val="100000"/>
-              </a:lnSpc>
-              <a:spcBef>
-                <a:spcPts val="0"/>
-              </a:spcBef>
-              <a:spcAft>
-                <a:spcPts val="0"/>
-              </a:spcAft>
-              <a:buClrTx/>
-              <a:buSzTx/>
-              <a:buFontTx/>
-              <a:buNone/>
-              <a:tabLst/>
-              <a:defRPr/>
-            </a:pPr>
-            <a:endParaRPr kumimoji="0" lang="en-US" sz="1800" b="0" i="0" u="none" strike="noStrike" kern="1200" cap="none" spc="0" normalizeH="0" baseline="0" noProof="0">
-              <a:ln>
-                <a:noFill/>
-              </a:ln>
-              <a:solidFill>
-                <a:prstClr val="white"/>
-              </a:solidFill>
-              <a:effectLst/>
-              <a:uLnTx/>
-              <a:uFillTx/>
-              <a:latin typeface="Bierstadt"/>
-              <a:ea typeface="+mn-ea"/>
-              <a:cs typeface="+mn-cs"/>
-            </a:endParaRPr>
-          </a:p>
-        </p:txBody>
-      </p:sp>
-      <p:sp>
-        <p:nvSpPr>
-          <p:cNvPr id="3" name="Slide Number Placeholder 2">
-            <a:extLst>
-              <a:ext uri="{FF2B5EF4-FFF2-40B4-BE49-F238E27FC236}">
-                <a16:creationId xmlns:a16="http://schemas.microsoft.com/office/drawing/2014/main" id="{8D6AC438-0AB1-751A-95B3-15672E99FD8B}"/>
-              </a:ext>
-            </a:extLst>
-          </p:cNvPr>
-          <p:cNvSpPr>
-            <a:spLocks noGrp="1"/>
-          </p:cNvSpPr>
-          <p:nvPr>
-            <p:ph type="sldNum" sz="quarter" idx="12"/>
-          </p:nvPr>
-        </p:nvSpPr>
-        <p:spPr/>
-        <p:txBody>
-          <a:bodyPr/>
-          <a:lstStyle/>
-          <a:p>
-            <a:fld id="{DFDF98CC-160E-494C-8C3C-8CDC5FA257DE}" type="slidenum">
-              <a:rPr lang="en-US" smtClean="0"/>
-              <a:t>9</a:t>
-            </a:fld>
-            <a:endParaRPr lang="en-US"/>
-          </a:p>
-        </p:txBody>
-      </p:sp>
-    </p:spTree>
-    <p:extLst>
-      <p:ext uri="{BB962C8B-B14F-4D97-AF65-F5344CB8AC3E}">
-        <p14:creationId xmlns:p14="http://schemas.microsoft.com/office/powerpoint/2010/main" val="3491814897"/>
+        <p14:creationId xmlns:p14="http://schemas.microsoft.com/office/powerpoint/2010/main" val="3022707596"/>
       </p:ext>
     </p:extLst>
   </p:cSld>
@@ -17534,6 +18257,747 @@
     </p:tnLst>
     <p:bldLst>
       <p:bldP spid="4" grpId="0"/>
+    </p:bldLst>
+  </p:timing>
+</p:sld>
+</file>
+
+<file path=ppt/slides/slide9.xml><?xml version="1.0" encoding="utf-8"?>
+<p:sld xmlns:a="http://schemas.openxmlformats.org/drawingml/2006/main" xmlns:r="http://schemas.openxmlformats.org/officeDocument/2006/relationships" xmlns:p="http://schemas.openxmlformats.org/presentationml/2006/main">
+  <p:cSld>
+    <p:bg>
+      <p:bgPr>
+        <a:solidFill>
+          <a:schemeClr val="bg1"/>
+        </a:solidFill>
+        <a:effectLst/>
+      </p:bgPr>
+    </p:bg>
+    <p:spTree>
+      <p:nvGrpSpPr>
+        <p:cNvPr id="1" name=""/>
+        <p:cNvGrpSpPr/>
+        <p:nvPr/>
+      </p:nvGrpSpPr>
+      <p:grpSpPr>
+        <a:xfrm>
+          <a:off x="0" y="0"/>
+          <a:ext cx="0" cy="0"/>
+          <a:chOff x="0" y="0"/>
+          <a:chExt cx="0" cy="0"/>
+        </a:xfrm>
+      </p:grpSpPr>
+      <p:sp>
+        <p:nvSpPr>
+          <p:cNvPr id="7" name="Rectangle 6">
+            <a:extLst>
+              <a:ext uri="{FF2B5EF4-FFF2-40B4-BE49-F238E27FC236}">
+                <a16:creationId xmlns:a16="http://schemas.microsoft.com/office/drawing/2014/main" id="{ADE57300-C7FF-4578-99A0-42B0295B123C}"/>
+              </a:ext>
+              <a:ext uri="{C183D7F6-B498-43B3-948B-1728B52AA6E4}">
+                <adec:decorative xmlns:adec="http://schemas.microsoft.com/office/drawing/2017/decorative" val="1"/>
+              </a:ext>
+            </a:extLst>
+          </p:cNvPr>
+          <p:cNvSpPr>
+            <a:spLocks noGrp="1" noRot="1" noChangeAspect="1" noMove="1" noResize="1" noEditPoints="1" noAdjustHandles="1" noChangeArrowheads="1" noChangeShapeType="1" noTextEdit="1"/>
+          </p:cNvSpPr>
+          <p:nvPr>
+            <p:extLst>
+              <p:ext uri="{386F3935-93C4-4BCD-93E2-E3B085C9AB24}">
+                <p16:designElem xmlns:p16="http://schemas.microsoft.com/office/powerpoint/2015/main" val="1"/>
+              </p:ext>
+            </p:extLst>
+          </p:nvPr>
+        </p:nvSpPr>
+        <p:spPr>
+          <a:xfrm>
+            <a:off x="517870" y="508090"/>
+            <a:ext cx="5021183" cy="149279"/>
+          </a:xfrm>
+          <a:prstGeom prst="rect">
+            <a:avLst/>
+          </a:prstGeom>
+          <a:solidFill>
+            <a:schemeClr val="tx1"/>
+          </a:solidFill>
+          <a:ln>
+            <a:noFill/>
+          </a:ln>
+        </p:spPr>
+        <p:style>
+          <a:lnRef idx="2">
+            <a:schemeClr val="accent1">
+              <a:shade val="50000"/>
+            </a:schemeClr>
+          </a:lnRef>
+          <a:fillRef idx="1">
+            <a:schemeClr val="accent1"/>
+          </a:fillRef>
+          <a:effectRef idx="0">
+            <a:schemeClr val="accent1"/>
+          </a:effectRef>
+          <a:fontRef idx="minor">
+            <a:schemeClr val="lt1"/>
+          </a:fontRef>
+        </p:style>
+        <p:txBody>
+          <a:bodyPr rtlCol="0" anchor="ctr"/>
+          <a:lstStyle/>
+          <a:p>
+            <a:pPr algn="ctr"/>
+            <a:endParaRPr lang="en-US"/>
+          </a:p>
+        </p:txBody>
+      </p:sp>
+      <p:sp>
+        <p:nvSpPr>
+          <p:cNvPr id="9" name="Rectangle 8">
+            <a:extLst>
+              <a:ext uri="{FF2B5EF4-FFF2-40B4-BE49-F238E27FC236}">
+                <a16:creationId xmlns:a16="http://schemas.microsoft.com/office/drawing/2014/main" id="{DB8F8250-7A81-4A19-87AD-FFB2CE4E39A5}"/>
+              </a:ext>
+              <a:ext uri="{C183D7F6-B498-43B3-948B-1728B52AA6E4}">
+                <adec:decorative xmlns:adec="http://schemas.microsoft.com/office/drawing/2017/decorative" val="1"/>
+              </a:ext>
+            </a:extLst>
+          </p:cNvPr>
+          <p:cNvSpPr>
+            <a:spLocks noGrp="1" noRot="1" noChangeAspect="1" noMove="1" noResize="1" noEditPoints="1" noAdjustHandles="1" noChangeArrowheads="1" noChangeShapeType="1" noTextEdit="1"/>
+          </p:cNvSpPr>
+          <p:nvPr>
+            <p:extLst>
+              <p:ext uri="{386F3935-93C4-4BCD-93E2-E3B085C9AB24}">
+                <p16:designElem xmlns:p16="http://schemas.microsoft.com/office/powerpoint/2015/main" val="1"/>
+              </p:ext>
+            </p:extLst>
+          </p:nvPr>
+        </p:nvSpPr>
+        <p:spPr>
+          <a:xfrm>
+            <a:off x="517870" y="508090"/>
+            <a:ext cx="5021183" cy="149279"/>
+          </a:xfrm>
+          <a:prstGeom prst="rect">
+            <a:avLst/>
+          </a:prstGeom>
+          <a:solidFill>
+            <a:schemeClr val="tx1"/>
+          </a:solidFill>
+          <a:ln>
+            <a:noFill/>
+          </a:ln>
+        </p:spPr>
+        <p:style>
+          <a:lnRef idx="2">
+            <a:schemeClr val="accent1">
+              <a:shade val="50000"/>
+            </a:schemeClr>
+          </a:lnRef>
+          <a:fillRef idx="1">
+            <a:schemeClr val="accent1"/>
+          </a:fillRef>
+          <a:effectRef idx="0">
+            <a:schemeClr val="accent1"/>
+          </a:effectRef>
+          <a:fontRef idx="minor">
+            <a:schemeClr val="lt1"/>
+          </a:fontRef>
+        </p:style>
+        <p:txBody>
+          <a:bodyPr rtlCol="0" anchor="ctr"/>
+          <a:lstStyle/>
+          <a:p>
+            <a:pPr algn="ctr"/>
+            <a:endParaRPr lang="en-US"/>
+          </a:p>
+        </p:txBody>
+      </p:sp>
+      <p:sp>
+        <p:nvSpPr>
+          <p:cNvPr id="11" name="Rectangle 10">
+            <a:extLst>
+              <a:ext uri="{FF2B5EF4-FFF2-40B4-BE49-F238E27FC236}">
+                <a16:creationId xmlns:a16="http://schemas.microsoft.com/office/drawing/2014/main" id="{499F38FC-2DEA-2647-C409-EF75720C1017}"/>
+              </a:ext>
+              <a:ext uri="{C183D7F6-B498-43B3-948B-1728B52AA6E4}">
+                <adec:decorative xmlns:adec="http://schemas.microsoft.com/office/drawing/2017/decorative" val="1"/>
+              </a:ext>
+            </a:extLst>
+          </p:cNvPr>
+          <p:cNvSpPr>
+            <a:spLocks noGrp="1" noRot="1" noChangeAspect="1" noMove="1" noResize="1" noEditPoints="1" noAdjustHandles="1" noChangeArrowheads="1" noChangeShapeType="1" noTextEdit="1"/>
+          </p:cNvSpPr>
+          <p:nvPr>
+            <p:extLst>
+              <p:ext uri="{386F3935-93C4-4BCD-93E2-E3B085C9AB24}">
+                <p16:designElem xmlns:p16="http://schemas.microsoft.com/office/powerpoint/2015/main" val="1"/>
+              </p:ext>
+            </p:extLst>
+          </p:nvPr>
+        </p:nvSpPr>
+        <p:spPr>
+          <a:xfrm>
+            <a:off x="517870" y="508090"/>
+            <a:ext cx="5021183" cy="149279"/>
+          </a:xfrm>
+          <a:prstGeom prst="rect">
+            <a:avLst/>
+          </a:prstGeom>
+          <a:solidFill>
+            <a:schemeClr val="tx1"/>
+          </a:solidFill>
+          <a:ln>
+            <a:noFill/>
+          </a:ln>
+        </p:spPr>
+        <p:style>
+          <a:lnRef idx="2">
+            <a:schemeClr val="accent1">
+              <a:shade val="50000"/>
+            </a:schemeClr>
+          </a:lnRef>
+          <a:fillRef idx="1">
+            <a:schemeClr val="accent1"/>
+          </a:fillRef>
+          <a:effectRef idx="0">
+            <a:schemeClr val="accent1"/>
+          </a:effectRef>
+          <a:fontRef idx="minor">
+            <a:schemeClr val="lt1"/>
+          </a:fontRef>
+        </p:style>
+        <p:txBody>
+          <a:bodyPr rtlCol="0" anchor="ctr"/>
+          <a:lstStyle/>
+          <a:p>
+            <a:pPr algn="ctr"/>
+            <a:endParaRPr lang="en-US"/>
+          </a:p>
+        </p:txBody>
+      </p:sp>
+      <p:sp>
+        <p:nvSpPr>
+          <p:cNvPr id="13" name="Rectangle 12">
+            <a:extLst>
+              <a:ext uri="{FF2B5EF4-FFF2-40B4-BE49-F238E27FC236}">
+                <a16:creationId xmlns:a16="http://schemas.microsoft.com/office/drawing/2014/main" id="{26E9A97B-1917-9176-B980-E15E8CBDB12F}"/>
+              </a:ext>
+              <a:ext uri="{C183D7F6-B498-43B3-948B-1728B52AA6E4}">
+                <adec:decorative xmlns:adec="http://schemas.microsoft.com/office/drawing/2017/decorative" val="1"/>
+              </a:ext>
+            </a:extLst>
+          </p:cNvPr>
+          <p:cNvSpPr>
+            <a:spLocks noGrp="1" noRot="1" noChangeAspect="1" noMove="1" noResize="1" noEditPoints="1" noAdjustHandles="1" noChangeArrowheads="1" noChangeShapeType="1" noTextEdit="1"/>
+          </p:cNvSpPr>
+          <p:nvPr>
+            <p:extLst>
+              <p:ext uri="{386F3935-93C4-4BCD-93E2-E3B085C9AB24}">
+                <p16:designElem xmlns:p16="http://schemas.microsoft.com/office/powerpoint/2015/main" val="1"/>
+              </p:ext>
+            </p:extLst>
+          </p:nvPr>
+        </p:nvSpPr>
+        <p:spPr>
+          <a:xfrm>
+            <a:off x="517870" y="508090"/>
+            <a:ext cx="5021183" cy="149279"/>
+          </a:xfrm>
+          <a:prstGeom prst="rect">
+            <a:avLst/>
+          </a:prstGeom>
+          <a:solidFill>
+            <a:schemeClr val="tx1"/>
+          </a:solidFill>
+          <a:ln>
+            <a:noFill/>
+          </a:ln>
+        </p:spPr>
+        <p:style>
+          <a:lnRef idx="2">
+            <a:schemeClr val="accent1">
+              <a:shade val="50000"/>
+            </a:schemeClr>
+          </a:lnRef>
+          <a:fillRef idx="1">
+            <a:schemeClr val="accent1"/>
+          </a:fillRef>
+          <a:effectRef idx="0">
+            <a:schemeClr val="accent1"/>
+          </a:effectRef>
+          <a:fontRef idx="minor">
+            <a:schemeClr val="lt1"/>
+          </a:fontRef>
+        </p:style>
+        <p:txBody>
+          <a:bodyPr rtlCol="0" anchor="ctr"/>
+          <a:lstStyle/>
+          <a:p>
+            <a:pPr algn="ctr"/>
+            <a:endParaRPr lang="en-US"/>
+          </a:p>
+        </p:txBody>
+      </p:sp>
+      <p:sp>
+        <p:nvSpPr>
+          <p:cNvPr id="15" name="Rectangle 14">
+            <a:extLst>
+              <a:ext uri="{FF2B5EF4-FFF2-40B4-BE49-F238E27FC236}">
+                <a16:creationId xmlns:a16="http://schemas.microsoft.com/office/drawing/2014/main" id="{F3FF94B3-6D3E-44FE-BB02-A9027C0003C7}"/>
+              </a:ext>
+              <a:ext uri="{C183D7F6-B498-43B3-948B-1728B52AA6E4}">
+                <adec:decorative xmlns:adec="http://schemas.microsoft.com/office/drawing/2017/decorative" val="1"/>
+              </a:ext>
+            </a:extLst>
+          </p:cNvPr>
+          <p:cNvSpPr>
+            <a:spLocks noGrp="1" noRot="1" noChangeAspect="1" noMove="1" noResize="1" noEditPoints="1" noAdjustHandles="1" noChangeArrowheads="1" noChangeShapeType="1" noTextEdit="1"/>
+          </p:cNvSpPr>
+          <p:nvPr>
+            <p:extLst>
+              <p:ext uri="{386F3935-93C4-4BCD-93E2-E3B085C9AB24}">
+                <p16:designElem xmlns:p16="http://schemas.microsoft.com/office/powerpoint/2015/main" val="1"/>
+              </p:ext>
+            </p:extLst>
+          </p:nvPr>
+        </p:nvSpPr>
+        <p:spPr>
+          <a:xfrm>
+            <a:off x="6662168" y="6209925"/>
+            <a:ext cx="5021183" cy="45719"/>
+          </a:xfrm>
+          <a:prstGeom prst="rect">
+            <a:avLst/>
+          </a:prstGeom>
+          <a:solidFill>
+            <a:schemeClr val="tx1"/>
+          </a:solidFill>
+          <a:ln>
+            <a:noFill/>
+          </a:ln>
+        </p:spPr>
+        <p:style>
+          <a:lnRef idx="2">
+            <a:schemeClr val="accent1">
+              <a:shade val="50000"/>
+            </a:schemeClr>
+          </a:lnRef>
+          <a:fillRef idx="1">
+            <a:schemeClr val="accent1"/>
+          </a:fillRef>
+          <a:effectRef idx="0">
+            <a:schemeClr val="accent1"/>
+          </a:effectRef>
+          <a:fontRef idx="minor">
+            <a:schemeClr val="lt1"/>
+          </a:fontRef>
+        </p:style>
+        <p:txBody>
+          <a:bodyPr rtlCol="0" anchor="ctr"/>
+          <a:lstStyle/>
+          <a:p>
+            <a:pPr algn="ctr"/>
+            <a:endParaRPr lang="en-US"/>
+          </a:p>
+        </p:txBody>
+      </p:sp>
+      <p:sp useBgFill="1">
+        <p:nvSpPr>
+          <p:cNvPr id="17" name="Rectangle 16">
+            <a:extLst>
+              <a:ext uri="{FF2B5EF4-FFF2-40B4-BE49-F238E27FC236}">
+                <a16:creationId xmlns:a16="http://schemas.microsoft.com/office/drawing/2014/main" id="{C7EFAAB5-34A3-C2FC-70BA-7720CC8ADBAC}"/>
+              </a:ext>
+              <a:ext uri="{C183D7F6-B498-43B3-948B-1728B52AA6E4}">
+                <adec:decorative xmlns:adec="http://schemas.microsoft.com/office/drawing/2017/decorative" val="1"/>
+              </a:ext>
+            </a:extLst>
+          </p:cNvPr>
+          <p:cNvSpPr>
+            <a:spLocks noGrp="1" noRot="1" noChangeAspect="1" noMove="1" noResize="1" noEditPoints="1" noAdjustHandles="1" noChangeArrowheads="1" noChangeShapeType="1" noTextEdit="1"/>
+          </p:cNvSpPr>
+          <p:nvPr>
+            <p:extLst>
+              <p:ext uri="{386F3935-93C4-4BCD-93E2-E3B085C9AB24}">
+                <p16:designElem xmlns:p16="http://schemas.microsoft.com/office/powerpoint/2015/main" val="1"/>
+              </p:ext>
+            </p:extLst>
+          </p:nvPr>
+        </p:nvSpPr>
+        <p:spPr>
+          <a:xfrm>
+            <a:off x="0" y="0"/>
+            <a:ext cx="12192000" cy="6858000"/>
+          </a:xfrm>
+          <a:prstGeom prst="rect">
+            <a:avLst/>
+          </a:prstGeom>
+          <a:ln w="12700" cap="flat" cmpd="sng" algn="ctr">
+            <a:noFill/>
+            <a:prstDash val="solid"/>
+            <a:miter lim="800000"/>
+          </a:ln>
+          <a:effectLst/>
+        </p:spPr>
+        <p:style>
+          <a:lnRef idx="2">
+            <a:schemeClr val="accent1">
+              <a:shade val="15000"/>
+            </a:schemeClr>
+          </a:lnRef>
+          <a:fillRef idx="1">
+            <a:schemeClr val="accent1"/>
+          </a:fillRef>
+          <a:effectRef idx="0">
+            <a:schemeClr val="accent1"/>
+          </a:effectRef>
+          <a:fontRef idx="minor">
+            <a:schemeClr val="lt1"/>
+          </a:fontRef>
+        </p:style>
+        <p:txBody>
+          <a:bodyPr rtlCol="0" anchor="ctr"/>
+          <a:lstStyle/>
+          <a:p>
+            <a:pPr marL="0" marR="0" lvl="0" indent="0" algn="ctr" defTabSz="914400" rtl="0" eaLnBrk="1" fontAlgn="auto" latinLnBrk="0" hangingPunct="1">
+              <a:lnSpc>
+                <a:spcPct val="100000"/>
+              </a:lnSpc>
+              <a:spcBef>
+                <a:spcPts val="0"/>
+              </a:spcBef>
+              <a:spcAft>
+                <a:spcPts val="0"/>
+              </a:spcAft>
+              <a:buClrTx/>
+              <a:buSzTx/>
+              <a:buFontTx/>
+              <a:buNone/>
+              <a:tabLst/>
+              <a:defRPr/>
+            </a:pPr>
+            <a:endParaRPr kumimoji="0" lang="en-US" sz="1800" b="0" i="0" u="none" strike="noStrike" kern="1200" cap="none" spc="0" normalizeH="0" baseline="0" noProof="0">
+              <a:ln>
+                <a:noFill/>
+              </a:ln>
+              <a:solidFill>
+                <a:prstClr val="white"/>
+              </a:solidFill>
+              <a:effectLst/>
+              <a:uLnTx/>
+              <a:uFillTx/>
+              <a:latin typeface="Bierstadt"/>
+              <a:ea typeface="+mn-ea"/>
+              <a:cs typeface="+mn-cs"/>
+            </a:endParaRPr>
+          </a:p>
+        </p:txBody>
+      </p:sp>
+      <p:sp>
+        <p:nvSpPr>
+          <p:cNvPr id="2" name="Title 1">
+            <a:extLst>
+              <a:ext uri="{FF2B5EF4-FFF2-40B4-BE49-F238E27FC236}">
+                <a16:creationId xmlns:a16="http://schemas.microsoft.com/office/drawing/2014/main" id="{88EC1CDD-FD2A-96E4-85A8-AD7825D21F55}"/>
+              </a:ext>
+            </a:extLst>
+          </p:cNvPr>
+          <p:cNvSpPr>
+            <a:spLocks noGrp="1"/>
+          </p:cNvSpPr>
+          <p:nvPr>
+            <p:ph type="title"/>
+          </p:nvPr>
+        </p:nvSpPr>
+        <p:spPr>
+          <a:xfrm>
+            <a:off x="521208" y="1211766"/>
+            <a:ext cx="7237052" cy="4727988"/>
+          </a:xfrm>
+        </p:spPr>
+        <p:txBody>
+          <a:bodyPr vert="horz" lIns="91440" tIns="45720" rIns="91440" bIns="45720" rtlCol="0" anchor="b">
+            <a:normAutofit/>
+          </a:bodyPr>
+          <a:lstStyle/>
+          <a:p>
+            <a:r>
+              <a:rPr lang="en-US" sz="7400"/>
+              <a:t>Big Data</a:t>
+            </a:r>
+          </a:p>
+        </p:txBody>
+      </p:sp>
+      <p:sp>
+        <p:nvSpPr>
+          <p:cNvPr id="19" name="Freeform: Shape 18">
+            <a:extLst>
+              <a:ext uri="{FF2B5EF4-FFF2-40B4-BE49-F238E27FC236}">
+                <a16:creationId xmlns:a16="http://schemas.microsoft.com/office/drawing/2014/main" id="{A8A44BC8-2508-4575-75F6-0ED3F11E721E}"/>
+              </a:ext>
+              <a:ext uri="{C183D7F6-B498-43B3-948B-1728B52AA6E4}">
+                <adec:decorative xmlns:adec="http://schemas.microsoft.com/office/drawing/2017/decorative" val="1"/>
+              </a:ext>
+            </a:extLst>
+          </p:cNvPr>
+          <p:cNvSpPr>
+            <a:spLocks noGrp="1" noRot="1" noChangeAspect="1" noMove="1" noResize="1" noEditPoints="1" noAdjustHandles="1" noChangeArrowheads="1" noChangeShapeType="1" noTextEdit="1"/>
+          </p:cNvSpPr>
+          <p:nvPr>
+            <p:extLst>
+              <p:ext uri="{386F3935-93C4-4BCD-93E2-E3B085C9AB24}">
+                <p16:designElem xmlns:p16="http://schemas.microsoft.com/office/powerpoint/2015/main" val="1"/>
+              </p:ext>
+            </p:extLst>
+          </p:nvPr>
+        </p:nvSpPr>
+        <p:spPr>
+          <a:xfrm>
+            <a:off x="517869" y="6208776"/>
+            <a:ext cx="7269480" cy="149279"/>
+          </a:xfrm>
+          <a:custGeom>
+            <a:avLst/>
+            <a:gdLst>
+              <a:gd name="connsiteX0" fmla="*/ 0 w 8085002"/>
+              <a:gd name="connsiteY0" fmla="*/ 0 h 149279"/>
+              <a:gd name="connsiteX1" fmla="*/ 8085002 w 8085002"/>
+              <a:gd name="connsiteY1" fmla="*/ 0 h 149279"/>
+              <a:gd name="connsiteX2" fmla="*/ 8085002 w 8085002"/>
+              <a:gd name="connsiteY2" fmla="*/ 149279 h 149279"/>
+              <a:gd name="connsiteX3" fmla="*/ 0 w 8085002"/>
+              <a:gd name="connsiteY3" fmla="*/ 149279 h 149279"/>
+            </a:gdLst>
+            <a:ahLst/>
+            <a:cxnLst>
+              <a:cxn ang="0">
+                <a:pos x="connsiteX0" y="connsiteY0"/>
+              </a:cxn>
+              <a:cxn ang="0">
+                <a:pos x="connsiteX1" y="connsiteY1"/>
+              </a:cxn>
+              <a:cxn ang="0">
+                <a:pos x="connsiteX2" y="connsiteY2"/>
+              </a:cxn>
+              <a:cxn ang="0">
+                <a:pos x="connsiteX3" y="connsiteY3"/>
+              </a:cxn>
+            </a:cxnLst>
+            <a:rect l="l" t="t" r="r" b="b"/>
+            <a:pathLst>
+              <a:path w="8085002" h="149279">
+                <a:moveTo>
+                  <a:pt x="0" y="0"/>
+                </a:moveTo>
+                <a:lnTo>
+                  <a:pt x="8085002" y="0"/>
+                </a:lnTo>
+                <a:lnTo>
+                  <a:pt x="8085002" y="149279"/>
+                </a:lnTo>
+                <a:lnTo>
+                  <a:pt x="0" y="149279"/>
+                </a:lnTo>
+                <a:close/>
+              </a:path>
+            </a:pathLst>
+          </a:custGeom>
+          <a:solidFill>
+            <a:schemeClr val="tx1"/>
+          </a:solidFill>
+          <a:ln>
+            <a:noFill/>
+          </a:ln>
+        </p:spPr>
+        <p:style>
+          <a:lnRef idx="2">
+            <a:schemeClr val="accent1">
+              <a:shade val="50000"/>
+            </a:schemeClr>
+          </a:lnRef>
+          <a:fillRef idx="1">
+            <a:schemeClr val="accent1"/>
+          </a:fillRef>
+          <a:effectRef idx="0">
+            <a:schemeClr val="accent1"/>
+          </a:effectRef>
+          <a:fontRef idx="minor">
+            <a:schemeClr val="lt1"/>
+          </a:fontRef>
+        </p:style>
+        <p:txBody>
+          <a:bodyPr wrap="square" rtlCol="0" anchor="ctr">
+            <a:noAutofit/>
+          </a:bodyPr>
+          <a:lstStyle/>
+          <a:p>
+            <a:pPr marL="0" marR="0" lvl="0" indent="0" algn="ctr" defTabSz="914400" rtl="0" eaLnBrk="1" fontAlgn="auto" latinLnBrk="0" hangingPunct="1">
+              <a:lnSpc>
+                <a:spcPct val="100000"/>
+              </a:lnSpc>
+              <a:spcBef>
+                <a:spcPts val="0"/>
+              </a:spcBef>
+              <a:spcAft>
+                <a:spcPts val="0"/>
+              </a:spcAft>
+              <a:buClrTx/>
+              <a:buSzTx/>
+              <a:buFontTx/>
+              <a:buNone/>
+              <a:tabLst/>
+              <a:defRPr/>
+            </a:pPr>
+            <a:endParaRPr kumimoji="0" lang="en-US" sz="1800" b="0" i="0" u="none" strike="noStrike" kern="1200" cap="none" spc="0" normalizeH="0" baseline="0" noProof="0">
+              <a:ln>
+                <a:noFill/>
+              </a:ln>
+              <a:solidFill>
+                <a:prstClr val="white"/>
+              </a:solidFill>
+              <a:effectLst/>
+              <a:uLnTx/>
+              <a:uFillTx/>
+              <a:latin typeface="Bierstadt"/>
+              <a:ea typeface="+mn-ea"/>
+              <a:cs typeface="+mn-cs"/>
+            </a:endParaRPr>
+          </a:p>
+        </p:txBody>
+      </p:sp>
+      <p:sp>
+        <p:nvSpPr>
+          <p:cNvPr id="3" name="Slide Number Placeholder 2">
+            <a:extLst>
+              <a:ext uri="{FF2B5EF4-FFF2-40B4-BE49-F238E27FC236}">
+                <a16:creationId xmlns:a16="http://schemas.microsoft.com/office/drawing/2014/main" id="{DB64F268-9FE2-C905-17E3-19CD2E794942}"/>
+              </a:ext>
+            </a:extLst>
+          </p:cNvPr>
+          <p:cNvSpPr>
+            <a:spLocks noGrp="1"/>
+          </p:cNvSpPr>
+          <p:nvPr>
+            <p:ph type="sldNum" sz="quarter" idx="12"/>
+          </p:nvPr>
+        </p:nvSpPr>
+        <p:spPr/>
+        <p:txBody>
+          <a:bodyPr/>
+          <a:lstStyle/>
+          <a:p>
+            <a:fld id="{DFDF98CC-160E-494C-8C3C-8CDC5FA257DE}" type="slidenum">
+              <a:rPr lang="en-US" smtClean="0"/>
+              <a:t>9</a:t>
+            </a:fld>
+            <a:endParaRPr lang="en-US"/>
+          </a:p>
+        </p:txBody>
+      </p:sp>
+    </p:spTree>
+    <p:extLst>
+      <p:ext uri="{BB962C8B-B14F-4D97-AF65-F5344CB8AC3E}">
+        <p14:creationId xmlns:p14="http://schemas.microsoft.com/office/powerpoint/2010/main" val="3636276435"/>
+      </p:ext>
+    </p:extLst>
+  </p:cSld>
+  <p:clrMapOvr>
+    <a:overrideClrMapping bg1="dk1" tx1="lt1" bg2="dk2" tx2="lt2" accent1="accent1" accent2="accent2" accent3="accent3" accent4="accent4" accent5="accent5" accent6="accent6" hlink="hlink" folHlink="folHlink"/>
+  </p:clrMapOvr>
+  <p:transition>
+    <p:fade/>
+  </p:transition>
+  <p:timing>
+    <p:tnLst>
+      <p:par>
+        <p:cTn id="1" dur="indefinite" restart="never" nodeType="tmRoot">
+          <p:childTnLst>
+            <p:seq concurrent="1" nextAc="seek">
+              <p:cTn id="2" dur="indefinite" nodeType="mainSeq">
+                <p:childTnLst>
+                  <p:par>
+                    <p:cTn id="3" fill="hold">
+                      <p:stCondLst>
+                        <p:cond delay="indefinite"/>
+                        <p:cond evt="onBegin" delay="0">
+                          <p:tn val="2"/>
+                        </p:cond>
+                      </p:stCondLst>
+                      <p:childTnLst>
+                        <p:par>
+                          <p:cTn id="4" fill="hold">
+                            <p:stCondLst>
+                              <p:cond delay="0"/>
+                            </p:stCondLst>
+                            <p:childTnLst>
+                              <p:par>
+                                <p:cTn id="5" presetID="10" presetClass="entr" presetSubtype="0" fill="hold" grpId="0" nodeType="withEffect">
+                                  <p:stCondLst>
+                                    <p:cond delay="500"/>
+                                  </p:stCondLst>
+                                  <p:iterate>
+                                    <p:tmPct val="10000"/>
+                                  </p:iterate>
+                                  <p:childTnLst>
+                                    <p:set>
+                                      <p:cBhvr>
+                                        <p:cTn id="6" dur="1" fill="hold">
+                                          <p:stCondLst>
+                                            <p:cond delay="0"/>
+                                          </p:stCondLst>
+                                        </p:cTn>
+                                        <p:tgtEl>
+                                          <p:spTgt spid="2"/>
+                                        </p:tgtEl>
+                                        <p:attrNameLst>
+                                          <p:attrName>style.visibility</p:attrName>
+                                        </p:attrNameLst>
+                                      </p:cBhvr>
+                                      <p:to>
+                                        <p:strVal val="visible"/>
+                                      </p:to>
+                                    </p:set>
+                                    <p:animEffect transition="in" filter="fade">
+                                      <p:cBhvr>
+                                        <p:cTn id="7" dur="700"/>
+                                        <p:tgtEl>
+                                          <p:spTgt spid="2"/>
+                                        </p:tgtEl>
+                                      </p:cBhvr>
+                                    </p:animEffect>
+                                  </p:childTnLst>
+                                </p:cTn>
+                              </p:par>
+                            </p:childTnLst>
+                          </p:cTn>
+                        </p:par>
+                      </p:childTnLst>
+                    </p:cTn>
+                  </p:par>
+                </p:childTnLst>
+              </p:cTn>
+              <p:prevCondLst>
+                <p:cond evt="onPrev" delay="0">
+                  <p:tgtEl>
+                    <p:sldTgt/>
+                  </p:tgtEl>
+                </p:cond>
+              </p:prevCondLst>
+              <p:nextCondLst>
+                <p:cond evt="onNext" delay="0">
+                  <p:tgtEl>
+                    <p:sldTgt/>
+                  </p:tgtEl>
+                </p:cond>
+              </p:nextCondLst>
+            </p:seq>
+          </p:childTnLst>
+        </p:cTn>
+      </p:par>
+    </p:tnLst>
+    <p:bldLst>
+      <p:bldP spid="2" grpId="0"/>
     </p:bldLst>
   </p:timing>
 </p:sld>
